--- a/Informe_5_Casos_Patrimoniales_Viacha_2026_v2.pptx
+++ b/Informe_5_Casos_Patrimoniales_Viacha_2026_v2.pptx
@@ -17,9 +17,11 @@
     <p:sldId id="265" r:id="rId11"/>
     <p:sldId id="266" r:id="rId12"/>
     <p:sldId id="267" r:id="rId13"/>
+    <p:sldId id="268" r:id="rId14"/>
+    <p:sldId id="269" r:id="rId15"/>
   </p:sldIdLst>
   <p:notesMasterIdLst>
-    <p:notesMasterId r:id="rId14"/>
+    <p:notesMasterId r:id="rId16"/>
   </p:notesMasterIdLst>
   <p:sldSz cx="12192000" cy="6858000"/>
   <p:notesSz cx="6858000" cy="12192000"/>
@@ -1003,7 +1005,7 @@
           <a:p>
             <a:r>
               <a:rPr lang="en-US" dirty="0"/>
-              <a:t>La clasificación de riesgos es una evaluación documental del informe. No equivale a dictamen legal, valuación, certificación de titularidad ni inspección física. La hoja Seguimiento_INCERPAZ.xlsx tiene vacíos los campos de responsable, fecha/estado/acción para estas filas, por lo que no se atribuye responsabilidad ni plazo.</a:t>
+              <a:t>Nivel de avance por caso y documentos fuente, según la información adicional entregada: lista preliminar de DDRR (INCERPAZ 3.docx), Folio Real doc. 1.293.550, trámite 1.997.596, antecedente WANG 1101644, informe de Ariel León (§ III.1, § IV.1), informe documental Roberto Chávez 14/10/2026, mayores de marzo de 2026 y siete planos COM.</a:t>
             </a:r>
             <a:endParaRPr lang="en-US" dirty="0"/>
           </a:p>
@@ -1091,7 +1093,7 @@
           <a:p>
             <a:r>
               <a:rPr lang="en-US" dirty="0"/>
-              <a:t>Las acciones son recomendaciones y no constituyen tareas ya asignadas. No se inventan responsables, presupuesto ni plazos. La matriz de seguimiento existente requiere completar responsable, fecha, estado y acción. La vinculación documental propuesta prioriza folio/cadena, polígono y asiento contable por caso.</a:t>
+              <a:t>Nivel de avance por caso y documentos fuente, según la información adicional entregada: lista preliminar de DDRR (INCERPAZ 3.docx), Folio Real doc. 1.293.550, trámite 1.997.596, antecedente WANG 1101644, informe de Ariel León (§ III.1, § IV.1), informe documental Roberto Chávez 14/10/2026, mayores de marzo de 2026 y siete planos COM.</a:t>
             </a:r>
             <a:endParaRPr lang="en-US" dirty="0"/>
           </a:p>
@@ -1179,7 +1181,7 @@
           <a:p>
             <a:r>
               <a:rPr lang="en-US" dirty="0"/>
-              <a:t>Fuentes consultadas: Matriz_Cruces_Terrenos_Arcilla.xlsx (tab Cruces); MEMORIA_MAESTRA_CLAUDE_DIRECTORIA_GESTION_PATRIMONIAL.md; Informe_documental_terrenos_Roberto_Chavez.docx (14/10/2026); INCERPAZ.docx; Seguimiento_INCERPAZ.xlsx; Ariel León, INFORME TERRENOS ARCILLA INCERPAZ (09/04/2012); fichas/planos municipales COM Contorno Bajo. La conclusión es limitada a la documentación revisada: falta validar folios vigentes, contrato/testimonios, planos certificados, polígonos y asientos contables.</a:t>
+              <a:t>La clasificación de riesgos es una evaluación documental del informe. No equivale a dictamen legal, valuación, certificación de titularidad ni inspección física. La hoja Seguimiento_INCERPAZ.xlsx tiene vacíos los campos de responsable, fecha/estado/acción para estas filas, por lo que no se atribuye responsabilidad ni plazo.</a:t>
             </a:r>
             <a:endParaRPr lang="en-US" dirty="0"/>
           </a:p>
@@ -1203,6 +1205,182 @@
             <a:fld id="{F7021451-1387-4CA6-816F-3879F97B5CBC}" type="slidenum">
               <a:rPr lang="en-US"/>
               <a:t>12</a:t>
+            </a:fld>
+            <a:endParaRPr lang="en-US"/>
+          </a:p>
+        </p:txBody>
+      </p:sp>
+    </p:spTree>
+    <p:extLst>
+      <p:ext uri="{BB962C8B-B14F-4D97-AF65-F5344CB8AC3E}">
+        <p14:creationId xmlns:p14="http://schemas.microsoft.com/office/powerpoint/2010/main" val="1024086991"/>
+      </p:ext>
+    </p:extLst>
+  </p:cSld>
+  <p:clrMapOvr>
+    <a:masterClrMapping/>
+  </p:clrMapOvr>
+</p:notes>
+</file>
+
+<file path=ppt/notesSlides/notesSlide13.xml><?xml version="1.0" encoding="utf-8"?>
+<p:notes xmlns:a="http://schemas.openxmlformats.org/drawingml/2006/main" xmlns:r="http://schemas.openxmlformats.org/officeDocument/2006/relationships" xmlns:p="http://schemas.openxmlformats.org/presentationml/2006/main">
+  <p:cSld>
+    <p:spTree>
+      <p:nvGrpSpPr>
+        <p:cNvPr id="1" name=""/>
+        <p:cNvGrpSpPr/>
+        <p:nvPr/>
+      </p:nvGrpSpPr>
+      <p:grpSpPr>
+        <a:xfrm>
+          <a:off x="0" y="0"/>
+          <a:ext cx="0" cy="0"/>
+          <a:chOff x="0" y="0"/>
+          <a:chExt cx="0" cy="0"/>
+        </a:xfrm>
+      </p:grpSpPr>
+      <p:sp>
+        <p:nvSpPr>
+          <p:cNvPr id="2" name="Slide Image Placeholder 1"/>
+          <p:cNvSpPr>
+            <a:spLocks noGrp="1" noRot="1" noChangeAspect="1"/>
+          </p:cNvSpPr>
+          <p:nvPr>
+            <p:ph type="sldImg"/>
+          </p:nvPr>
+        </p:nvSpPr>
+        <p:spPr/>
+      </p:sp>
+      <p:sp>
+        <p:nvSpPr>
+          <p:cNvPr id="3" name="Notes Placeholder 2"/>
+          <p:cNvSpPr>
+            <a:spLocks noGrp="1"/>
+          </p:cNvSpPr>
+          <p:nvPr>
+            <p:ph type="body" idx="1"/>
+          </p:nvPr>
+        </p:nvSpPr>
+        <p:spPr/>
+        <p:txBody>
+          <a:bodyPr/>
+          <a:lstStyle/>
+          <a:p>
+            <a:r>
+              <a:rPr lang="en-US" dirty="0"/>
+              <a:t>Las acciones son recomendaciones y no constituyen tareas ya asignadas. No se inventan responsables, presupuesto ni plazos. La matriz de seguimiento existente requiere completar responsable, fecha, estado y acción. La vinculación documental propuesta prioriza folio/cadena, polígono y asiento contable por caso.</a:t>
+            </a:r>
+            <a:endParaRPr lang="en-US" dirty="0"/>
+          </a:p>
+        </p:txBody>
+      </p:sp>
+      <p:sp>
+        <p:nvSpPr>
+          <p:cNvPr id="4" name="Slide Number Placeholder 3"/>
+          <p:cNvSpPr>
+            <a:spLocks noGrp="1"/>
+          </p:cNvSpPr>
+          <p:nvPr>
+            <p:ph type="sldNum" sz="quarter" idx="10"/>
+          </p:nvPr>
+        </p:nvSpPr>
+        <p:spPr/>
+        <p:txBody>
+          <a:bodyPr/>
+          <a:lstStyle/>
+          <a:p>
+            <a:fld id="{F7021451-1387-4CA6-816F-3879F97B5CBC}" type="slidenum">
+              <a:rPr lang="en-US"/>
+              <a:t>13</a:t>
+            </a:fld>
+            <a:endParaRPr lang="en-US"/>
+          </a:p>
+        </p:txBody>
+      </p:sp>
+    </p:spTree>
+    <p:extLst>
+      <p:ext uri="{BB962C8B-B14F-4D97-AF65-F5344CB8AC3E}">
+        <p14:creationId xmlns:p14="http://schemas.microsoft.com/office/powerpoint/2010/main" val="1024086991"/>
+      </p:ext>
+    </p:extLst>
+  </p:cSld>
+  <p:clrMapOvr>
+    <a:masterClrMapping/>
+  </p:clrMapOvr>
+</p:notes>
+</file>
+
+<file path=ppt/notesSlides/notesSlide14.xml><?xml version="1.0" encoding="utf-8"?>
+<p:notes xmlns:a="http://schemas.openxmlformats.org/drawingml/2006/main" xmlns:r="http://schemas.openxmlformats.org/officeDocument/2006/relationships" xmlns:p="http://schemas.openxmlformats.org/presentationml/2006/main">
+  <p:cSld>
+    <p:spTree>
+      <p:nvGrpSpPr>
+        <p:cNvPr id="1" name=""/>
+        <p:cNvGrpSpPr/>
+        <p:nvPr/>
+      </p:nvGrpSpPr>
+      <p:grpSpPr>
+        <a:xfrm>
+          <a:off x="0" y="0"/>
+          <a:ext cx="0" cy="0"/>
+          <a:chOff x="0" y="0"/>
+          <a:chExt cx="0" cy="0"/>
+        </a:xfrm>
+      </p:grpSpPr>
+      <p:sp>
+        <p:nvSpPr>
+          <p:cNvPr id="2" name="Slide Image Placeholder 1"/>
+          <p:cNvSpPr>
+            <a:spLocks noGrp="1" noRot="1" noChangeAspect="1"/>
+          </p:cNvSpPr>
+          <p:nvPr>
+            <p:ph type="sldImg"/>
+          </p:nvPr>
+        </p:nvSpPr>
+        <p:spPr/>
+      </p:sp>
+      <p:sp>
+        <p:nvSpPr>
+          <p:cNvPr id="3" name="Notes Placeholder 2"/>
+          <p:cNvSpPr>
+            <a:spLocks noGrp="1"/>
+          </p:cNvSpPr>
+          <p:nvPr>
+            <p:ph type="body" idx="1"/>
+          </p:nvPr>
+        </p:nvSpPr>
+        <p:spPr/>
+        <p:txBody>
+          <a:bodyPr/>
+          <a:lstStyle/>
+          <a:p>
+            <a:r>
+              <a:rPr lang="en-US" dirty="0"/>
+              <a:t>Fuentes consultadas: Matriz_Cruces_Terrenos_Arcilla.xlsx (tab Cruces); MEMORIA_MAESTRA_CLAUDE_DIRECTORIA_GESTION_PATRIMONIAL.md; Informe_documental_terrenos_Roberto_Chavez.docx (14/10/2026); INCERPAZ.docx; Seguimiento_INCERPAZ.xlsx; Ariel León, INFORME TERRENOS ARCILLA INCERPAZ (09/04/2012); fichas/planos municipales COM Contorno Bajo. La conclusión es limitada a la documentación revisada: falta validar folios vigentes, contrato/testimonios, planos certificados, polígonos y asientos contables.</a:t>
+            </a:r>
+            <a:endParaRPr lang="en-US" dirty="0"/>
+          </a:p>
+        </p:txBody>
+      </p:sp>
+      <p:sp>
+        <p:nvSpPr>
+          <p:cNvPr id="4" name="Slide Number Placeholder 3"/>
+          <p:cNvSpPr>
+            <a:spLocks noGrp="1"/>
+          </p:cNvSpPr>
+          <p:nvPr>
+            <p:ph type="sldNum" sz="quarter" idx="10"/>
+          </p:nvPr>
+        </p:nvSpPr>
+        <p:spPr/>
+        <p:txBody>
+          <a:bodyPr/>
+          <a:lstStyle/>
+          <a:p>
+            <a:fld id="{F7021451-1387-4CA6-816F-3879F97B5CBC}" type="slidenum">
+              <a:rPr lang="en-US"/>
+              <a:t>14</a:t>
             </a:fld>
             <a:endParaRPr lang="en-US"/>
           </a:p>
@@ -1443,7 +1621,7 @@
           <a:p>
             <a:r>
               <a:rPr lang="en-US" dirty="0"/>
-              <a:t>Fuente principal: Informe documental de terrenos Roberto Chávez, revisión de Folio Real de fecha 14/10/2026; matrícula 2.08.1.01.0019611, superficie 9,3250 ha, titulares Roberto Chávez Flores 80,42% e INCERPAZ Ltda. 19,572%; dos gravámenes. Las cuotas suman 99,992%, diferencia aritmética de 0,008% pendiente de aclaración. La participación ideal no equivale a polígono físico. La lista preliminar atribuye carga tributaria, sin evidencia suficiente sobre ambos asientos. Verificación inmediata: solicitar Folio Real certificado y actualizado, copia íntegra de gravámenes y plano georreferenciado que conecte matrícula y ubicación.</a:t>
+              <a:t>Fuente principal: Informe documental de terrenos Roberto Chávez, revisión de Folio Real de fecha 14/10/2026; matrícula 2.08.1.01.0019611, superficie 9,3250 ha, titulares Roberto Chávez Flores 80,42% e INCERPAZ Ltda. 19,572%; dos gravámenes. Las cuotas suman 99,992%, diferencia aritmética de 0,008% pendiente de aclaración. La participación ideal no equivale a polígono físico. La lista preliminar atribuye carga tributaria, sin evidencia suficiente sobre ambos asientos. Folio Real documento 1.293.550, trámite 1.997.596, antecedente WANG 1101644; informe documental de terrenos de Roberto Chávez, 14/10/2026, pp. 1–2; mayor cuenta 12102002030. Falta verificar el estado actual del folio. Verificación inmediata: solicitar Folio Real certificado y actualizado, copia íntegra de gravámenes y plano georreferenciado que conecte matrícula y ubicación.</a:t>
             </a:r>
             <a:endParaRPr lang="en-US" dirty="0"/>
           </a:p>
@@ -3039,7 +3217,7 @@
                 <a:ea typeface="Arial" pitchFamily="34" charset="-122"/>
                 <a:cs typeface="Arial" pitchFamily="34" charset="-120"/>
               </a:rPr>
-              <a:t>09 · EVALUACIÓN</a:t>
+              <a:t>09 · NIVEL DE AVANCE Y FUENTES (1/2)</a:t>
             </a:r>
             <a:endParaRPr lang="en-US" sz="1400" dirty="0"/>
           </a:p>
@@ -3078,7 +3256,7 @@
                 <a:ea typeface="Arial" pitchFamily="34" charset="-122"/>
                 <a:cs typeface="Arial" pitchFamily="34" charset="-120"/>
               </a:rPr>
-              <a:t>Riesgos que impiden una conclusión patrimonial</a:t>
+              <a:t>Hallazgo y documentos fuente</a:t>
             </a:r>
             <a:endParaRPr lang="en-US" sz="3200" dirty="0"/>
           </a:p>
@@ -3142,7 +3320,7 @@
                 <a:ea typeface="Arial" pitchFamily="34" charset="-122"/>
                 <a:cs typeface="Arial" pitchFamily="34" charset="-120"/>
               </a:rPr>
-              <a:t>La revisión identifica necesidades de verificación; no emite conclusión jurídica sobre dominio o posesión.</a:t>
+              <a:t>Qué permite afirmar cada caso con el respaldo documental disponible hoy.</a:t>
             </a:r>
             <a:endParaRPr lang="en-US" sz="1400" dirty="0"/>
           </a:p>
@@ -3156,8 +3334,8 @@
         </p:nvSpPr>
         <p:spPr>
           <a:xfrm>
-            <a:off x="457200" y="1920240"/>
-            <a:ext cx="11274552" cy="804672"/>
+            <a:off x="457200" y="1874520"/>
+            <a:ext cx="11274552" cy="1371600"/>
           </a:xfrm>
           <a:prstGeom prst="rect">
             <a:avLst/>
@@ -3188,18 +3366,18 @@
         </p:nvSpPr>
         <p:spPr>
           <a:xfrm>
-            <a:off x="457200" y="1920240"/>
-            <a:ext cx="73152" cy="804672"/>
+            <a:off x="457200" y="1874520"/>
+            <a:ext cx="73152" cy="1371600"/>
           </a:xfrm>
           <a:prstGeom prst="rect">
             <a:avLst/>
           </a:prstGeom>
           <a:solidFill>
-            <a:srgbClr val="C79A45"/>
+            <a:srgbClr val="2F6B4F"/>
           </a:solidFill>
           <a:ln w="12700">
             <a:solidFill>
-              <a:srgbClr val="C79A45"/>
+              <a:srgbClr val="2F6B4F"/>
             </a:solidFill>
             <a:prstDash val="solid"/>
           </a:ln>
@@ -3207,63 +3385,24 @@
       </p:sp>
       <p:sp>
         <p:nvSpPr>
-          <p:cNvPr id="8" name="Text 6"/>
-          <p:cNvSpPr txBox="1"/>
-          <p:nvPr/>
-        </p:nvSpPr>
-        <p:spPr>
-          <a:xfrm>
-            <a:off x="731520" y="1920240"/>
-            <a:ext cx="3291840" cy="804672"/>
-          </a:xfrm>
-          <a:prstGeom prst="rect">
-            <a:avLst/>
-          </a:prstGeom>
-          <a:noFill/>
-          <a:ln/>
-        </p:spPr>
-        <p:txBody>
-          <a:bodyPr wrap="square" lIns="0" tIns="0" rIns="0" bIns="0" rtlCol="0" anchor="ctr"/>
-          <a:lstStyle/>
-          <a:p>
-            <a:pPr indent="0" marL="0">
-              <a:buNone/>
-            </a:pPr>
-            <a:r>
-              <a:rPr lang="en-US" sz="1600" b="1" dirty="0">
-                <a:solidFill>
-                  <a:srgbClr val="1B2126"/>
-                </a:solidFill>
-                <a:latin typeface="Arial" pitchFamily="34" charset="0"/>
-                <a:ea typeface="Arial" pitchFamily="34" charset="-122"/>
-                <a:cs typeface="Arial" pitchFamily="34" charset="-120"/>
-              </a:rPr>
-              <a:t>Titularidad y vigencia</a:t>
-            </a:r>
-            <a:endParaRPr lang="en-US" sz="1600" dirty="0"/>
-          </a:p>
-        </p:txBody>
-      </p:sp>
-      <p:sp>
-        <p:nvSpPr>
-          <p:cNvPr id="9" name="Shape 7"/>
+          <p:cNvPr id="8" name="Shape 6"/>
           <p:cNvSpPr/>
           <p:nvPr/>
         </p:nvSpPr>
         <p:spPr>
           <a:xfrm>
-            <a:off x="4114800" y="2176272"/>
-            <a:ext cx="1097280" cy="292608"/>
+            <a:off x="731520" y="2057400"/>
+            <a:ext cx="2286000" cy="292608"/>
           </a:xfrm>
           <a:prstGeom prst="rect">
             <a:avLst/>
           </a:prstGeom>
           <a:solidFill>
-            <a:srgbClr val="C79A45"/>
+            <a:srgbClr val="2F6B4F"/>
           </a:solidFill>
           <a:ln w="12700">
             <a:solidFill>
-              <a:srgbClr val="C79A45"/>
+              <a:srgbClr val="2F6B4F"/>
             </a:solidFill>
             <a:prstDash val="solid"/>
           </a:ln>
@@ -3271,40 +3410,79 @@
       </p:sp>
       <p:sp>
         <p:nvSpPr>
+          <p:cNvPr id="9" name="Text 7"/>
+          <p:cNvSpPr txBox="1"/>
+          <p:nvPr/>
+        </p:nvSpPr>
+        <p:spPr>
+          <a:xfrm>
+            <a:off x="731520" y="2057400"/>
+            <a:ext cx="2286000" cy="292608"/>
+          </a:xfrm>
+          <a:prstGeom prst="rect">
+            <a:avLst/>
+          </a:prstGeom>
+          <a:noFill/>
+          <a:ln/>
+        </p:spPr>
+        <p:txBody>
+          <a:bodyPr wrap="square" lIns="0" tIns="0" rIns="0" bIns="0" rtlCol="0" anchor="ctr"/>
+          <a:lstStyle/>
+          <a:p>
+            <a:pPr algn="ctr" indent="0" marL="0">
+              <a:buNone/>
+            </a:pPr>
+            <a:r>
+              <a:rPr lang="en-US" sz="900" b="1" spc="50" kern="0" dirty="0">
+                <a:solidFill>
+                  <a:srgbClr val="FFFFFF"/>
+                </a:solidFill>
+                <a:latin typeface="Arial" pitchFamily="34" charset="0"/>
+                <a:ea typeface="Arial" pitchFamily="34" charset="-122"/>
+                <a:cs typeface="Arial" pitchFamily="34" charset="-120"/>
+              </a:rPr>
+              <a:t>HALLAZGO REGISTRAL</a:t>
+            </a:r>
+            <a:endParaRPr lang="en-US" sz="900" dirty="0"/>
+          </a:p>
+        </p:txBody>
+      </p:sp>
+      <p:sp>
+        <p:nvSpPr>
           <p:cNvPr id="10" name="Text 8"/>
           <p:cNvSpPr txBox="1"/>
           <p:nvPr/>
         </p:nvSpPr>
         <p:spPr>
           <a:xfrm>
-            <a:off x="4114800" y="2176272"/>
-            <a:ext cx="1097280" cy="292608"/>
-          </a:xfrm>
-          <a:prstGeom prst="rect">
-            <a:avLst/>
-          </a:prstGeom>
-          <a:noFill/>
-          <a:ln/>
-        </p:spPr>
-        <p:txBody>
-          <a:bodyPr wrap="square" lIns="0" tIns="0" rIns="0" bIns="0" rtlCol="0" anchor="ctr"/>
-          <a:lstStyle/>
-          <a:p>
-            <a:pPr algn="ctr" indent="0" marL="0">
-              <a:buNone/>
-            </a:pPr>
-            <a:r>
-              <a:rPr lang="en-US" sz="1000" b="1" spc="50" kern="0" dirty="0">
-                <a:solidFill>
-                  <a:srgbClr val="FFFFFF"/>
-                </a:solidFill>
-                <a:latin typeface="Arial" pitchFamily="34" charset="0"/>
-                <a:ea typeface="Arial" pitchFamily="34" charset="-122"/>
-                <a:cs typeface="Arial" pitchFamily="34" charset="-120"/>
-              </a:rPr>
-              <a:t>ALTA</a:t>
-            </a:r>
-            <a:endParaRPr lang="en-US" sz="1000" dirty="0"/>
+            <a:off x="731520" y="2468880"/>
+            <a:ext cx="2331720" cy="685800"/>
+          </a:xfrm>
+          <a:prstGeom prst="rect">
+            <a:avLst/>
+          </a:prstGeom>
+          <a:noFill/>
+          <a:ln/>
+        </p:spPr>
+        <p:txBody>
+          <a:bodyPr wrap="square" lIns="0" tIns="0" rIns="0" bIns="0" rtlCol="0" anchor="t"/>
+          <a:lstStyle/>
+          <a:p>
+            <a:pPr indent="0" marL="0">
+              <a:buNone/>
+            </a:pPr>
+            <a:r>
+              <a:rPr lang="en-US" sz="1500" b="1" dirty="0">
+                <a:solidFill>
+                  <a:srgbClr val="1B2126"/>
+                </a:solidFill>
+                <a:latin typeface="Arial" pitchFamily="34" charset="0"/>
+                <a:ea typeface="Arial" pitchFamily="34" charset="-122"/>
+                <a:cs typeface="Arial" pitchFamily="34" charset="-120"/>
+              </a:rPr>
+              <a:t>Chávez Roberto II</a:t>
+            </a:r>
+            <a:endParaRPr lang="en-US" sz="1500" dirty="0"/>
           </a:p>
         </p:txBody>
       </p:sp>
@@ -3316,17 +3494,17 @@
         </p:nvSpPr>
         <p:spPr>
           <a:xfrm>
-            <a:off x="5486400" y="1920240"/>
-            <a:ext cx="6035040" cy="804672"/>
-          </a:xfrm>
-          <a:prstGeom prst="rect">
-            <a:avLst/>
-          </a:prstGeom>
-          <a:noFill/>
-          <a:ln/>
-        </p:spPr>
-        <p:txBody>
-          <a:bodyPr wrap="square" lIns="0" tIns="0" rIns="0" bIns="0" rtlCol="0" anchor="ctr"/>
+            <a:off x="3383280" y="1984248"/>
+            <a:ext cx="8183880" cy="713232"/>
+          </a:xfrm>
+          <a:prstGeom prst="rect">
+            <a:avLst/>
+          </a:prstGeom>
+          <a:noFill/>
+          <a:ln/>
+        </p:spPr>
+        <p:txBody>
+          <a:bodyPr wrap="square" lIns="0" tIns="0" rIns="0" bIns="0" rtlCol="0" anchor="t"/>
           <a:lstStyle/>
           <a:p>
             <a:pPr indent="0" marL="0">
@@ -3335,13 +3513,13 @@
             <a:r>
               <a:rPr lang="en-US" sz="1300" dirty="0">
                 <a:solidFill>
-                  <a:srgbClr val="3A444C"/>
-                </a:solidFill>
-                <a:latin typeface="Arial" pitchFamily="34" charset="0"/>
-                <a:ea typeface="Arial" pitchFamily="34" charset="-122"/>
-                <a:cs typeface="Arial" pitchFamily="34" charset="-120"/>
-              </a:rPr>
-              <a:t>Solo Chávez tiene folio revisado en los documentos disponibles; los demás dependen de referencias y copias.</a:t>
+                  <a:srgbClr val="2C353C"/>
+                </a:solidFill>
+                <a:latin typeface="Arial" pitchFamily="34" charset="0"/>
+                <a:ea typeface="Arial" pitchFamily="34" charset="-122"/>
+                <a:cs typeface="Arial" pitchFamily="34" charset="-120"/>
+              </a:rPr>
+              <a:t>La matrícula 2.08.1.01.0019611 registra 9,3250 ha. En el folio revisado constan Roberto Chávez Flores (80,42 %) e INCERPAZ Ltda. (19,572 %), además de dos gravámenes. Los porcentajes suman 99,992 %; falta aclarar la diferencia y verificar el estado actual del folio.</a:t>
             </a:r>
             <a:endParaRPr lang="en-US" sz="1300" dirty="0"/>
           </a:p>
@@ -3355,8 +3533,86 @@
         </p:nvSpPr>
         <p:spPr>
           <a:xfrm>
-            <a:off x="457200" y="2834640"/>
-            <a:ext cx="11274552" cy="804672"/>
+            <a:off x="3383280" y="2724912"/>
+            <a:ext cx="8183880" cy="13716"/>
+          </a:xfrm>
+          <a:prstGeom prst="rect">
+            <a:avLst/>
+          </a:prstGeom>
+          <a:solidFill>
+            <a:srgbClr val="E1E4E7"/>
+          </a:solidFill>
+          <a:ln w="12700">
+            <a:solidFill>
+              <a:srgbClr val="E1E4E7"/>
+            </a:solidFill>
+            <a:prstDash val="solid"/>
+          </a:ln>
+        </p:spPr>
+      </p:sp>
+      <p:sp>
+        <p:nvSpPr>
+          <p:cNvPr id="13" name="Text 11"/>
+          <p:cNvSpPr txBox="1"/>
+          <p:nvPr/>
+        </p:nvSpPr>
+        <p:spPr>
+          <a:xfrm>
+            <a:off x="3383280" y="2770632"/>
+            <a:ext cx="8183880" cy="457200"/>
+          </a:xfrm>
+          <a:prstGeom prst="rect">
+            <a:avLst/>
+          </a:prstGeom>
+          <a:noFill/>
+          <a:ln/>
+        </p:spPr>
+        <p:txBody>
+          <a:bodyPr wrap="square" lIns="0" tIns="0" rIns="0" bIns="0" rtlCol="0" anchor="ctr"/>
+          <a:lstStyle/>
+          <a:p>
+            <a:pPr indent="0" marL="0">
+              <a:buNone/>
+            </a:pPr>
+            <a:r>
+              <a:rPr lang="en-US" sz="1000" b="1" dirty="0">
+                <a:solidFill>
+                  <a:srgbClr val="8A6420"/>
+                </a:solidFill>
+                <a:latin typeface="Arial" pitchFamily="34" charset="0"/>
+                <a:ea typeface="Arial" pitchFamily="34" charset="-122"/>
+                <a:cs typeface="Arial" pitchFamily="34" charset="-120"/>
+              </a:rPr>
+              <a:t>FUENTES  </a:t>
+            </a:r>
+            <a:pPr indent="0" marL="0">
+              <a:buNone/>
+            </a:pPr>
+            <a:r>
+              <a:rPr lang="en-US" sz="1100" dirty="0">
+                <a:solidFill>
+                  <a:srgbClr val="5F6A73"/>
+                </a:solidFill>
+                <a:latin typeface="Arial" pitchFamily="34" charset="0"/>
+                <a:ea typeface="Arial" pitchFamily="34" charset="-122"/>
+                <a:cs typeface="Arial" pitchFamily="34" charset="-120"/>
+              </a:rPr>
+              <a:t>Lista preliminar de DDRR, INCERPAZ 3.docx; Folio Real, documento 1.293.550, trámite 1.997.596, antecedente WANG 1101644; informe documental de terrenos de Roberto Chávez, 14/10/2026, pp. 1–2; mayor, cuenta 12102002030.</a:t>
+            </a:r>
+            <a:endParaRPr lang="en-US" sz="1400" dirty="0"/>
+          </a:p>
+        </p:txBody>
+      </p:sp>
+      <p:sp>
+        <p:nvSpPr>
+          <p:cNvPr id="14" name="Shape 12"/>
+          <p:cNvSpPr/>
+          <p:nvPr/>
+        </p:nvSpPr>
+        <p:spPr>
+          <a:xfrm>
+            <a:off x="457200" y="3355848"/>
+            <a:ext cx="11274552" cy="1371600"/>
           </a:xfrm>
           <a:prstGeom prst="rect">
             <a:avLst/>
@@ -3381,24 +3637,24 @@
       </p:sp>
       <p:sp>
         <p:nvSpPr>
-          <p:cNvPr id="13" name="Shape 11"/>
+          <p:cNvPr id="15" name="Shape 13"/>
           <p:cNvSpPr/>
           <p:nvPr/>
         </p:nvSpPr>
         <p:spPr>
           <a:xfrm>
-            <a:off x="457200" y="2834640"/>
-            <a:ext cx="73152" cy="804672"/>
+            <a:off x="457200" y="3355848"/>
+            <a:ext cx="73152" cy="1371600"/>
           </a:xfrm>
           <a:prstGeom prst="rect">
             <a:avLst/>
           </a:prstGeom>
           <a:solidFill>
-            <a:srgbClr val="B23A3A"/>
+            <a:srgbClr val="C79A45"/>
           </a:solidFill>
           <a:ln w="12700">
             <a:solidFill>
-              <a:srgbClr val="B23A3A"/>
+              <a:srgbClr val="C79A45"/>
             </a:solidFill>
             <a:prstDash val="solid"/>
           </a:ln>
@@ -3406,63 +3662,24 @@
       </p:sp>
       <p:sp>
         <p:nvSpPr>
-          <p:cNvPr id="14" name="Text 12"/>
-          <p:cNvSpPr txBox="1"/>
-          <p:nvPr/>
-        </p:nvSpPr>
-        <p:spPr>
-          <a:xfrm>
-            <a:off x="731520" y="2834640"/>
-            <a:ext cx="3291840" cy="804672"/>
-          </a:xfrm>
-          <a:prstGeom prst="rect">
-            <a:avLst/>
-          </a:prstGeom>
-          <a:noFill/>
-          <a:ln/>
-        </p:spPr>
-        <p:txBody>
-          <a:bodyPr wrap="square" lIns="0" tIns="0" rIns="0" bIns="0" rtlCol="0" anchor="ctr"/>
-          <a:lstStyle/>
-          <a:p>
-            <a:pPr indent="0" marL="0">
-              <a:buNone/>
-            </a:pPr>
-            <a:r>
-              <a:rPr lang="en-US" sz="1600" b="1" dirty="0">
-                <a:solidFill>
-                  <a:srgbClr val="1B2126"/>
-                </a:solidFill>
-                <a:latin typeface="Arial" pitchFamily="34" charset="0"/>
-                <a:ea typeface="Arial" pitchFamily="34" charset="-122"/>
-                <a:cs typeface="Arial" pitchFamily="34" charset="-120"/>
-              </a:rPr>
-              <a:t>Identidad física y superficie</a:t>
-            </a:r>
-            <a:endParaRPr lang="en-US" sz="1600" dirty="0"/>
-          </a:p>
-        </p:txBody>
-      </p:sp>
-      <p:sp>
-        <p:nvSpPr>
-          <p:cNvPr id="15" name="Shape 13"/>
+          <p:cNvPr id="16" name="Shape 14"/>
           <p:cNvSpPr/>
           <p:nvPr/>
         </p:nvSpPr>
         <p:spPr>
           <a:xfrm>
-            <a:off x="4114800" y="3090672"/>
-            <a:ext cx="1097280" cy="292608"/>
+            <a:off x="731520" y="3538728"/>
+            <a:ext cx="2286000" cy="292608"/>
           </a:xfrm>
           <a:prstGeom prst="rect">
             <a:avLst/>
           </a:prstGeom>
           <a:solidFill>
-            <a:srgbClr val="B23A3A"/>
+            <a:srgbClr val="C79A45"/>
           </a:solidFill>
           <a:ln w="12700">
             <a:solidFill>
-              <a:srgbClr val="B23A3A"/>
+              <a:srgbClr val="C79A45"/>
             </a:solidFill>
             <a:prstDash val="solid"/>
           </a:ln>
@@ -3470,14 +3687,14 @@
       </p:sp>
       <p:sp>
         <p:nvSpPr>
-          <p:cNvPr id="16" name="Text 14"/>
-          <p:cNvSpPr txBox="1"/>
-          <p:nvPr/>
-        </p:nvSpPr>
-        <p:spPr>
-          <a:xfrm>
-            <a:off x="4114800" y="3090672"/>
-            <a:ext cx="1097280" cy="292608"/>
+          <p:cNvPr id="17" name="Text 15"/>
+          <p:cNvSpPr txBox="1"/>
+          <p:nvPr/>
+        </p:nvSpPr>
+        <p:spPr>
+          <a:xfrm>
+            <a:off x="731520" y="3538728"/>
+            <a:ext cx="2286000" cy="292608"/>
           </a:xfrm>
           <a:prstGeom prst="rect">
             <a:avLst/>
@@ -3493,7 +3710,7 @@
               <a:buNone/>
             </a:pPr>
             <a:r>
-              <a:rPr lang="en-US" sz="1000" b="1" spc="50" kern="0" dirty="0">
+              <a:rPr lang="en-US" sz="900" b="1" spc="50" kern="0" dirty="0">
                 <a:solidFill>
                   <a:srgbClr val="FFFFFF"/>
                 </a:solidFill>
@@ -3501,22 +3718,125 @@
                 <a:ea typeface="Arial" pitchFamily="34" charset="-122"/>
                 <a:cs typeface="Arial" pitchFamily="34" charset="-120"/>
               </a:rPr>
-              <a:t>CRÍTICA</a:t>
-            </a:r>
-            <a:endParaRPr lang="en-US" sz="1000" dirty="0"/>
-          </a:p>
-        </p:txBody>
-      </p:sp>
-      <p:sp>
-        <p:nvSpPr>
-          <p:cNvPr id="17" name="Text 15"/>
-          <p:cNvSpPr txBox="1"/>
-          <p:nvPr/>
-        </p:nvSpPr>
-        <p:spPr>
-          <a:xfrm>
-            <a:off x="5486400" y="2834640"/>
-            <a:ext cx="6035040" cy="804672"/>
+              <a:t>CRUCE DOCUMENTAL PENDIENTE</a:t>
+            </a:r>
+            <a:endParaRPr lang="en-US" sz="900" dirty="0"/>
+          </a:p>
+        </p:txBody>
+      </p:sp>
+      <p:sp>
+        <p:nvSpPr>
+          <p:cNvPr id="18" name="Text 16"/>
+          <p:cNvSpPr txBox="1"/>
+          <p:nvPr/>
+        </p:nvSpPr>
+        <p:spPr>
+          <a:xfrm>
+            <a:off x="731520" y="3950208"/>
+            <a:ext cx="2331720" cy="685800"/>
+          </a:xfrm>
+          <a:prstGeom prst="rect">
+            <a:avLst/>
+          </a:prstGeom>
+          <a:noFill/>
+          <a:ln/>
+        </p:spPr>
+        <p:txBody>
+          <a:bodyPr wrap="square" lIns="0" tIns="0" rIns="0" bIns="0" rtlCol="0" anchor="t"/>
+          <a:lstStyle/>
+          <a:p>
+            <a:pPr indent="0" marL="0">
+              <a:buNone/>
+            </a:pPr>
+            <a:r>
+              <a:rPr lang="en-US" sz="1500" b="1" dirty="0">
+                <a:solidFill>
+                  <a:srgbClr val="1B2126"/>
+                </a:solidFill>
+                <a:latin typeface="Arial" pitchFamily="34" charset="0"/>
+                <a:ea typeface="Arial" pitchFamily="34" charset="-122"/>
+                <a:cs typeface="Arial" pitchFamily="34" charset="-120"/>
+              </a:rPr>
+              <a:t>Martha Quispe Ali</a:t>
+            </a:r>
+            <a:endParaRPr lang="en-US" sz="1500" dirty="0"/>
+          </a:p>
+        </p:txBody>
+      </p:sp>
+      <p:sp>
+        <p:nvSpPr>
+          <p:cNvPr id="19" name="Text 17"/>
+          <p:cNvSpPr txBox="1"/>
+          <p:nvPr/>
+        </p:nvSpPr>
+        <p:spPr>
+          <a:xfrm>
+            <a:off x="3383280" y="3465576"/>
+            <a:ext cx="8183880" cy="713232"/>
+          </a:xfrm>
+          <a:prstGeom prst="rect">
+            <a:avLst/>
+          </a:prstGeom>
+          <a:noFill/>
+          <a:ln/>
+        </p:spPr>
+        <p:txBody>
+          <a:bodyPr wrap="square" lIns="0" tIns="0" rIns="0" bIns="0" rtlCol="0" anchor="t"/>
+          <a:lstStyle/>
+          <a:p>
+            <a:pPr indent="0" marL="0">
+              <a:buNone/>
+            </a:pPr>
+            <a:r>
+              <a:rPr lang="en-US" sz="1300" dirty="0">
+                <a:solidFill>
+                  <a:srgbClr val="2C353C"/>
+                </a:solidFill>
+                <a:latin typeface="Arial" pitchFamily="34" charset="0"/>
+                <a:ea typeface="Arial" pitchFamily="34" charset="-122"/>
+                <a:cs typeface="Arial" pitchFamily="34" charset="-120"/>
+              </a:rPr>
+              <a:t>El informe cita el Testimonio 914/93. La lista preliminar registra cuatro matrículas con una suma nominal de 13,3570 ha. Falta comprobar los folios y su relación con ese testimonio.</a:t>
+            </a:r>
+            <a:endParaRPr lang="en-US" sz="1300" dirty="0"/>
+          </a:p>
+        </p:txBody>
+      </p:sp>
+      <p:sp>
+        <p:nvSpPr>
+          <p:cNvPr id="20" name="Shape 18"/>
+          <p:cNvSpPr/>
+          <p:nvPr/>
+        </p:nvSpPr>
+        <p:spPr>
+          <a:xfrm>
+            <a:off x="3383280" y="4206240"/>
+            <a:ext cx="8183880" cy="13716"/>
+          </a:xfrm>
+          <a:prstGeom prst="rect">
+            <a:avLst/>
+          </a:prstGeom>
+          <a:solidFill>
+            <a:srgbClr val="E1E4E7"/>
+          </a:solidFill>
+          <a:ln w="12700">
+            <a:solidFill>
+              <a:srgbClr val="E1E4E7"/>
+            </a:solidFill>
+            <a:prstDash val="solid"/>
+          </a:ln>
+        </p:spPr>
+      </p:sp>
+      <p:sp>
+        <p:nvSpPr>
+          <p:cNvPr id="21" name="Text 19"/>
+          <p:cNvSpPr txBox="1"/>
+          <p:nvPr/>
+        </p:nvSpPr>
+        <p:spPr>
+          <a:xfrm>
+            <a:off x="3383280" y="4251960"/>
+            <a:ext cx="8183880" cy="457200"/>
           </a:xfrm>
           <a:prstGeom prst="rect">
             <a:avLst/>
@@ -3532,30 +3852,44 @@
               <a:buNone/>
             </a:pPr>
             <a:r>
-              <a:rPr lang="en-US" sz="1300" dirty="0">
-                <a:solidFill>
-                  <a:srgbClr val="3A444C"/>
-                </a:solidFill>
-                <a:latin typeface="Arial" pitchFamily="34" charset="0"/>
-                <a:ea typeface="Arial" pitchFamily="34" charset="-122"/>
-                <a:cs typeface="Arial" pitchFamily="34" charset="-120"/>
-              </a:rPr>
-              <a:t>Falta ligar matrícula, plano y polígono levantado; Antonio presenta una diferencia aritmética relevante.</a:t>
-            </a:r>
-            <a:endParaRPr lang="en-US" sz="1300" dirty="0"/>
-          </a:p>
-        </p:txBody>
-      </p:sp>
-      <p:sp>
-        <p:nvSpPr>
-          <p:cNvPr id="18" name="Shape 16"/>
+              <a:rPr lang="en-US" sz="1000" b="1" dirty="0">
+                <a:solidFill>
+                  <a:srgbClr val="8A6420"/>
+                </a:solidFill>
+                <a:latin typeface="Arial" pitchFamily="34" charset="0"/>
+                <a:ea typeface="Arial" pitchFamily="34" charset="-122"/>
+                <a:cs typeface="Arial" pitchFamily="34" charset="-120"/>
+              </a:rPr>
+              <a:t>FUENTES  </a:t>
+            </a:r>
+            <a:pPr indent="0" marL="0">
+              <a:buNone/>
+            </a:pPr>
+            <a:r>
+              <a:rPr lang="en-US" sz="1100" dirty="0">
+                <a:solidFill>
+                  <a:srgbClr val="5F6A73"/>
+                </a:solidFill>
+                <a:latin typeface="Arial" pitchFamily="34" charset="0"/>
+                <a:ea typeface="Arial" pitchFamily="34" charset="-122"/>
+                <a:cs typeface="Arial" pitchFamily="34" charset="-120"/>
+              </a:rPr>
+              <a:t>Informe de Ariel León, § IV.1, Test. 914/93; lista preliminar de DDRR, INCERPAZ 3.docx, matrículas 2.08.0.10.0002628, 0002626, 0002627 y 01209179.</a:t>
+            </a:r>
+            <a:endParaRPr lang="en-US" sz="1400" dirty="0"/>
+          </a:p>
+        </p:txBody>
+      </p:sp>
+      <p:sp>
+        <p:nvSpPr>
+          <p:cNvPr id="22" name="Shape 20"/>
           <p:cNvSpPr/>
           <p:nvPr/>
         </p:nvSpPr>
         <p:spPr>
           <a:xfrm>
-            <a:off x="457200" y="3749040"/>
-            <a:ext cx="11274552" cy="804672"/>
+            <a:off x="457200" y="4837176"/>
+            <a:ext cx="11274552" cy="1371600"/>
           </a:xfrm>
           <a:prstGeom prst="rect">
             <a:avLst/>
@@ -3580,14 +3914,14 @@
       </p:sp>
       <p:sp>
         <p:nvSpPr>
-          <p:cNvPr id="19" name="Shape 17"/>
+          <p:cNvPr id="23" name="Shape 21"/>
           <p:cNvSpPr/>
           <p:nvPr/>
         </p:nvSpPr>
         <p:spPr>
           <a:xfrm>
-            <a:off x="457200" y="3749040"/>
-            <a:ext cx="73152" cy="804672"/>
+            <a:off x="457200" y="4837176"/>
+            <a:ext cx="73152" cy="1371600"/>
           </a:xfrm>
           <a:prstGeom prst="rect">
             <a:avLst/>
@@ -3605,53 +3939,14 @@
       </p:sp>
       <p:sp>
         <p:nvSpPr>
-          <p:cNvPr id="20" name="Text 18"/>
-          <p:cNvSpPr txBox="1"/>
-          <p:nvPr/>
-        </p:nvSpPr>
-        <p:spPr>
-          <a:xfrm>
-            <a:off x="731520" y="3749040"/>
-            <a:ext cx="3291840" cy="804672"/>
-          </a:xfrm>
-          <a:prstGeom prst="rect">
-            <a:avLst/>
-          </a:prstGeom>
-          <a:noFill/>
-          <a:ln/>
-        </p:spPr>
-        <p:txBody>
-          <a:bodyPr wrap="square" lIns="0" tIns="0" rIns="0" bIns="0" rtlCol="0" anchor="ctr"/>
-          <a:lstStyle/>
-          <a:p>
-            <a:pPr indent="0" marL="0">
-              <a:buNone/>
-            </a:pPr>
-            <a:r>
-              <a:rPr lang="en-US" sz="1600" b="1" dirty="0">
-                <a:solidFill>
-                  <a:srgbClr val="1B2126"/>
-                </a:solidFill>
-                <a:latin typeface="Arial" pitchFamily="34" charset="0"/>
-                <a:ea typeface="Arial" pitchFamily="34" charset="-122"/>
-                <a:cs typeface="Arial" pitchFamily="34" charset="-120"/>
-              </a:rPr>
-              <a:t>Individualización / duplicidad</a:t>
-            </a:r>
-            <a:endParaRPr lang="en-US" sz="1600" dirty="0"/>
-          </a:p>
-        </p:txBody>
-      </p:sp>
-      <p:sp>
-        <p:nvSpPr>
-          <p:cNvPr id="21" name="Shape 19"/>
+          <p:cNvPr id="24" name="Shape 22"/>
           <p:cNvSpPr/>
           <p:nvPr/>
         </p:nvSpPr>
         <p:spPr>
           <a:xfrm>
-            <a:off x="4114800" y="4005072"/>
-            <a:ext cx="1097280" cy="292608"/>
+            <a:off x="731520" y="5020056"/>
+            <a:ext cx="2286000" cy="292608"/>
           </a:xfrm>
           <a:prstGeom prst="rect">
             <a:avLst/>
@@ -3669,14 +3964,14 @@
       </p:sp>
       <p:sp>
         <p:nvSpPr>
-          <p:cNvPr id="22" name="Text 20"/>
-          <p:cNvSpPr txBox="1"/>
-          <p:nvPr/>
-        </p:nvSpPr>
-        <p:spPr>
-          <a:xfrm>
-            <a:off x="4114800" y="4005072"/>
-            <a:ext cx="1097280" cy="292608"/>
+          <p:cNvPr id="25" name="Text 23"/>
+          <p:cNvSpPr txBox="1"/>
+          <p:nvPr/>
+        </p:nvSpPr>
+        <p:spPr>
+          <a:xfrm>
+            <a:off x="731520" y="5020056"/>
+            <a:ext cx="2286000" cy="292608"/>
           </a:xfrm>
           <a:prstGeom prst="rect">
             <a:avLst/>
@@ -3692,7 +3987,7 @@
               <a:buNone/>
             </a:pPr>
             <a:r>
-              <a:rPr lang="en-US" sz="1000" b="1" spc="50" kern="0" dirty="0">
+              <a:rPr lang="en-US" sz="900" b="1" spc="50" kern="0" dirty="0">
                 <a:solidFill>
                   <a:srgbClr val="FFFFFF"/>
                 </a:solidFill>
@@ -3700,31 +3995,70 @@
                 <a:ea typeface="Arial" pitchFamily="34" charset="-122"/>
                 <a:cs typeface="Arial" pitchFamily="34" charset="-120"/>
               </a:rPr>
-              <a:t>ALTA</a:t>
-            </a:r>
-            <a:endParaRPr lang="en-US" sz="1000" dirty="0"/>
-          </a:p>
-        </p:txBody>
-      </p:sp>
-      <p:sp>
-        <p:nvSpPr>
-          <p:cNvPr id="23" name="Text 21"/>
-          <p:cNvSpPr txBox="1"/>
-          <p:nvPr/>
-        </p:nvSpPr>
-        <p:spPr>
-          <a:xfrm>
-            <a:off x="5486400" y="3749040"/>
-            <a:ext cx="6035040" cy="804672"/>
-          </a:xfrm>
-          <a:prstGeom prst="rect">
-            <a:avLst/>
-          </a:prstGeom>
-          <a:noFill/>
-          <a:ln/>
-        </p:spPr>
-        <p:txBody>
-          <a:bodyPr wrap="square" lIns="0" tIns="0" rIns="0" bIns="0" rtlCol="0" anchor="ctr"/>
+              <a:t>CRUCE DOCUMENTAL PENDIENTE</a:t>
+            </a:r>
+            <a:endParaRPr lang="en-US" sz="900" dirty="0"/>
+          </a:p>
+        </p:txBody>
+      </p:sp>
+      <p:sp>
+        <p:nvSpPr>
+          <p:cNvPr id="26" name="Text 24"/>
+          <p:cNvSpPr txBox="1"/>
+          <p:nvPr/>
+        </p:nvSpPr>
+        <p:spPr>
+          <a:xfrm>
+            <a:off x="731520" y="5431536"/>
+            <a:ext cx="2331720" cy="685800"/>
+          </a:xfrm>
+          <a:prstGeom prst="rect">
+            <a:avLst/>
+          </a:prstGeom>
+          <a:noFill/>
+          <a:ln/>
+        </p:spPr>
+        <p:txBody>
+          <a:bodyPr wrap="square" lIns="0" tIns="0" rIns="0" bIns="0" rtlCol="0" anchor="t"/>
+          <a:lstStyle/>
+          <a:p>
+            <a:pPr indent="0" marL="0">
+              <a:buNone/>
+            </a:pPr>
+            <a:r>
+              <a:rPr lang="en-US" sz="1500" b="1" dirty="0">
+                <a:solidFill>
+                  <a:srgbClr val="1B2126"/>
+                </a:solidFill>
+                <a:latin typeface="Arial" pitchFamily="34" charset="0"/>
+                <a:ea typeface="Arial" pitchFamily="34" charset="-122"/>
+                <a:cs typeface="Arial" pitchFamily="34" charset="-120"/>
+              </a:rPr>
+              <a:t>Hortencia Quispe</a:t>
+            </a:r>
+            <a:endParaRPr lang="en-US" sz="1500" dirty="0"/>
+          </a:p>
+        </p:txBody>
+      </p:sp>
+      <p:sp>
+        <p:nvSpPr>
+          <p:cNvPr id="27" name="Text 25"/>
+          <p:cNvSpPr txBox="1"/>
+          <p:nvPr/>
+        </p:nvSpPr>
+        <p:spPr>
+          <a:xfrm>
+            <a:off x="3383280" y="4946904"/>
+            <a:ext cx="8183880" cy="713232"/>
+          </a:xfrm>
+          <a:prstGeom prst="rect">
+            <a:avLst/>
+          </a:prstGeom>
+          <a:noFill/>
+          <a:ln/>
+        </p:spPr>
+        <p:txBody>
+          <a:bodyPr wrap="square" lIns="0" tIns="0" rIns="0" bIns="0" rtlCol="0" anchor="t"/>
           <a:lstStyle/>
           <a:p>
             <a:pPr indent="0" marL="0">
@@ -3733,13 +4067,13 @@
             <a:r>
               <a:rPr lang="en-US" sz="1300" dirty="0">
                 <a:solidFill>
-                  <a:srgbClr val="3A444C"/>
-                </a:solidFill>
-                <a:latin typeface="Arial" pitchFamily="34" charset="0"/>
-                <a:ea typeface="Arial" pitchFamily="34" charset="-122"/>
-                <a:cs typeface="Arial" pitchFamily="34" charset="-120"/>
-              </a:rPr>
-              <a:t>Posible colisión Quispe-Limachi y repetición de tablas municipales no resuelta.</a:t>
+                  <a:srgbClr val="2C353C"/>
+                </a:solidFill>
+                <a:latin typeface="Arial" pitchFamily="34" charset="0"/>
+                <a:ea typeface="Arial" pitchFamily="34" charset="-122"/>
+                <a:cs typeface="Arial" pitchFamily="34" charset="-120"/>
+              </a:rPr>
+              <a:t>El informe cita una fotocopia del Testimonio 718/96. La lista preliminar registra cuatro matrículas, con una suma nominal de 18,5512 ha. Falta cotejar los folios y descartar una posible colisión con el registro “Quispe-Limachi”.</a:t>
             </a:r>
             <a:endParaRPr lang="en-US" sz="1300" dirty="0"/>
           </a:p>
@@ -3747,71 +4081,39 @@
       </p:sp>
       <p:sp>
         <p:nvSpPr>
-          <p:cNvPr id="24" name="Shape 22"/>
+          <p:cNvPr id="28" name="Shape 26"/>
           <p:cNvSpPr/>
           <p:nvPr/>
         </p:nvSpPr>
         <p:spPr>
           <a:xfrm>
-            <a:off x="457200" y="4663440"/>
-            <a:ext cx="11274552" cy="804672"/>
+            <a:off x="3383280" y="5687568"/>
+            <a:ext cx="8183880" cy="13716"/>
           </a:xfrm>
           <a:prstGeom prst="rect">
             <a:avLst/>
           </a:prstGeom>
           <a:solidFill>
-            <a:srgbClr val="FFFFFF"/>
+            <a:srgbClr val="E1E4E7"/>
           </a:solidFill>
-          <a:ln w="9525">
+          <a:ln w="12700">
             <a:solidFill>
-              <a:srgbClr val="E6E8EB"/>
+              <a:srgbClr val="E1E4E7"/>
             </a:solidFill>
             <a:prstDash val="solid"/>
           </a:ln>
-          <a:effectLst>
-            <a:outerShdw sx="100000" sy="100000" kx="0" ky="0" algn="bl" rotWithShape="0" blurRad="114300" dist="25400" dir="5400000">
-              <a:srgbClr val="000000">
-                <a:alpha val="14000"/>
-              </a:srgbClr>
-            </a:outerShdw>
-          </a:effectLst>
-        </p:spPr>
-      </p:sp>
-      <p:sp>
-        <p:nvSpPr>
-          <p:cNvPr id="25" name="Shape 23"/>
-          <p:cNvSpPr/>
-          <p:nvPr/>
-        </p:nvSpPr>
-        <p:spPr>
-          <a:xfrm>
-            <a:off x="457200" y="4663440"/>
-            <a:ext cx="73152" cy="804672"/>
-          </a:xfrm>
-          <a:prstGeom prst="rect">
-            <a:avLst/>
-          </a:prstGeom>
-          <a:solidFill>
-            <a:srgbClr val="C79A45"/>
-          </a:solidFill>
-          <a:ln w="12700">
-            <a:solidFill>
-              <a:srgbClr val="C79A45"/>
-            </a:solidFill>
-            <a:prstDash val="solid"/>
-          </a:ln>
-        </p:spPr>
-      </p:sp>
-      <p:sp>
-        <p:nvSpPr>
-          <p:cNvPr id="26" name="Text 24"/>
-          <p:cNvSpPr txBox="1"/>
-          <p:nvPr/>
-        </p:nvSpPr>
-        <p:spPr>
-          <a:xfrm>
-            <a:off x="731520" y="4663440"/>
-            <a:ext cx="3291840" cy="804672"/>
+        </p:spPr>
+      </p:sp>
+      <p:sp>
+        <p:nvSpPr>
+          <p:cNvPr id="29" name="Text 27"/>
+          <p:cNvSpPr txBox="1"/>
+          <p:nvPr/>
+        </p:nvSpPr>
+        <p:spPr>
+          <a:xfrm>
+            <a:off x="3383280" y="5733288"/>
+            <a:ext cx="8183880" cy="457200"/>
           </a:xfrm>
           <a:prstGeom prst="rect">
             <a:avLst/>
@@ -3827,55 +4129,44 @@
               <a:buNone/>
             </a:pPr>
             <a:r>
-              <a:rPr lang="en-US" sz="1600" b="1" dirty="0">
-                <a:solidFill>
-                  <a:srgbClr val="1B2126"/>
-                </a:solidFill>
-                <a:latin typeface="Arial" pitchFamily="34" charset="0"/>
-                <a:ea typeface="Arial" pitchFamily="34" charset="-122"/>
-                <a:cs typeface="Arial" pitchFamily="34" charset="-120"/>
-              </a:rPr>
-              <a:t>Registro contable y seguimiento</a:t>
-            </a:r>
-            <a:endParaRPr lang="en-US" sz="1600" dirty="0"/>
-          </a:p>
-        </p:txBody>
-      </p:sp>
-      <p:sp>
-        <p:nvSpPr>
-          <p:cNvPr id="27" name="Shape 25"/>
-          <p:cNvSpPr/>
-          <p:nvPr/>
-        </p:nvSpPr>
-        <p:spPr>
-          <a:xfrm>
-            <a:off x="4114800" y="4919472"/>
-            <a:ext cx="1097280" cy="292608"/>
-          </a:xfrm>
-          <a:prstGeom prst="rect">
-            <a:avLst/>
-          </a:prstGeom>
-          <a:solidFill>
-            <a:srgbClr val="C79A45"/>
-          </a:solidFill>
-          <a:ln w="12700">
-            <a:solidFill>
-              <a:srgbClr val="C79A45"/>
-            </a:solidFill>
-            <a:prstDash val="solid"/>
-          </a:ln>
-        </p:spPr>
-      </p:sp>
-      <p:sp>
-        <p:nvSpPr>
-          <p:cNvPr id="28" name="Text 26"/>
-          <p:cNvSpPr txBox="1"/>
-          <p:nvPr/>
-        </p:nvSpPr>
-        <p:spPr>
-          <a:xfrm>
-            <a:off x="4114800" y="4919472"/>
-            <a:ext cx="1097280" cy="292608"/>
+              <a:rPr lang="en-US" sz="1000" b="1" dirty="0">
+                <a:solidFill>
+                  <a:srgbClr val="8A6420"/>
+                </a:solidFill>
+                <a:latin typeface="Arial" pitchFamily="34" charset="0"/>
+                <a:ea typeface="Arial" pitchFamily="34" charset="-122"/>
+                <a:cs typeface="Arial" pitchFamily="34" charset="-120"/>
+              </a:rPr>
+              <a:t>FUENTES  </a:t>
+            </a:r>
+            <a:pPr indent="0" marL="0">
+              <a:buNone/>
+            </a:pPr>
+            <a:r>
+              <a:rPr lang="en-US" sz="1100" dirty="0">
+                <a:solidFill>
+                  <a:srgbClr val="5F6A73"/>
+                </a:solidFill>
+                <a:latin typeface="Arial" pitchFamily="34" charset="0"/>
+                <a:ea typeface="Arial" pitchFamily="34" charset="-122"/>
+                <a:cs typeface="Arial" pitchFamily="34" charset="-120"/>
+              </a:rPr>
+              <a:t>Informe de Ariel León, § IV.1, Test. 718/96; lista preliminar de DDRR, INCERPAZ 3.docx, matrículas 2.08.0.10.0002686, 0002689, 0002688 y 0002687; referencia adicional al Test. 718/96 en § III.1 para Quispe-Limachi.</a:t>
+            </a:r>
+            <a:endParaRPr lang="en-US" sz="1400" dirty="0"/>
+          </a:p>
+        </p:txBody>
+      </p:sp>
+      <p:sp>
+        <p:nvSpPr>
+          <p:cNvPr id="30" name="Text 28"/>
+          <p:cNvSpPr txBox="1"/>
+          <p:nvPr/>
+        </p:nvSpPr>
+        <p:spPr>
+          <a:xfrm>
+            <a:off x="457200" y="6446520"/>
+            <a:ext cx="10515600" cy="274320"/>
           </a:xfrm>
           <a:prstGeom prst="rect">
             <a:avLst/>
@@ -3887,212 +4178,6 @@
           <a:bodyPr wrap="square" lIns="0" tIns="0" rIns="0" bIns="0" rtlCol="0" anchor="ctr"/>
           <a:lstStyle/>
           <a:p>
-            <a:pPr algn="ctr" indent="0" marL="0">
-              <a:buNone/>
-            </a:pPr>
-            <a:r>
-              <a:rPr lang="en-US" sz="1000" b="1" spc="50" kern="0" dirty="0">
-                <a:solidFill>
-                  <a:srgbClr val="FFFFFF"/>
-                </a:solidFill>
-                <a:latin typeface="Arial" pitchFamily="34" charset="0"/>
-                <a:ea typeface="Arial" pitchFamily="34" charset="-122"/>
-                <a:cs typeface="Arial" pitchFamily="34" charset="-120"/>
-              </a:rPr>
-              <a:t>ALTA</a:t>
-            </a:r>
-            <a:endParaRPr lang="en-US" sz="1000" dirty="0"/>
-          </a:p>
-        </p:txBody>
-      </p:sp>
-      <p:sp>
-        <p:nvSpPr>
-          <p:cNvPr id="29" name="Text 27"/>
-          <p:cNvSpPr txBox="1"/>
-          <p:nvPr/>
-        </p:nvSpPr>
-        <p:spPr>
-          <a:xfrm>
-            <a:off x="5486400" y="4663440"/>
-            <a:ext cx="6035040" cy="804672"/>
-          </a:xfrm>
-          <a:prstGeom prst="rect">
-            <a:avLst/>
-          </a:prstGeom>
-          <a:noFill/>
-          <a:ln/>
-        </p:spPr>
-        <p:txBody>
-          <a:bodyPr wrap="square" lIns="0" tIns="0" rIns="0" bIns="0" rtlCol="0" anchor="ctr"/>
-          <a:lstStyle/>
-          <a:p>
-            <a:pPr indent="0" marL="0">
-              <a:buNone/>
-            </a:pPr>
-            <a:r>
-              <a:rPr lang="en-US" sz="1300" dirty="0">
-                <a:solidFill>
-                  <a:srgbClr val="3A444C"/>
-                </a:solidFill>
-                <a:latin typeface="Arial" pitchFamily="34" charset="0"/>
-                <a:ea typeface="Arial" pitchFamily="34" charset="-122"/>
-                <a:cs typeface="Arial" pitchFamily="34" charset="-120"/>
-              </a:rPr>
-              <a:t>Moneda no indicada en dos saldos y campos de responsable/estado/fecha vacíos.</a:t>
-            </a:r>
-            <a:endParaRPr lang="en-US" sz="1300" dirty="0"/>
-          </a:p>
-        </p:txBody>
-      </p:sp>
-      <p:sp>
-        <p:nvSpPr>
-          <p:cNvPr id="30" name="Shape 28"/>
-          <p:cNvSpPr/>
-          <p:nvPr/>
-        </p:nvSpPr>
-        <p:spPr>
-          <a:xfrm>
-            <a:off x="457200" y="5623560"/>
-            <a:ext cx="11274552" cy="731520"/>
-          </a:xfrm>
-          <a:prstGeom prst="rect">
-            <a:avLst/>
-          </a:prstGeom>
-          <a:solidFill>
-            <a:srgbClr val="1B2126"/>
-          </a:solidFill>
-          <a:ln w="12700">
-            <a:solidFill>
-              <a:srgbClr val="1B2126"/>
-            </a:solidFill>
-            <a:prstDash val="solid"/>
-          </a:ln>
-        </p:spPr>
-      </p:sp>
-      <p:sp>
-        <p:nvSpPr>
-          <p:cNvPr id="31" name="Shape 29"/>
-          <p:cNvSpPr/>
-          <p:nvPr/>
-        </p:nvSpPr>
-        <p:spPr>
-          <a:xfrm>
-            <a:off x="457200" y="5623560"/>
-            <a:ext cx="73152" cy="731520"/>
-          </a:xfrm>
-          <a:prstGeom prst="rect">
-            <a:avLst/>
-          </a:prstGeom>
-          <a:solidFill>
-            <a:srgbClr val="C79A45"/>
-          </a:solidFill>
-          <a:ln w="12700">
-            <a:solidFill>
-              <a:srgbClr val="C79A45"/>
-            </a:solidFill>
-            <a:prstDash val="solid"/>
-          </a:ln>
-        </p:spPr>
-      </p:sp>
-      <p:sp>
-        <p:nvSpPr>
-          <p:cNvPr id="32" name="Text 30"/>
-          <p:cNvSpPr txBox="1"/>
-          <p:nvPr/>
-        </p:nvSpPr>
-        <p:spPr>
-          <a:xfrm>
-            <a:off x="731520" y="5623560"/>
-            <a:ext cx="2560320" cy="731520"/>
-          </a:xfrm>
-          <a:prstGeom prst="rect">
-            <a:avLst/>
-          </a:prstGeom>
-          <a:noFill/>
-          <a:ln/>
-        </p:spPr>
-        <p:txBody>
-          <a:bodyPr wrap="square" lIns="0" tIns="0" rIns="0" bIns="0" rtlCol="0" anchor="ctr"/>
-          <a:lstStyle/>
-          <a:p>
-            <a:pPr indent="0" marL="0">
-              <a:buNone/>
-            </a:pPr>
-            <a:r>
-              <a:rPr lang="en-US" sz="1200" b="1" spc="100" kern="0" dirty="0">
-                <a:solidFill>
-                  <a:srgbClr val="C79A45"/>
-                </a:solidFill>
-                <a:latin typeface="Arial" pitchFamily="34" charset="0"/>
-                <a:ea typeface="Arial" pitchFamily="34" charset="-122"/>
-                <a:cs typeface="Arial" pitchFamily="34" charset="-120"/>
-              </a:rPr>
-              <a:t>CONCLUSIÓN DE CONTROL</a:t>
-            </a:r>
-            <a:endParaRPr lang="en-US" sz="1200" dirty="0"/>
-          </a:p>
-        </p:txBody>
-      </p:sp>
-      <p:sp>
-        <p:nvSpPr>
-          <p:cNvPr id="33" name="Text 31"/>
-          <p:cNvSpPr txBox="1"/>
-          <p:nvPr/>
-        </p:nvSpPr>
-        <p:spPr>
-          <a:xfrm>
-            <a:off x="3291840" y="5623560"/>
-            <a:ext cx="8229600" cy="731520"/>
-          </a:xfrm>
-          <a:prstGeom prst="rect">
-            <a:avLst/>
-          </a:prstGeom>
-          <a:noFill/>
-          <a:ln/>
-        </p:spPr>
-        <p:txBody>
-          <a:bodyPr wrap="square" lIns="0" tIns="0" rIns="0" bIns="0" rtlCol="0" anchor="ctr"/>
-          <a:lstStyle/>
-          <a:p>
-            <a:pPr indent="0" marL="0">
-              <a:buNone/>
-            </a:pPr>
-            <a:r>
-              <a:rPr lang="en-US" sz="1300" b="1" dirty="0">
-                <a:solidFill>
-                  <a:srgbClr val="FFFFFF"/>
-                </a:solidFill>
-                <a:latin typeface="Arial" pitchFamily="34" charset="0"/>
-                <a:ea typeface="Arial" pitchFamily="34" charset="-122"/>
-                <a:cs typeface="Arial" pitchFamily="34" charset="-120"/>
-              </a:rPr>
-              <a:t>Con estos antecedentes no se confirma que sean cinco predios distintos ni que las superficies coincidan con polígonos físicos vigentes.</a:t>
-            </a:r>
-            <a:endParaRPr lang="en-US" sz="1300" dirty="0"/>
-          </a:p>
-        </p:txBody>
-      </p:sp>
-      <p:sp>
-        <p:nvSpPr>
-          <p:cNvPr id="34" name="Text 32"/>
-          <p:cNvSpPr txBox="1"/>
-          <p:nvPr/>
-        </p:nvSpPr>
-        <p:spPr>
-          <a:xfrm>
-            <a:off x="457200" y="6446520"/>
-            <a:ext cx="10058400" cy="274320"/>
-          </a:xfrm>
-          <a:prstGeom prst="rect">
-            <a:avLst/>
-          </a:prstGeom>
-          <a:noFill/>
-          <a:ln/>
-        </p:spPr>
-        <p:txBody>
-          <a:bodyPr wrap="square" lIns="0" tIns="0" rIns="0" bIns="0" rtlCol="0" anchor="ctr"/>
-          <a:lstStyle/>
-          <a:p>
             <a:pPr indent="0" marL="0">
               <a:buNone/>
             </a:pPr>
@@ -4105,7 +4190,7 @@
                 <a:ea typeface="Arial" pitchFamily="34" charset="-122"/>
                 <a:cs typeface="Arial" pitchFamily="34" charset="-120"/>
               </a:rPr>
-              <a:t>Fuente: cinco fichas de caso; Matriz de Cruces; Seguimiento_INCERPAZ.xlsx.</a:t>
+              <a:t>DDRR: Derechos Reales · COM: planos municipales Contorno Bajo / Mamani · Matriz de cruces e informe de Ariel León.</a:t>
             </a:r>
             <a:endParaRPr lang="en-US" sz="1000" dirty="0"/>
           </a:p>
@@ -4217,7 +4302,7 @@
                 <a:ea typeface="Arial" pitchFamily="34" charset="-122"/>
                 <a:cs typeface="Arial" pitchFamily="34" charset="-120"/>
               </a:rPr>
-              <a:t>10 · ACCIONES RECOMENDADAS</a:t>
+              <a:t>09 · NIVEL DE AVANCE Y FUENTES (2/2)</a:t>
             </a:r>
             <a:endParaRPr lang="en-US" sz="1400" dirty="0"/>
           </a:p>
@@ -4256,7 +4341,7 @@
                 <a:ea typeface="Arial" pitchFamily="34" charset="-122"/>
                 <a:cs typeface="Arial" pitchFamily="34" charset="-120"/>
               </a:rPr>
-              <a:t>Plan de cierre documental</a:t>
+              <a:t>Hallazgo y documentos fuente</a:t>
             </a:r>
             <a:endParaRPr lang="en-US" sz="3200" dirty="0"/>
           </a:p>
@@ -4320,7 +4405,7 @@
                 <a:ea typeface="Arial" pitchFamily="34" charset="-122"/>
                 <a:cs typeface="Arial" pitchFamily="34" charset="-120"/>
               </a:rPr>
-              <a:t>Tres frentes en paralelo; las fechas y responsables deben asignarse en la matriz de seguimiento.</a:t>
+              <a:t>Qué permite afirmar cada caso con el respaldo documental disponible hoy.</a:t>
             </a:r>
             <a:endParaRPr lang="en-US" sz="1400" dirty="0"/>
           </a:p>
@@ -4334,8 +4419,8 @@
         </p:nvSpPr>
         <p:spPr>
           <a:xfrm>
-            <a:off x="457200" y="1901952"/>
-            <a:ext cx="3611880" cy="3657600"/>
+            <a:off x="457200" y="1874520"/>
+            <a:ext cx="11274552" cy="1371600"/>
           </a:xfrm>
           <a:prstGeom prst="rect">
             <a:avLst/>
@@ -4366,18 +4451,18 @@
         </p:nvSpPr>
         <p:spPr>
           <a:xfrm>
-            <a:off x="457200" y="1901952"/>
-            <a:ext cx="3611880" cy="594360"/>
+            <a:off x="457200" y="1874520"/>
+            <a:ext cx="73152" cy="1371600"/>
           </a:xfrm>
           <a:prstGeom prst="rect">
             <a:avLst/>
           </a:prstGeom>
           <a:solidFill>
-            <a:srgbClr val="1B2126"/>
+            <a:srgbClr val="B23A3A"/>
           </a:solidFill>
           <a:ln w="12700">
             <a:solidFill>
-              <a:srgbClr val="1B2126"/>
+              <a:srgbClr val="B23A3A"/>
             </a:solidFill>
             <a:prstDash val="solid"/>
           </a:ln>
@@ -4385,102 +4470,24 @@
       </p:sp>
       <p:sp>
         <p:nvSpPr>
-          <p:cNvPr id="8" name="Text 6"/>
-          <p:cNvSpPr txBox="1"/>
-          <p:nvPr/>
-        </p:nvSpPr>
-        <p:spPr>
-          <a:xfrm>
-            <a:off x="685800" y="1901952"/>
-            <a:ext cx="548640" cy="594360"/>
-          </a:xfrm>
-          <a:prstGeom prst="rect">
-            <a:avLst/>
-          </a:prstGeom>
-          <a:noFill/>
-          <a:ln/>
-        </p:spPr>
-        <p:txBody>
-          <a:bodyPr wrap="square" lIns="0" tIns="0" rIns="0" bIns="0" rtlCol="0" anchor="ctr"/>
-          <a:lstStyle/>
-          <a:p>
-            <a:pPr indent="0" marL="0">
-              <a:buNone/>
-            </a:pPr>
-            <a:r>
-              <a:rPr lang="en-US" sz="2000" b="1" dirty="0">
-                <a:solidFill>
-                  <a:srgbClr val="C79A45"/>
-                </a:solidFill>
-                <a:latin typeface="Arial" pitchFamily="34" charset="0"/>
-                <a:ea typeface="Arial" pitchFamily="34" charset="-122"/>
-                <a:cs typeface="Arial" pitchFamily="34" charset="-120"/>
-              </a:rPr>
-              <a:t>01</a:t>
-            </a:r>
-            <a:endParaRPr lang="en-US" sz="2000" dirty="0"/>
-          </a:p>
-        </p:txBody>
-      </p:sp>
-      <p:sp>
-        <p:nvSpPr>
-          <p:cNvPr id="9" name="Text 7"/>
-          <p:cNvSpPr txBox="1"/>
-          <p:nvPr/>
-        </p:nvSpPr>
-        <p:spPr>
-          <a:xfrm>
-            <a:off x="1234440" y="1901952"/>
-            <a:ext cx="2743200" cy="594360"/>
-          </a:xfrm>
-          <a:prstGeom prst="rect">
-            <a:avLst/>
-          </a:prstGeom>
-          <a:noFill/>
-          <a:ln/>
-        </p:spPr>
-        <p:txBody>
-          <a:bodyPr wrap="square" lIns="0" tIns="0" rIns="0" bIns="0" rtlCol="0" anchor="ctr"/>
-          <a:lstStyle/>
-          <a:p>
-            <a:pPr indent="0" marL="0">
-              <a:buNone/>
-            </a:pPr>
-            <a:r>
-              <a:rPr lang="en-US" sz="1600" b="1" dirty="0">
-                <a:solidFill>
-                  <a:srgbClr val="FFFFFF"/>
-                </a:solidFill>
-                <a:latin typeface="Arial" pitchFamily="34" charset="0"/>
-                <a:ea typeface="Arial" pitchFamily="34" charset="-122"/>
-                <a:cs typeface="Arial" pitchFamily="34" charset="-120"/>
-              </a:rPr>
-              <a:t>Jurídico / registral</a:t>
-            </a:r>
-            <a:endParaRPr lang="en-US" sz="1600" dirty="0"/>
-          </a:p>
-        </p:txBody>
-      </p:sp>
-      <p:sp>
-        <p:nvSpPr>
-          <p:cNvPr id="10" name="Shape 8"/>
+          <p:cNvPr id="8" name="Shape 6"/>
           <p:cNvSpPr/>
           <p:nvPr/>
         </p:nvSpPr>
         <p:spPr>
           <a:xfrm>
-            <a:off x="658368" y="2670048"/>
-            <a:ext cx="274320" cy="274320"/>
-          </a:xfrm>
-          <a:prstGeom prst="ellipse">
+            <a:off x="731520" y="2057400"/>
+            <a:ext cx="2286000" cy="292608"/>
+          </a:xfrm>
+          <a:prstGeom prst="rect">
             <a:avLst/>
           </a:prstGeom>
           <a:solidFill>
-            <a:srgbClr val="C79A45"/>
+            <a:srgbClr val="B23A3A"/>
           </a:solidFill>
           <a:ln w="12700">
             <a:solidFill>
-              <a:srgbClr val="C79A45"/>
+              <a:srgbClr val="B23A3A"/>
             </a:solidFill>
             <a:prstDash val="solid"/>
           </a:ln>
@@ -4488,53 +4495,92 @@
       </p:sp>
       <p:sp>
         <p:nvSpPr>
+          <p:cNvPr id="9" name="Text 7"/>
+          <p:cNvSpPr txBox="1"/>
+          <p:nvPr/>
+        </p:nvSpPr>
+        <p:spPr>
+          <a:xfrm>
+            <a:off x="731520" y="2057400"/>
+            <a:ext cx="2286000" cy="292608"/>
+          </a:xfrm>
+          <a:prstGeom prst="rect">
+            <a:avLst/>
+          </a:prstGeom>
+          <a:noFill/>
+          <a:ln/>
+        </p:spPr>
+        <p:txBody>
+          <a:bodyPr wrap="square" lIns="0" tIns="0" rIns="0" bIns="0" rtlCol="0" anchor="ctr"/>
+          <a:lstStyle/>
+          <a:p>
+            <a:pPr algn="ctr" indent="0" marL="0">
+              <a:buNone/>
+            </a:pPr>
+            <a:r>
+              <a:rPr lang="en-US" sz="900" b="1" spc="50" kern="0" dirty="0">
+                <a:solidFill>
+                  <a:srgbClr val="FFFFFF"/>
+                </a:solidFill>
+                <a:latin typeface="Arial" pitchFamily="34" charset="0"/>
+                <a:ea typeface="Arial" pitchFamily="34" charset="-122"/>
+                <a:cs typeface="Arial" pitchFamily="34" charset="-120"/>
+              </a:rPr>
+              <a:t>DIFERENCIA POR CONCILIAR</a:t>
+            </a:r>
+            <a:endParaRPr lang="en-US" sz="900" dirty="0"/>
+          </a:p>
+        </p:txBody>
+      </p:sp>
+      <p:sp>
+        <p:nvSpPr>
+          <p:cNvPr id="10" name="Text 8"/>
+          <p:cNvSpPr txBox="1"/>
+          <p:nvPr/>
+        </p:nvSpPr>
+        <p:spPr>
+          <a:xfrm>
+            <a:off x="731520" y="2468880"/>
+            <a:ext cx="2331720" cy="685800"/>
+          </a:xfrm>
+          <a:prstGeom prst="rect">
+            <a:avLst/>
+          </a:prstGeom>
+          <a:noFill/>
+          <a:ln/>
+        </p:spPr>
+        <p:txBody>
+          <a:bodyPr wrap="square" lIns="0" tIns="0" rIns="0" bIns="0" rtlCol="0" anchor="t"/>
+          <a:lstStyle/>
+          <a:p>
+            <a:pPr indent="0" marL="0">
+              <a:buNone/>
+            </a:pPr>
+            <a:r>
+              <a:rPr lang="en-US" sz="1500" b="1" dirty="0">
+                <a:solidFill>
+                  <a:srgbClr val="1B2126"/>
+                </a:solidFill>
+                <a:latin typeface="Arial" pitchFamily="34" charset="0"/>
+                <a:ea typeface="Arial" pitchFamily="34" charset="-122"/>
+                <a:cs typeface="Arial" pitchFamily="34" charset="-120"/>
+              </a:rPr>
+              <a:t>Antonio Pérez Mendoza</a:t>
+            </a:r>
+            <a:endParaRPr lang="en-US" sz="1500" dirty="0"/>
+          </a:p>
+        </p:txBody>
+      </p:sp>
+      <p:sp>
+        <p:nvSpPr>
           <p:cNvPr id="11" name="Text 9"/>
           <p:cNvSpPr txBox="1"/>
           <p:nvPr/>
         </p:nvSpPr>
         <p:spPr>
           <a:xfrm>
-            <a:off x="658368" y="2670048"/>
-            <a:ext cx="274320" cy="274320"/>
-          </a:xfrm>
-          <a:prstGeom prst="rect">
-            <a:avLst/>
-          </a:prstGeom>
-          <a:noFill/>
-          <a:ln/>
-        </p:spPr>
-        <p:txBody>
-          <a:bodyPr wrap="square" lIns="0" tIns="0" rIns="0" bIns="0" rtlCol="0" anchor="ctr"/>
-          <a:lstStyle/>
-          <a:p>
-            <a:pPr algn="ctr" indent="0" marL="0">
-              <a:buNone/>
-            </a:pPr>
-            <a:r>
-              <a:rPr lang="en-US" sz="1100" b="1" dirty="0">
-                <a:solidFill>
-                  <a:srgbClr val="1B2126"/>
-                </a:solidFill>
-                <a:latin typeface="Arial" pitchFamily="34" charset="0"/>
-                <a:ea typeface="Arial" pitchFamily="34" charset="-122"/>
-                <a:cs typeface="Arial" pitchFamily="34" charset="-120"/>
-              </a:rPr>
-              <a:t>1</a:t>
-            </a:r>
-            <a:endParaRPr lang="en-US" sz="1100" dirty="0"/>
-          </a:p>
-        </p:txBody>
-      </p:sp>
-      <p:sp>
-        <p:nvSpPr>
-          <p:cNvPr id="12" name="Text 10"/>
-          <p:cNvSpPr txBox="1"/>
-          <p:nvPr/>
-        </p:nvSpPr>
-        <p:spPr>
-          <a:xfrm>
-            <a:off x="1051560" y="2633472"/>
-            <a:ext cx="2880360" cy="676656"/>
+            <a:off x="3383280" y="1984248"/>
+            <a:ext cx="8183880" cy="713232"/>
           </a:xfrm>
           <a:prstGeom prst="rect">
             <a:avLst/>
@@ -4550,7 +4596,7 @@
               <a:buNone/>
             </a:pPr>
             <a:r>
-              <a:rPr lang="en-US" sz="1200" dirty="0">
+              <a:rPr lang="en-US" sz="1300" dirty="0">
                 <a:solidFill>
                   <a:srgbClr val="2C353C"/>
                 </a:solidFill>
@@ -4558,32 +4604,32 @@
                 <a:ea typeface="Arial" pitchFamily="34" charset="-122"/>
                 <a:cs typeface="Arial" pitchFamily="34" charset="-120"/>
               </a:rPr>
-              <a:t>Obtener folios certificados vigentes de cada matrícula identificada.</a:t>
-            </a:r>
-            <a:endParaRPr lang="en-US" sz="1200" dirty="0"/>
-          </a:p>
-        </p:txBody>
-      </p:sp>
-      <p:sp>
-        <p:nvSpPr>
-          <p:cNvPr id="13" name="Shape 11"/>
+              <a:t>El informe cita una compra de 52.663,14 m²; el plano muestra una parcela homónima de 120.281 m². La diferencia impide concluir que sea el mismo predio sin revisar contrato, matrícula y polígono.</a:t>
+            </a:r>
+            <a:endParaRPr lang="en-US" sz="1300" dirty="0"/>
+          </a:p>
+        </p:txBody>
+      </p:sp>
+      <p:sp>
+        <p:nvSpPr>
+          <p:cNvPr id="12" name="Shape 10"/>
           <p:cNvSpPr/>
           <p:nvPr/>
         </p:nvSpPr>
         <p:spPr>
           <a:xfrm>
-            <a:off x="658368" y="3383280"/>
-            <a:ext cx="274320" cy="274320"/>
-          </a:xfrm>
-          <a:prstGeom prst="ellipse">
+            <a:off x="3383280" y="2724912"/>
+            <a:ext cx="8183880" cy="13716"/>
+          </a:xfrm>
+          <a:prstGeom prst="rect">
             <a:avLst/>
           </a:prstGeom>
           <a:solidFill>
-            <a:srgbClr val="C79A45"/>
+            <a:srgbClr val="E1E4E7"/>
           </a:solidFill>
           <a:ln w="12700">
             <a:solidFill>
-              <a:srgbClr val="C79A45"/>
+              <a:srgbClr val="E1E4E7"/>
             </a:solidFill>
             <a:prstDash val="solid"/>
           </a:ln>
@@ -4591,14 +4637,14 @@
       </p:sp>
       <p:sp>
         <p:nvSpPr>
-          <p:cNvPr id="14" name="Text 12"/>
-          <p:cNvSpPr txBox="1"/>
-          <p:nvPr/>
-        </p:nvSpPr>
-        <p:spPr>
-          <a:xfrm>
-            <a:off x="658368" y="3383280"/>
-            <a:ext cx="274320" cy="274320"/>
+          <p:cNvPr id="13" name="Text 11"/>
+          <p:cNvSpPr txBox="1"/>
+          <p:nvPr/>
+        </p:nvSpPr>
+        <p:spPr>
+          <a:xfrm>
+            <a:off x="3383280" y="2770632"/>
+            <a:ext cx="8183880" cy="457200"/>
           </a:xfrm>
           <a:prstGeom prst="rect">
             <a:avLst/>
@@ -4610,279 +4656,48 @@
           <a:bodyPr wrap="square" lIns="0" tIns="0" rIns="0" bIns="0" rtlCol="0" anchor="ctr"/>
           <a:lstStyle/>
           <a:p>
-            <a:pPr algn="ctr" indent="0" marL="0">
-              <a:buNone/>
-            </a:pPr>
-            <a:r>
-              <a:rPr lang="en-US" sz="1100" b="1" dirty="0">
-                <a:solidFill>
-                  <a:srgbClr val="1B2126"/>
-                </a:solidFill>
-                <a:latin typeface="Arial" pitchFamily="34" charset="0"/>
-                <a:ea typeface="Arial" pitchFamily="34" charset="-122"/>
-                <a:cs typeface="Arial" pitchFamily="34" charset="-120"/>
-              </a:rPr>
-              <a:t>2</a:t>
-            </a:r>
-            <a:endParaRPr lang="en-US" sz="1100" dirty="0"/>
-          </a:p>
-        </p:txBody>
-      </p:sp>
-      <p:sp>
-        <p:nvSpPr>
-          <p:cNvPr id="15" name="Text 13"/>
-          <p:cNvSpPr txBox="1"/>
-          <p:nvPr/>
-        </p:nvSpPr>
-        <p:spPr>
-          <a:xfrm>
-            <a:off x="1051560" y="3346704"/>
-            <a:ext cx="2880360" cy="676656"/>
-          </a:xfrm>
-          <a:prstGeom prst="rect">
-            <a:avLst/>
-          </a:prstGeom>
-          <a:noFill/>
-          <a:ln/>
-        </p:spPr>
-        <p:txBody>
-          <a:bodyPr wrap="square" lIns="0" tIns="0" rIns="0" bIns="0" rtlCol="0" anchor="t"/>
-          <a:lstStyle/>
-          <a:p>
-            <a:pPr indent="0" marL="0">
-              <a:buNone/>
-            </a:pPr>
-            <a:r>
-              <a:rPr lang="en-US" sz="1200" dirty="0">
-                <a:solidFill>
-                  <a:srgbClr val="2C353C"/>
-                </a:solidFill>
-                <a:latin typeface="Arial" pitchFamily="34" charset="0"/>
-                <a:ea typeface="Arial" pitchFamily="34" charset="-122"/>
-                <a:cs typeface="Arial" pitchFamily="34" charset="-120"/>
-              </a:rPr>
-              <a:t>Para Chávez: verificar titularidad, gravámenes y saldo de cuota.</a:t>
-            </a:r>
-            <a:endParaRPr lang="en-US" sz="1200" dirty="0"/>
-          </a:p>
-        </p:txBody>
-      </p:sp>
-      <p:sp>
-        <p:nvSpPr>
-          <p:cNvPr id="16" name="Shape 14"/>
+            <a:pPr indent="0" marL="0">
+              <a:buNone/>
+            </a:pPr>
+            <a:r>
+              <a:rPr lang="en-US" sz="1000" b="1" dirty="0">
+                <a:solidFill>
+                  <a:srgbClr val="8A6420"/>
+                </a:solidFill>
+                <a:latin typeface="Arial" pitchFamily="34" charset="0"/>
+                <a:ea typeface="Arial" pitchFamily="34" charset="-122"/>
+                <a:cs typeface="Arial" pitchFamily="34" charset="-120"/>
+              </a:rPr>
+              <a:t>FUENTES  </a:t>
+            </a:r>
+            <a:pPr indent="0" marL="0">
+              <a:buNone/>
+            </a:pPr>
+            <a:r>
+              <a:rPr lang="en-US" sz="1100" dirty="0">
+                <a:solidFill>
+                  <a:srgbClr val="5F6A73"/>
+                </a:solidFill>
+                <a:latin typeface="Arial" pitchFamily="34" charset="0"/>
+                <a:ea typeface="Arial" pitchFamily="34" charset="-122"/>
+                <a:cs typeface="Arial" pitchFamily="34" charset="-120"/>
+              </a:rPr>
+              <a:t>Informe de Ariel León: contrato de 19/03/2007 y referencia a auditoría de 08/10/2008; mayor, cuenta 12102002038; plano COM Contorno Bajo, parcela 5. El informe refiere la matrícula 2.08.1.01.0000575.</a:t>
+            </a:r>
+            <a:endParaRPr lang="en-US" sz="1400" dirty="0"/>
+          </a:p>
+        </p:txBody>
+      </p:sp>
+      <p:sp>
+        <p:nvSpPr>
+          <p:cNvPr id="14" name="Shape 12"/>
           <p:cNvSpPr/>
           <p:nvPr/>
         </p:nvSpPr>
         <p:spPr>
           <a:xfrm>
-            <a:off x="658368" y="4096512"/>
-            <a:ext cx="274320" cy="274320"/>
-          </a:xfrm>
-          <a:prstGeom prst="ellipse">
-            <a:avLst/>
-          </a:prstGeom>
-          <a:solidFill>
-            <a:srgbClr val="C79A45"/>
-          </a:solidFill>
-          <a:ln w="12700">
-            <a:solidFill>
-              <a:srgbClr val="C79A45"/>
-            </a:solidFill>
-            <a:prstDash val="solid"/>
-          </a:ln>
-        </p:spPr>
-      </p:sp>
-      <p:sp>
-        <p:nvSpPr>
-          <p:cNvPr id="17" name="Text 15"/>
-          <p:cNvSpPr txBox="1"/>
-          <p:nvPr/>
-        </p:nvSpPr>
-        <p:spPr>
-          <a:xfrm>
-            <a:off x="658368" y="4096512"/>
-            <a:ext cx="274320" cy="274320"/>
-          </a:xfrm>
-          <a:prstGeom prst="rect">
-            <a:avLst/>
-          </a:prstGeom>
-          <a:noFill/>
-          <a:ln/>
-        </p:spPr>
-        <p:txBody>
-          <a:bodyPr wrap="square" lIns="0" tIns="0" rIns="0" bIns="0" rtlCol="0" anchor="ctr"/>
-          <a:lstStyle/>
-          <a:p>
-            <a:pPr algn="ctr" indent="0" marL="0">
-              <a:buNone/>
-            </a:pPr>
-            <a:r>
-              <a:rPr lang="en-US" sz="1100" b="1" dirty="0">
-                <a:solidFill>
-                  <a:srgbClr val="1B2126"/>
-                </a:solidFill>
-                <a:latin typeface="Arial" pitchFamily="34" charset="0"/>
-                <a:ea typeface="Arial" pitchFamily="34" charset="-122"/>
-                <a:cs typeface="Arial" pitchFamily="34" charset="-120"/>
-              </a:rPr>
-              <a:t>3</a:t>
-            </a:r>
-            <a:endParaRPr lang="en-US" sz="1100" dirty="0"/>
-          </a:p>
-        </p:txBody>
-      </p:sp>
-      <p:sp>
-        <p:nvSpPr>
-          <p:cNvPr id="18" name="Text 16"/>
-          <p:cNvSpPr txBox="1"/>
-          <p:nvPr/>
-        </p:nvSpPr>
-        <p:spPr>
-          <a:xfrm>
-            <a:off x="1051560" y="4059936"/>
-            <a:ext cx="2880360" cy="676656"/>
-          </a:xfrm>
-          <a:prstGeom prst="rect">
-            <a:avLst/>
-          </a:prstGeom>
-          <a:noFill/>
-          <a:ln/>
-        </p:spPr>
-        <p:txBody>
-          <a:bodyPr wrap="square" lIns="0" tIns="0" rIns="0" bIns="0" rtlCol="0" anchor="t"/>
-          <a:lstStyle/>
-          <a:p>
-            <a:pPr indent="0" marL="0">
-              <a:buNone/>
-            </a:pPr>
-            <a:r>
-              <a:rPr lang="en-US" sz="1200" dirty="0">
-                <a:solidFill>
-                  <a:srgbClr val="2C353C"/>
-                </a:solidFill>
-                <a:latin typeface="Arial" pitchFamily="34" charset="0"/>
-                <a:ea typeface="Arial" pitchFamily="34" charset="-122"/>
-                <a:cs typeface="Arial" pitchFamily="34" charset="-120"/>
-              </a:rPr>
-              <a:t>Localizar contratos y testimonios originales; aclarar transferencia Antonio y referencias Quispe.</a:t>
-            </a:r>
-            <a:endParaRPr lang="en-US" sz="1200" dirty="0"/>
-          </a:p>
-        </p:txBody>
-      </p:sp>
-      <p:sp>
-        <p:nvSpPr>
-          <p:cNvPr id="19" name="Shape 17"/>
-          <p:cNvSpPr/>
-          <p:nvPr/>
-        </p:nvSpPr>
-        <p:spPr>
-          <a:xfrm>
-            <a:off x="658368" y="4809744"/>
-            <a:ext cx="274320" cy="274320"/>
-          </a:xfrm>
-          <a:prstGeom prst="ellipse">
-            <a:avLst/>
-          </a:prstGeom>
-          <a:solidFill>
-            <a:srgbClr val="C79A45"/>
-          </a:solidFill>
-          <a:ln w="12700">
-            <a:solidFill>
-              <a:srgbClr val="C79A45"/>
-            </a:solidFill>
-            <a:prstDash val="solid"/>
-          </a:ln>
-        </p:spPr>
-      </p:sp>
-      <p:sp>
-        <p:nvSpPr>
-          <p:cNvPr id="20" name="Text 18"/>
-          <p:cNvSpPr txBox="1"/>
-          <p:nvPr/>
-        </p:nvSpPr>
-        <p:spPr>
-          <a:xfrm>
-            <a:off x="658368" y="4809744"/>
-            <a:ext cx="274320" cy="274320"/>
-          </a:xfrm>
-          <a:prstGeom prst="rect">
-            <a:avLst/>
-          </a:prstGeom>
-          <a:noFill/>
-          <a:ln/>
-        </p:spPr>
-        <p:txBody>
-          <a:bodyPr wrap="square" lIns="0" tIns="0" rIns="0" bIns="0" rtlCol="0" anchor="ctr"/>
-          <a:lstStyle/>
-          <a:p>
-            <a:pPr algn="ctr" indent="0" marL="0">
-              <a:buNone/>
-            </a:pPr>
-            <a:r>
-              <a:rPr lang="en-US" sz="1100" b="1" dirty="0">
-                <a:solidFill>
-                  <a:srgbClr val="1B2126"/>
-                </a:solidFill>
-                <a:latin typeface="Arial" pitchFamily="34" charset="0"/>
-                <a:ea typeface="Arial" pitchFamily="34" charset="-122"/>
-                <a:cs typeface="Arial" pitchFamily="34" charset="-120"/>
-              </a:rPr>
-              <a:t>4</a:t>
-            </a:r>
-            <a:endParaRPr lang="en-US" sz="1100" dirty="0"/>
-          </a:p>
-        </p:txBody>
-      </p:sp>
-      <p:sp>
-        <p:nvSpPr>
-          <p:cNvPr id="21" name="Text 19"/>
-          <p:cNvSpPr txBox="1"/>
-          <p:nvPr/>
-        </p:nvSpPr>
-        <p:spPr>
-          <a:xfrm>
-            <a:off x="1051560" y="4773168"/>
-            <a:ext cx="2880360" cy="676656"/>
-          </a:xfrm>
-          <a:prstGeom prst="rect">
-            <a:avLst/>
-          </a:prstGeom>
-          <a:noFill/>
-          <a:ln/>
-        </p:spPr>
-        <p:txBody>
-          <a:bodyPr wrap="square" lIns="0" tIns="0" rIns="0" bIns="0" rtlCol="0" anchor="t"/>
-          <a:lstStyle/>
-          <a:p>
-            <a:pPr indent="0" marL="0">
-              <a:buNone/>
-            </a:pPr>
-            <a:r>
-              <a:rPr lang="en-US" sz="1200" dirty="0">
-                <a:solidFill>
-                  <a:srgbClr val="2C353C"/>
-                </a:solidFill>
-                <a:latin typeface="Arial" pitchFamily="34" charset="0"/>
-                <a:ea typeface="Arial" pitchFamily="34" charset="-122"/>
-                <a:cs typeface="Arial" pitchFamily="34" charset="-120"/>
-              </a:rPr>
-              <a:t>Documentar cadena de tradición y correspondencia titular–matrícula.</a:t>
-            </a:r>
-            <a:endParaRPr lang="en-US" sz="1200" dirty="0"/>
-          </a:p>
-        </p:txBody>
-      </p:sp>
-      <p:sp>
-        <p:nvSpPr>
-          <p:cNvPr id="22" name="Shape 20"/>
-          <p:cNvSpPr/>
-          <p:nvPr/>
-        </p:nvSpPr>
-        <p:spPr>
-          <a:xfrm>
-            <a:off x="4288536" y="1901952"/>
-            <a:ext cx="3611880" cy="3657600"/>
+            <a:off x="457200" y="3355848"/>
+            <a:ext cx="11274552" cy="1371600"/>
           </a:xfrm>
           <a:prstGeom prst="rect">
             <a:avLst/>
@@ -4907,24 +4722,24 @@
       </p:sp>
       <p:sp>
         <p:nvSpPr>
-          <p:cNvPr id="23" name="Shape 21"/>
+          <p:cNvPr id="15" name="Shape 13"/>
           <p:cNvSpPr/>
           <p:nvPr/>
         </p:nvSpPr>
         <p:spPr>
           <a:xfrm>
-            <a:off x="4288536" y="1901952"/>
-            <a:ext cx="3611880" cy="594360"/>
+            <a:off x="457200" y="3355848"/>
+            <a:ext cx="73152" cy="1371600"/>
           </a:xfrm>
           <a:prstGeom prst="rect">
             <a:avLst/>
           </a:prstGeom>
           <a:solidFill>
-            <a:srgbClr val="C79A45"/>
+            <a:srgbClr val="5A6670"/>
           </a:solidFill>
           <a:ln w="12700">
             <a:solidFill>
-              <a:srgbClr val="C79A45"/>
+              <a:srgbClr val="5A6670"/>
             </a:solidFill>
             <a:prstDash val="solid"/>
           </a:ln>
@@ -4932,102 +4747,24 @@
       </p:sp>
       <p:sp>
         <p:nvSpPr>
-          <p:cNvPr id="24" name="Text 22"/>
-          <p:cNvSpPr txBox="1"/>
-          <p:nvPr/>
-        </p:nvSpPr>
-        <p:spPr>
-          <a:xfrm>
-            <a:off x="4517136" y="1901952"/>
-            <a:ext cx="548640" cy="594360"/>
-          </a:xfrm>
-          <a:prstGeom prst="rect">
-            <a:avLst/>
-          </a:prstGeom>
-          <a:noFill/>
-          <a:ln/>
-        </p:spPr>
-        <p:txBody>
-          <a:bodyPr wrap="square" lIns="0" tIns="0" rIns="0" bIns="0" rtlCol="0" anchor="ctr"/>
-          <a:lstStyle/>
-          <a:p>
-            <a:pPr indent="0" marL="0">
-              <a:buNone/>
-            </a:pPr>
-            <a:r>
-              <a:rPr lang="en-US" sz="2000" b="1" dirty="0">
-                <a:solidFill>
-                  <a:srgbClr val="1B2126"/>
-                </a:solidFill>
-                <a:latin typeface="Arial" pitchFamily="34" charset="0"/>
-                <a:ea typeface="Arial" pitchFamily="34" charset="-122"/>
-                <a:cs typeface="Arial" pitchFamily="34" charset="-120"/>
-              </a:rPr>
-              <a:t>02</a:t>
-            </a:r>
-            <a:endParaRPr lang="en-US" sz="2000" dirty="0"/>
-          </a:p>
-        </p:txBody>
-      </p:sp>
-      <p:sp>
-        <p:nvSpPr>
-          <p:cNvPr id="25" name="Text 23"/>
-          <p:cNvSpPr txBox="1"/>
-          <p:nvPr/>
-        </p:nvSpPr>
-        <p:spPr>
-          <a:xfrm>
-            <a:off x="5065776" y="1901952"/>
-            <a:ext cx="2743200" cy="594360"/>
-          </a:xfrm>
-          <a:prstGeom prst="rect">
-            <a:avLst/>
-          </a:prstGeom>
-          <a:noFill/>
-          <a:ln/>
-        </p:spPr>
-        <p:txBody>
-          <a:bodyPr wrap="square" lIns="0" tIns="0" rIns="0" bIns="0" rtlCol="0" anchor="ctr"/>
-          <a:lstStyle/>
-          <a:p>
-            <a:pPr indent="0" marL="0">
-              <a:buNone/>
-            </a:pPr>
-            <a:r>
-              <a:rPr lang="en-US" sz="1600" b="1" dirty="0">
-                <a:solidFill>
-                  <a:srgbClr val="1B2126"/>
-                </a:solidFill>
-                <a:latin typeface="Arial" pitchFamily="34" charset="0"/>
-                <a:ea typeface="Arial" pitchFamily="34" charset="-122"/>
-                <a:cs typeface="Arial" pitchFamily="34" charset="-120"/>
-              </a:rPr>
-              <a:t>Técnico / catastral</a:t>
-            </a:r>
-            <a:endParaRPr lang="en-US" sz="1600" dirty="0"/>
-          </a:p>
-        </p:txBody>
-      </p:sp>
-      <p:sp>
-        <p:nvSpPr>
-          <p:cNvPr id="26" name="Shape 24"/>
+          <p:cNvPr id="16" name="Shape 14"/>
           <p:cNvSpPr/>
           <p:nvPr/>
         </p:nvSpPr>
         <p:spPr>
           <a:xfrm>
-            <a:off x="4489704" y="2670048"/>
-            <a:ext cx="274320" cy="274320"/>
-          </a:xfrm>
-          <a:prstGeom prst="ellipse">
+            <a:off x="731520" y="3538728"/>
+            <a:ext cx="2286000" cy="292608"/>
+          </a:xfrm>
+          <a:prstGeom prst="rect">
             <a:avLst/>
           </a:prstGeom>
           <a:solidFill>
-            <a:srgbClr val="C79A45"/>
+            <a:srgbClr val="5A6670"/>
           </a:solidFill>
           <a:ln w="12700">
             <a:solidFill>
-              <a:srgbClr val="C79A45"/>
+              <a:srgbClr val="5A6670"/>
             </a:solidFill>
             <a:prstDash val="solid"/>
           </a:ln>
@@ -5035,14 +4772,14 @@
       </p:sp>
       <p:sp>
         <p:nvSpPr>
-          <p:cNvPr id="27" name="Text 25"/>
-          <p:cNvSpPr txBox="1"/>
-          <p:nvPr/>
-        </p:nvSpPr>
-        <p:spPr>
-          <a:xfrm>
-            <a:off x="4489704" y="2670048"/>
-            <a:ext cx="274320" cy="274320"/>
+          <p:cNvPr id="17" name="Text 15"/>
+          <p:cNvSpPr txBox="1"/>
+          <p:nvPr/>
+        </p:nvSpPr>
+        <p:spPr>
+          <a:xfrm>
+            <a:off x="731520" y="3538728"/>
+            <a:ext cx="2286000" cy="292608"/>
           </a:xfrm>
           <a:prstGeom prst="rect">
             <a:avLst/>
@@ -5058,7 +4795,46 @@
               <a:buNone/>
             </a:pPr>
             <a:r>
-              <a:rPr lang="en-US" sz="1100" b="1" dirty="0">
+              <a:rPr lang="en-US" sz="900" b="1" spc="50" kern="0" dirty="0">
+                <a:solidFill>
+                  <a:srgbClr val="FFFFFF"/>
+                </a:solidFill>
+                <a:latin typeface="Arial" pitchFamily="34" charset="0"/>
+                <a:ea typeface="Arial" pitchFamily="34" charset="-122"/>
+                <a:cs typeface="Arial" pitchFamily="34" charset="-120"/>
+              </a:rPr>
+              <a:t>INDICIO CARTOGRÁFICO</a:t>
+            </a:r>
+            <a:endParaRPr lang="en-US" sz="900" dirty="0"/>
+          </a:p>
+        </p:txBody>
+      </p:sp>
+      <p:sp>
+        <p:nvSpPr>
+          <p:cNvPr id="18" name="Text 16"/>
+          <p:cNvSpPr txBox="1"/>
+          <p:nvPr/>
+        </p:nvSpPr>
+        <p:spPr>
+          <a:xfrm>
+            <a:off x="731520" y="3950208"/>
+            <a:ext cx="2331720" cy="685800"/>
+          </a:xfrm>
+          <a:prstGeom prst="rect">
+            <a:avLst/>
+          </a:prstGeom>
+          <a:noFill/>
+          <a:ln/>
+        </p:spPr>
+        <p:txBody>
+          <a:bodyPr wrap="square" lIns="0" tIns="0" rIns="0" bIns="0" rtlCol="0" anchor="t"/>
+          <a:lstStyle/>
+          <a:p>
+            <a:pPr indent="0" marL="0">
+              <a:buNone/>
+            </a:pPr>
+            <a:r>
+              <a:rPr lang="en-US" sz="1500" b="1" dirty="0">
                 <a:solidFill>
                   <a:srgbClr val="1B2126"/>
                 </a:solidFill>
@@ -5066,22 +4842,22 @@
                 <a:ea typeface="Arial" pitchFamily="34" charset="-122"/>
                 <a:cs typeface="Arial" pitchFamily="34" charset="-120"/>
               </a:rPr>
-              <a:t>1</a:t>
-            </a:r>
-            <a:endParaRPr lang="en-US" sz="1100" dirty="0"/>
-          </a:p>
-        </p:txBody>
-      </p:sp>
-      <p:sp>
-        <p:nvSpPr>
-          <p:cNvPr id="28" name="Text 26"/>
-          <p:cNvSpPr txBox="1"/>
-          <p:nvPr/>
-        </p:nvSpPr>
-        <p:spPr>
-          <a:xfrm>
-            <a:off x="4882896" y="2633472"/>
-            <a:ext cx="2880360" cy="676656"/>
+              <a:t>Parcela 4 / Alberto Gerardo Bleichner Viscarra</a:t>
+            </a:r>
+            <a:endParaRPr lang="en-US" sz="1500" dirty="0"/>
+          </a:p>
+        </p:txBody>
+      </p:sp>
+      <p:sp>
+        <p:nvSpPr>
+          <p:cNvPr id="19" name="Text 17"/>
+          <p:cNvSpPr txBox="1"/>
+          <p:nvPr/>
+        </p:nvSpPr>
+        <p:spPr>
+          <a:xfrm>
+            <a:off x="3383280" y="3465576"/>
+            <a:ext cx="8183880" cy="713232"/>
           </a:xfrm>
           <a:prstGeom prst="rect">
             <a:avLst/>
@@ -5097,7 +4873,7 @@
               <a:buNone/>
             </a:pPr>
             <a:r>
-              <a:rPr lang="en-US" sz="1200" dirty="0">
+              <a:rPr lang="en-US" sz="1300" dirty="0">
                 <a:solidFill>
                   <a:srgbClr val="2C353C"/>
                 </a:solidFill>
@@ -5105,32 +4881,32 @@
                 <a:ea typeface="Arial" pitchFamily="34" charset="-122"/>
                 <a:cs typeface="Arial" pitchFamily="34" charset="-120"/>
               </a:rPr>
-              <a:t>Solicitar planos municipales certificados y archivos digitales de polígonos.</a:t>
-            </a:r>
-            <a:endParaRPr lang="en-US" sz="1200" dirty="0"/>
-          </a:p>
-        </p:txBody>
-      </p:sp>
-      <p:sp>
-        <p:nvSpPr>
-          <p:cNvPr id="29" name="Shape 27"/>
+              <a:t>El plano identifica una parcela de 2,2664 ha a nombre de Bleichner. La lista preliminar revisada no muestra una entrada individual a ese nombre que vincule la parcela con un folio.</a:t>
+            </a:r>
+            <a:endParaRPr lang="en-US" sz="1300" dirty="0"/>
+          </a:p>
+        </p:txBody>
+      </p:sp>
+      <p:sp>
+        <p:nvSpPr>
+          <p:cNvPr id="20" name="Shape 18"/>
           <p:cNvSpPr/>
           <p:nvPr/>
         </p:nvSpPr>
         <p:spPr>
           <a:xfrm>
-            <a:off x="4489704" y="3383280"/>
-            <a:ext cx="274320" cy="274320"/>
-          </a:xfrm>
-          <a:prstGeom prst="ellipse">
+            <a:off x="3383280" y="4206240"/>
+            <a:ext cx="8183880" cy="13716"/>
+          </a:xfrm>
+          <a:prstGeom prst="rect">
             <a:avLst/>
           </a:prstGeom>
           <a:solidFill>
-            <a:srgbClr val="C79A45"/>
+            <a:srgbClr val="E1E4E7"/>
           </a:solidFill>
           <a:ln w="12700">
             <a:solidFill>
-              <a:srgbClr val="C79A45"/>
+              <a:srgbClr val="E1E4E7"/>
             </a:solidFill>
             <a:prstDash val="solid"/>
           </a:ln>
@@ -5138,14 +4914,14 @@
       </p:sp>
       <p:sp>
         <p:nvSpPr>
-          <p:cNvPr id="30" name="Text 28"/>
-          <p:cNvSpPr txBox="1"/>
-          <p:nvPr/>
-        </p:nvSpPr>
-        <p:spPr>
-          <a:xfrm>
-            <a:off x="4489704" y="3383280"/>
-            <a:ext cx="274320" cy="274320"/>
+          <p:cNvPr id="21" name="Text 19"/>
+          <p:cNvSpPr txBox="1"/>
+          <p:nvPr/>
+        </p:nvSpPr>
+        <p:spPr>
+          <a:xfrm>
+            <a:off x="3383280" y="4251960"/>
+            <a:ext cx="8183880" cy="457200"/>
           </a:xfrm>
           <a:prstGeom prst="rect">
             <a:avLst/>
@@ -5157,279 +4933,48 @@
           <a:bodyPr wrap="square" lIns="0" tIns="0" rIns="0" bIns="0" rtlCol="0" anchor="ctr"/>
           <a:lstStyle/>
           <a:p>
-            <a:pPr algn="ctr" indent="0" marL="0">
-              <a:buNone/>
-            </a:pPr>
-            <a:r>
-              <a:rPr lang="en-US" sz="1100" b="1" dirty="0">
-                <a:solidFill>
-                  <a:srgbClr val="1B2126"/>
-                </a:solidFill>
-                <a:latin typeface="Arial" pitchFamily="34" charset="0"/>
-                <a:ea typeface="Arial" pitchFamily="34" charset="-122"/>
-                <a:cs typeface="Arial" pitchFamily="34" charset="-120"/>
-              </a:rPr>
-              <a:t>2</a:t>
-            </a:r>
-            <a:endParaRPr lang="en-US" sz="1100" dirty="0"/>
-          </a:p>
-        </p:txBody>
-      </p:sp>
-      <p:sp>
-        <p:nvSpPr>
-          <p:cNvPr id="31" name="Text 29"/>
-          <p:cNvSpPr txBox="1"/>
-          <p:nvPr/>
-        </p:nvSpPr>
-        <p:spPr>
-          <a:xfrm>
-            <a:off x="4882896" y="3346704"/>
-            <a:ext cx="2880360" cy="676656"/>
-          </a:xfrm>
-          <a:prstGeom prst="rect">
-            <a:avLst/>
-          </a:prstGeom>
-          <a:noFill/>
-          <a:ln/>
-        </p:spPr>
-        <p:txBody>
-          <a:bodyPr wrap="square" lIns="0" tIns="0" rIns="0" bIns="0" rtlCol="0" anchor="t"/>
-          <a:lstStyle/>
-          <a:p>
-            <a:pPr indent="0" marL="0">
-              <a:buNone/>
-            </a:pPr>
-            <a:r>
-              <a:rPr lang="en-US" sz="1200" dirty="0">
-                <a:solidFill>
-                  <a:srgbClr val="2C353C"/>
-                </a:solidFill>
-                <a:latin typeface="Arial" pitchFamily="34" charset="0"/>
-                <a:ea typeface="Arial" pitchFamily="34" charset="-122"/>
-                <a:cs typeface="Arial" pitchFamily="34" charset="-120"/>
-              </a:rPr>
-              <a:t>Georreferenciar las parcelas candidatas y contrastar superficie y linderos.</a:t>
-            </a:r>
-            <a:endParaRPr lang="en-US" sz="1200" dirty="0"/>
-          </a:p>
-        </p:txBody>
-      </p:sp>
-      <p:sp>
-        <p:nvSpPr>
-          <p:cNvPr id="32" name="Shape 30"/>
+            <a:pPr indent="0" marL="0">
+              <a:buNone/>
+            </a:pPr>
+            <a:r>
+              <a:rPr lang="en-US" sz="1000" b="1" dirty="0">
+                <a:solidFill>
+                  <a:srgbClr val="8A6420"/>
+                </a:solidFill>
+                <a:latin typeface="Arial" pitchFamily="34" charset="0"/>
+                <a:ea typeface="Arial" pitchFamily="34" charset="-122"/>
+                <a:cs typeface="Arial" pitchFamily="34" charset="-120"/>
+              </a:rPr>
+              <a:t>FUENTES  </a:t>
+            </a:r>
+            <a:pPr indent="0" marL="0">
+              <a:buNone/>
+            </a:pPr>
+            <a:r>
+              <a:rPr lang="en-US" sz="1100" dirty="0">
+                <a:solidFill>
+                  <a:srgbClr val="5F6A73"/>
+                </a:solidFill>
+                <a:latin typeface="Arial" pitchFamily="34" charset="0"/>
+                <a:ea typeface="Arial" pitchFamily="34" charset="-122"/>
+                <a:cs typeface="Arial" pitchFamily="34" charset="-120"/>
+              </a:rPr>
+              <a:t>Plano municipal COM Contorno Bajo, parcela 4; tabla repetida en COM Mamani; lista preliminar de DDRR, INCERPAZ 3.docx.</a:t>
+            </a:r>
+            <a:endParaRPr lang="en-US" sz="1400" dirty="0"/>
+          </a:p>
+        </p:txBody>
+      </p:sp>
+      <p:sp>
+        <p:nvSpPr>
+          <p:cNvPr id="22" name="Shape 20"/>
           <p:cNvSpPr/>
           <p:nvPr/>
         </p:nvSpPr>
         <p:spPr>
           <a:xfrm>
-            <a:off x="4489704" y="4096512"/>
-            <a:ext cx="274320" cy="274320"/>
-          </a:xfrm>
-          <a:prstGeom prst="ellipse">
-            <a:avLst/>
-          </a:prstGeom>
-          <a:solidFill>
-            <a:srgbClr val="C79A45"/>
-          </a:solidFill>
-          <a:ln w="12700">
-            <a:solidFill>
-              <a:srgbClr val="C79A45"/>
-            </a:solidFill>
-            <a:prstDash val="solid"/>
-          </a:ln>
-        </p:spPr>
-      </p:sp>
-      <p:sp>
-        <p:nvSpPr>
-          <p:cNvPr id="33" name="Text 31"/>
-          <p:cNvSpPr txBox="1"/>
-          <p:nvPr/>
-        </p:nvSpPr>
-        <p:spPr>
-          <a:xfrm>
-            <a:off x="4489704" y="4096512"/>
-            <a:ext cx="274320" cy="274320"/>
-          </a:xfrm>
-          <a:prstGeom prst="rect">
-            <a:avLst/>
-          </a:prstGeom>
-          <a:noFill/>
-          <a:ln/>
-        </p:spPr>
-        <p:txBody>
-          <a:bodyPr wrap="square" lIns="0" tIns="0" rIns="0" bIns="0" rtlCol="0" anchor="ctr"/>
-          <a:lstStyle/>
-          <a:p>
-            <a:pPr algn="ctr" indent="0" marL="0">
-              <a:buNone/>
-            </a:pPr>
-            <a:r>
-              <a:rPr lang="en-US" sz="1100" b="1" dirty="0">
-                <a:solidFill>
-                  <a:srgbClr val="1B2126"/>
-                </a:solidFill>
-                <a:latin typeface="Arial" pitchFamily="34" charset="0"/>
-                <a:ea typeface="Arial" pitchFamily="34" charset="-122"/>
-                <a:cs typeface="Arial" pitchFamily="34" charset="-120"/>
-              </a:rPr>
-              <a:t>3</a:t>
-            </a:r>
-            <a:endParaRPr lang="en-US" sz="1100" dirty="0"/>
-          </a:p>
-        </p:txBody>
-      </p:sp>
-      <p:sp>
-        <p:nvSpPr>
-          <p:cNvPr id="34" name="Text 32"/>
-          <p:cNvSpPr txBox="1"/>
-          <p:nvPr/>
-        </p:nvSpPr>
-        <p:spPr>
-          <a:xfrm>
-            <a:off x="4882896" y="4059936"/>
-            <a:ext cx="2880360" cy="676656"/>
-          </a:xfrm>
-          <a:prstGeom prst="rect">
-            <a:avLst/>
-          </a:prstGeom>
-          <a:noFill/>
-          <a:ln/>
-        </p:spPr>
-        <p:txBody>
-          <a:bodyPr wrap="square" lIns="0" tIns="0" rIns="0" bIns="0" rtlCol="0" anchor="t"/>
-          <a:lstStyle/>
-          <a:p>
-            <a:pPr indent="0" marL="0">
-              <a:buNone/>
-            </a:pPr>
-            <a:r>
-              <a:rPr lang="en-US" sz="1200" dirty="0">
-                <a:solidFill>
-                  <a:srgbClr val="2C353C"/>
-                </a:solidFill>
-                <a:latin typeface="Arial" pitchFamily="34" charset="0"/>
-                <a:ea typeface="Arial" pitchFamily="34" charset="-122"/>
-                <a:cs typeface="Arial" pitchFamily="34" charset="-120"/>
-              </a:rPr>
-              <a:t>Resolver si Mamani y Contorno Bajo corresponden a la misma ubicación.</a:t>
-            </a:r>
-            <a:endParaRPr lang="en-US" sz="1200" dirty="0"/>
-          </a:p>
-        </p:txBody>
-      </p:sp>
-      <p:sp>
-        <p:nvSpPr>
-          <p:cNvPr id="35" name="Shape 33"/>
-          <p:cNvSpPr/>
-          <p:nvPr/>
-        </p:nvSpPr>
-        <p:spPr>
-          <a:xfrm>
-            <a:off x="4489704" y="4809744"/>
-            <a:ext cx="274320" cy="274320"/>
-          </a:xfrm>
-          <a:prstGeom prst="ellipse">
-            <a:avLst/>
-          </a:prstGeom>
-          <a:solidFill>
-            <a:srgbClr val="C79A45"/>
-          </a:solidFill>
-          <a:ln w="12700">
-            <a:solidFill>
-              <a:srgbClr val="C79A45"/>
-            </a:solidFill>
-            <a:prstDash val="solid"/>
-          </a:ln>
-        </p:spPr>
-      </p:sp>
-      <p:sp>
-        <p:nvSpPr>
-          <p:cNvPr id="36" name="Text 34"/>
-          <p:cNvSpPr txBox="1"/>
-          <p:nvPr/>
-        </p:nvSpPr>
-        <p:spPr>
-          <a:xfrm>
-            <a:off x="4489704" y="4809744"/>
-            <a:ext cx="274320" cy="274320"/>
-          </a:xfrm>
-          <a:prstGeom prst="rect">
-            <a:avLst/>
-          </a:prstGeom>
-          <a:noFill/>
-          <a:ln/>
-        </p:spPr>
-        <p:txBody>
-          <a:bodyPr wrap="square" lIns="0" tIns="0" rIns="0" bIns="0" rtlCol="0" anchor="ctr"/>
-          <a:lstStyle/>
-          <a:p>
-            <a:pPr algn="ctr" indent="0" marL="0">
-              <a:buNone/>
-            </a:pPr>
-            <a:r>
-              <a:rPr lang="en-US" sz="1100" b="1" dirty="0">
-                <a:solidFill>
-                  <a:srgbClr val="1B2126"/>
-                </a:solidFill>
-                <a:latin typeface="Arial" pitchFamily="34" charset="0"/>
-                <a:ea typeface="Arial" pitchFamily="34" charset="-122"/>
-                <a:cs typeface="Arial" pitchFamily="34" charset="-120"/>
-              </a:rPr>
-              <a:t>4</a:t>
-            </a:r>
-            <a:endParaRPr lang="en-US" sz="1100" dirty="0"/>
-          </a:p>
-        </p:txBody>
-      </p:sp>
-      <p:sp>
-        <p:nvSpPr>
-          <p:cNvPr id="37" name="Text 35"/>
-          <p:cNvSpPr txBox="1"/>
-          <p:nvPr/>
-        </p:nvSpPr>
-        <p:spPr>
-          <a:xfrm>
-            <a:off x="4882896" y="4773168"/>
-            <a:ext cx="2880360" cy="676656"/>
-          </a:xfrm>
-          <a:prstGeom prst="rect">
-            <a:avLst/>
-          </a:prstGeom>
-          <a:noFill/>
-          <a:ln/>
-        </p:spPr>
-        <p:txBody>
-          <a:bodyPr wrap="square" lIns="0" tIns="0" rIns="0" bIns="0" rtlCol="0" anchor="t"/>
-          <a:lstStyle/>
-          <a:p>
-            <a:pPr indent="0" marL="0">
-              <a:buNone/>
-            </a:pPr>
-            <a:r>
-              <a:rPr lang="en-US" sz="1200" dirty="0">
-                <a:solidFill>
-                  <a:srgbClr val="2C353C"/>
-                </a:solidFill>
-                <a:latin typeface="Arial" pitchFamily="34" charset="0"/>
-                <a:ea typeface="Arial" pitchFamily="34" charset="-122"/>
-                <a:cs typeface="Arial" pitchFamily="34" charset="-120"/>
-              </a:rPr>
-              <a:t>Revisar superposiciones y si las tablas repetidas describen una o varias parcelas.</a:t>
-            </a:r>
-            <a:endParaRPr lang="en-US" sz="1200" dirty="0"/>
-          </a:p>
-        </p:txBody>
-      </p:sp>
-      <p:sp>
-        <p:nvSpPr>
-          <p:cNvPr id="38" name="Shape 36"/>
-          <p:cNvSpPr/>
-          <p:nvPr/>
-        </p:nvSpPr>
-        <p:spPr>
-          <a:xfrm>
-            <a:off x="8119872" y="1901952"/>
-            <a:ext cx="3611880" cy="3657600"/>
+            <a:off x="457200" y="4837176"/>
+            <a:ext cx="11274552" cy="1371600"/>
           </a:xfrm>
           <a:prstGeom prst="rect">
             <a:avLst/>
@@ -5454,24 +4999,24 @@
       </p:sp>
       <p:sp>
         <p:nvSpPr>
-          <p:cNvPr id="39" name="Shape 37"/>
+          <p:cNvPr id="23" name="Shape 21"/>
           <p:cNvSpPr/>
           <p:nvPr/>
         </p:nvSpPr>
         <p:spPr>
           <a:xfrm>
-            <a:off x="8119872" y="1901952"/>
-            <a:ext cx="3611880" cy="594360"/>
+            <a:off x="457200" y="4837176"/>
+            <a:ext cx="73152" cy="1371600"/>
           </a:xfrm>
           <a:prstGeom prst="rect">
             <a:avLst/>
           </a:prstGeom>
           <a:solidFill>
-            <a:srgbClr val="5A6670"/>
+            <a:srgbClr val="8A939B"/>
           </a:solidFill>
           <a:ln w="12700">
             <a:solidFill>
-              <a:srgbClr val="5A6670"/>
+              <a:srgbClr val="8A939B"/>
             </a:solidFill>
             <a:prstDash val="solid"/>
           </a:ln>
@@ -5479,102 +5024,24 @@
       </p:sp>
       <p:sp>
         <p:nvSpPr>
-          <p:cNvPr id="40" name="Text 38"/>
-          <p:cNvSpPr txBox="1"/>
-          <p:nvPr/>
-        </p:nvSpPr>
-        <p:spPr>
-          <a:xfrm>
-            <a:off x="8348472" y="1901952"/>
-            <a:ext cx="548640" cy="594360"/>
-          </a:xfrm>
-          <a:prstGeom prst="rect">
-            <a:avLst/>
-          </a:prstGeom>
-          <a:noFill/>
-          <a:ln/>
-        </p:spPr>
-        <p:txBody>
-          <a:bodyPr wrap="square" lIns="0" tIns="0" rIns="0" bIns="0" rtlCol="0" anchor="ctr"/>
-          <a:lstStyle/>
-          <a:p>
-            <a:pPr indent="0" marL="0">
-              <a:buNone/>
-            </a:pPr>
-            <a:r>
-              <a:rPr lang="en-US" sz="2000" b="1" dirty="0">
-                <a:solidFill>
-                  <a:srgbClr val="C79A45"/>
-                </a:solidFill>
-                <a:latin typeface="Arial" pitchFamily="34" charset="0"/>
-                <a:ea typeface="Arial" pitchFamily="34" charset="-122"/>
-                <a:cs typeface="Arial" pitchFamily="34" charset="-120"/>
-              </a:rPr>
-              <a:t>03</a:t>
-            </a:r>
-            <a:endParaRPr lang="en-US" sz="2000" dirty="0"/>
-          </a:p>
-        </p:txBody>
-      </p:sp>
-      <p:sp>
-        <p:nvSpPr>
-          <p:cNvPr id="41" name="Text 39"/>
-          <p:cNvSpPr txBox="1"/>
-          <p:nvPr/>
-        </p:nvSpPr>
-        <p:spPr>
-          <a:xfrm>
-            <a:off x="8897112" y="1901952"/>
-            <a:ext cx="2743200" cy="594360"/>
-          </a:xfrm>
-          <a:prstGeom prst="rect">
-            <a:avLst/>
-          </a:prstGeom>
-          <a:noFill/>
-          <a:ln/>
-        </p:spPr>
-        <p:txBody>
-          <a:bodyPr wrap="square" lIns="0" tIns="0" rIns="0" bIns="0" rtlCol="0" anchor="ctr"/>
-          <a:lstStyle/>
-          <a:p>
-            <a:pPr indent="0" marL="0">
-              <a:buNone/>
-            </a:pPr>
-            <a:r>
-              <a:rPr lang="en-US" sz="1600" b="1" dirty="0">
-                <a:solidFill>
-                  <a:srgbClr val="FFFFFF"/>
-                </a:solidFill>
-                <a:latin typeface="Arial" pitchFamily="34" charset="0"/>
-                <a:ea typeface="Arial" pitchFamily="34" charset="-122"/>
-                <a:cs typeface="Arial" pitchFamily="34" charset="-120"/>
-              </a:rPr>
-              <a:t>Contable / gestión</a:t>
-            </a:r>
-            <a:endParaRPr lang="en-US" sz="1600" dirty="0"/>
-          </a:p>
-        </p:txBody>
-      </p:sp>
-      <p:sp>
-        <p:nvSpPr>
-          <p:cNvPr id="42" name="Shape 40"/>
+          <p:cNvPr id="24" name="Shape 22"/>
           <p:cNvSpPr/>
           <p:nvPr/>
         </p:nvSpPr>
         <p:spPr>
           <a:xfrm>
-            <a:off x="8321040" y="2670048"/>
-            <a:ext cx="274320" cy="274320"/>
-          </a:xfrm>
-          <a:prstGeom prst="ellipse">
+            <a:off x="731520" y="5020056"/>
+            <a:ext cx="2286000" cy="292608"/>
+          </a:xfrm>
+          <a:prstGeom prst="rect">
             <a:avLst/>
           </a:prstGeom>
           <a:solidFill>
-            <a:srgbClr val="C79A45"/>
+            <a:srgbClr val="8A939B"/>
           </a:solidFill>
           <a:ln w="12700">
             <a:solidFill>
-              <a:srgbClr val="C79A45"/>
+              <a:srgbClr val="8A939B"/>
             </a:solidFill>
             <a:prstDash val="solid"/>
           </a:ln>
@@ -5582,14 +5049,14 @@
       </p:sp>
       <p:sp>
         <p:nvSpPr>
-          <p:cNvPr id="43" name="Text 41"/>
-          <p:cNvSpPr txBox="1"/>
-          <p:nvPr/>
-        </p:nvSpPr>
-        <p:spPr>
-          <a:xfrm>
-            <a:off x="8321040" y="2670048"/>
-            <a:ext cx="274320" cy="274320"/>
+          <p:cNvPr id="25" name="Text 23"/>
+          <p:cNvSpPr txBox="1"/>
+          <p:nvPr/>
+        </p:nvSpPr>
+        <p:spPr>
+          <a:xfrm>
+            <a:off x="731520" y="5020056"/>
+            <a:ext cx="2286000" cy="292608"/>
           </a:xfrm>
           <a:prstGeom prst="rect">
             <a:avLst/>
@@ -5605,7 +5072,46 @@
               <a:buNone/>
             </a:pPr>
             <a:r>
-              <a:rPr lang="en-US" sz="1100" b="1" dirty="0">
+              <a:rPr lang="en-US" sz="900" b="1" spc="50" kern="0" dirty="0">
+                <a:solidFill>
+                  <a:srgbClr val="FFFFFF"/>
+                </a:solidFill>
+                <a:latin typeface="Arial" pitchFamily="34" charset="0"/>
+                <a:ea typeface="Arial" pitchFamily="34" charset="-122"/>
+                <a:cs typeface="Arial" pitchFamily="34" charset="-120"/>
+              </a:rPr>
+              <a:t>PENDIENTE DE IDENTIFICAR</a:t>
+            </a:r>
+            <a:endParaRPr lang="en-US" sz="900" dirty="0"/>
+          </a:p>
+        </p:txBody>
+      </p:sp>
+      <p:sp>
+        <p:nvSpPr>
+          <p:cNvPr id="26" name="Text 24"/>
+          <p:cNvSpPr txBox="1"/>
+          <p:nvPr/>
+        </p:nvSpPr>
+        <p:spPr>
+          <a:xfrm>
+            <a:off x="731520" y="5431536"/>
+            <a:ext cx="2331720" cy="685800"/>
+          </a:xfrm>
+          <a:prstGeom prst="rect">
+            <a:avLst/>
+          </a:prstGeom>
+          <a:noFill/>
+          <a:ln/>
+        </p:spPr>
+        <p:txBody>
+          <a:bodyPr wrap="square" lIns="0" tIns="0" rIns="0" bIns="0" rtlCol="0" anchor="t"/>
+          <a:lstStyle/>
+          <a:p>
+            <a:pPr indent="0" marL="0">
+              <a:buNone/>
+            </a:pPr>
+            <a:r>
+              <a:rPr lang="en-US" sz="1500" b="1" dirty="0">
                 <a:solidFill>
                   <a:srgbClr val="1B2126"/>
                 </a:solidFill>
@@ -5613,22 +5119,22 @@
                 <a:ea typeface="Arial" pitchFamily="34" charset="-122"/>
                 <a:cs typeface="Arial" pitchFamily="34" charset="-120"/>
               </a:rPr>
-              <a:t>1</a:t>
-            </a:r>
-            <a:endParaRPr lang="en-US" sz="1100" dirty="0"/>
-          </a:p>
-        </p:txBody>
-      </p:sp>
-      <p:sp>
-        <p:nvSpPr>
-          <p:cNvPr id="44" name="Text 42"/>
-          <p:cNvSpPr txBox="1"/>
-          <p:nvPr/>
-        </p:nvSpPr>
-        <p:spPr>
-          <a:xfrm>
-            <a:off x="8714232" y="2633472"/>
-            <a:ext cx="2880360" cy="676656"/>
+              <a:t>Otros nombres y registros genéricos</a:t>
+            </a:r>
+            <a:endParaRPr lang="en-US" sz="1500" dirty="0"/>
+          </a:p>
+        </p:txBody>
+      </p:sp>
+      <p:sp>
+        <p:nvSpPr>
+          <p:cNvPr id="27" name="Text 25"/>
+          <p:cNvSpPr txBox="1"/>
+          <p:nvPr/>
+        </p:nvSpPr>
+        <p:spPr>
+          <a:xfrm>
+            <a:off x="3383280" y="4946904"/>
+            <a:ext cx="8183880" cy="713232"/>
           </a:xfrm>
           <a:prstGeom prst="rect">
             <a:avLst/>
@@ -5644,7 +5150,7 @@
               <a:buNone/>
             </a:pPr>
             <a:r>
-              <a:rPr lang="en-US" sz="1200" dirty="0">
+              <a:rPr lang="en-US" sz="1300" dirty="0">
                 <a:solidFill>
                   <a:srgbClr val="2C353C"/>
                 </a:solidFill>
@@ -5652,32 +5158,32 @@
                 <a:ea typeface="Arial" pitchFamily="34" charset="-122"/>
                 <a:cs typeface="Arial" pitchFamily="34" charset="-120"/>
               </a:rPr>
-              <a:t>Identificar moneda, fecha, comprobantes y origen de saldos 12102002030 y 12102002038.</a:t>
-            </a:r>
-            <a:endParaRPr lang="en-US" sz="1200" dirty="0"/>
-          </a:p>
-        </p:txBody>
-      </p:sp>
-      <p:sp>
-        <p:nvSpPr>
-          <p:cNvPr id="45" name="Shape 43"/>
+              <a:t>Hay nombres, cuentas contables y referencias zonales que todavía no se pueden asociar con seguridad a una matrícula o polígono específico.</a:t>
+            </a:r>
+            <a:endParaRPr lang="en-US" sz="1300" dirty="0"/>
+          </a:p>
+        </p:txBody>
+      </p:sp>
+      <p:sp>
+        <p:nvSpPr>
+          <p:cNvPr id="28" name="Shape 26"/>
           <p:cNvSpPr/>
           <p:nvPr/>
         </p:nvSpPr>
         <p:spPr>
           <a:xfrm>
-            <a:off x="8321040" y="3383280"/>
-            <a:ext cx="274320" cy="274320"/>
-          </a:xfrm>
-          <a:prstGeom prst="ellipse">
+            <a:off x="3383280" y="5687568"/>
+            <a:ext cx="8183880" cy="13716"/>
+          </a:xfrm>
+          <a:prstGeom prst="rect">
             <a:avLst/>
           </a:prstGeom>
           <a:solidFill>
-            <a:srgbClr val="C79A45"/>
+            <a:srgbClr val="E1E4E7"/>
           </a:solidFill>
           <a:ln w="12700">
             <a:solidFill>
-              <a:srgbClr val="C79A45"/>
+              <a:srgbClr val="E1E4E7"/>
             </a:solidFill>
             <a:prstDash val="solid"/>
           </a:ln>
@@ -5685,14 +5191,14 @@
       </p:sp>
       <p:sp>
         <p:nvSpPr>
-          <p:cNvPr id="46" name="Text 44"/>
-          <p:cNvSpPr txBox="1"/>
-          <p:nvPr/>
-        </p:nvSpPr>
-        <p:spPr>
-          <a:xfrm>
-            <a:off x="8321040" y="3383280"/>
-            <a:ext cx="274320" cy="274320"/>
+          <p:cNvPr id="29" name="Text 27"/>
+          <p:cNvSpPr txBox="1"/>
+          <p:nvPr/>
+        </p:nvSpPr>
+        <p:spPr>
+          <a:xfrm>
+            <a:off x="3383280" y="5733288"/>
+            <a:ext cx="8183880" cy="457200"/>
           </a:xfrm>
           <a:prstGeom prst="rect">
             <a:avLst/>
@@ -5704,98 +5210,48 @@
           <a:bodyPr wrap="square" lIns="0" tIns="0" rIns="0" bIns="0" rtlCol="0" anchor="ctr"/>
           <a:lstStyle/>
           <a:p>
-            <a:pPr algn="ctr" indent="0" marL="0">
-              <a:buNone/>
-            </a:pPr>
-            <a:r>
-              <a:rPr lang="en-US" sz="1100" b="1" dirty="0">
-                <a:solidFill>
-                  <a:srgbClr val="1B2126"/>
-                </a:solidFill>
-                <a:latin typeface="Arial" pitchFamily="34" charset="0"/>
-                <a:ea typeface="Arial" pitchFamily="34" charset="-122"/>
-                <a:cs typeface="Arial" pitchFamily="34" charset="-120"/>
-              </a:rPr>
-              <a:t>2</a:t>
-            </a:r>
-            <a:endParaRPr lang="en-US" sz="1100" dirty="0"/>
-          </a:p>
-        </p:txBody>
-      </p:sp>
-      <p:sp>
-        <p:nvSpPr>
-          <p:cNvPr id="47" name="Text 45"/>
-          <p:cNvSpPr txBox="1"/>
-          <p:nvPr/>
-        </p:nvSpPr>
-        <p:spPr>
-          <a:xfrm>
-            <a:off x="8714232" y="3346704"/>
-            <a:ext cx="2880360" cy="676656"/>
-          </a:xfrm>
-          <a:prstGeom prst="rect">
-            <a:avLst/>
-          </a:prstGeom>
-          <a:noFill/>
-          <a:ln/>
-        </p:spPr>
-        <p:txBody>
-          <a:bodyPr wrap="square" lIns="0" tIns="0" rIns="0" bIns="0" rtlCol="0" anchor="t"/>
-          <a:lstStyle/>
-          <a:p>
-            <a:pPr indent="0" marL="0">
-              <a:buNone/>
-            </a:pPr>
-            <a:r>
-              <a:rPr lang="en-US" sz="1200" dirty="0">
-                <a:solidFill>
-                  <a:srgbClr val="2C353C"/>
-                </a:solidFill>
-                <a:latin typeface="Arial" pitchFamily="34" charset="0"/>
-                <a:ea typeface="Arial" pitchFamily="34" charset="-122"/>
-                <a:cs typeface="Arial" pitchFamily="34" charset="-120"/>
-              </a:rPr>
-              <a:t>Conciliar saldos contables con contratos, pagos y asientos patrimoniales.</a:t>
-            </a:r>
-            <a:endParaRPr lang="en-US" sz="1200" dirty="0"/>
-          </a:p>
-        </p:txBody>
-      </p:sp>
-      <p:sp>
-        <p:nvSpPr>
-          <p:cNvPr id="48" name="Shape 46"/>
-          <p:cNvSpPr/>
-          <p:nvPr/>
-        </p:nvSpPr>
-        <p:spPr>
-          <a:xfrm>
-            <a:off x="8321040" y="4096512"/>
-            <a:ext cx="274320" cy="274320"/>
-          </a:xfrm>
-          <a:prstGeom prst="ellipse">
-            <a:avLst/>
-          </a:prstGeom>
-          <a:solidFill>
-            <a:srgbClr val="C79A45"/>
-          </a:solidFill>
-          <a:ln w="12700">
-            <a:solidFill>
-              <a:srgbClr val="C79A45"/>
-            </a:solidFill>
-            <a:prstDash val="solid"/>
-          </a:ln>
-        </p:spPr>
-      </p:sp>
-      <p:sp>
-        <p:nvSpPr>
-          <p:cNvPr id="49" name="Text 47"/>
-          <p:cNvSpPr txBox="1"/>
-          <p:nvPr/>
-        </p:nvSpPr>
-        <p:spPr>
-          <a:xfrm>
-            <a:off x="8321040" y="4096512"/>
-            <a:ext cx="274320" cy="274320"/>
+            <a:pPr indent="0" marL="0">
+              <a:buNone/>
+            </a:pPr>
+            <a:r>
+              <a:rPr lang="en-US" sz="1000" b="1" dirty="0">
+                <a:solidFill>
+                  <a:srgbClr val="8A6420"/>
+                </a:solidFill>
+                <a:latin typeface="Arial" pitchFamily="34" charset="0"/>
+                <a:ea typeface="Arial" pitchFamily="34" charset="-122"/>
+                <a:cs typeface="Arial" pitchFamily="34" charset="-120"/>
+              </a:rPr>
+              <a:t>FUENTES  </a:t>
+            </a:r>
+            <a:pPr indent="0" marL="0">
+              <a:buNone/>
+            </a:pPr>
+            <a:r>
+              <a:rPr lang="en-US" sz="1100" dirty="0">
+                <a:solidFill>
+                  <a:srgbClr val="5F6A73"/>
+                </a:solidFill>
+                <a:latin typeface="Arial" pitchFamily="34" charset="0"/>
+                <a:ea typeface="Arial" pitchFamily="34" charset="-122"/>
+                <a:cs typeface="Arial" pitchFamily="34" charset="-120"/>
+              </a:rPr>
+              <a:t>Matriz de cruces: informe de Ariel León de 2012, mayores de marzo de 2026, lista preliminar de DDRR y siete planos COM. Los casos individuales remiten a las secciones, cuentas o referencias indicadas en sus respectivas filas.</a:t>
+            </a:r>
+            <a:endParaRPr lang="en-US" sz="1400" dirty="0"/>
+          </a:p>
+        </p:txBody>
+      </p:sp>
+      <p:sp>
+        <p:nvSpPr>
+          <p:cNvPr id="30" name="Text 28"/>
+          <p:cNvSpPr txBox="1"/>
+          <p:nvPr/>
+        </p:nvSpPr>
+        <p:spPr>
+          <a:xfrm>
+            <a:off x="457200" y="6446520"/>
+            <a:ext cx="10515600" cy="274320"/>
           </a:xfrm>
           <a:prstGeom prst="rect">
             <a:avLst/>
@@ -5807,315 +5263,6 @@
           <a:bodyPr wrap="square" lIns="0" tIns="0" rIns="0" bIns="0" rtlCol="0" anchor="ctr"/>
           <a:lstStyle/>
           <a:p>
-            <a:pPr algn="ctr" indent="0" marL="0">
-              <a:buNone/>
-            </a:pPr>
-            <a:r>
-              <a:rPr lang="en-US" sz="1100" b="1" dirty="0">
-                <a:solidFill>
-                  <a:srgbClr val="1B2126"/>
-                </a:solidFill>
-                <a:latin typeface="Arial" pitchFamily="34" charset="0"/>
-                <a:ea typeface="Arial" pitchFamily="34" charset="-122"/>
-                <a:cs typeface="Arial" pitchFamily="34" charset="-120"/>
-              </a:rPr>
-              <a:t>3</a:t>
-            </a:r>
-            <a:endParaRPr lang="en-US" sz="1100" dirty="0"/>
-          </a:p>
-        </p:txBody>
-      </p:sp>
-      <p:sp>
-        <p:nvSpPr>
-          <p:cNvPr id="50" name="Text 48"/>
-          <p:cNvSpPr txBox="1"/>
-          <p:nvPr/>
-        </p:nvSpPr>
-        <p:spPr>
-          <a:xfrm>
-            <a:off x="8714232" y="4059936"/>
-            <a:ext cx="2880360" cy="676656"/>
-          </a:xfrm>
-          <a:prstGeom prst="rect">
-            <a:avLst/>
-          </a:prstGeom>
-          <a:noFill/>
-          <a:ln/>
-        </p:spPr>
-        <p:txBody>
-          <a:bodyPr wrap="square" lIns="0" tIns="0" rIns="0" bIns="0" rtlCol="0" anchor="t"/>
-          <a:lstStyle/>
-          <a:p>
-            <a:pPr indent="0" marL="0">
-              <a:buNone/>
-            </a:pPr>
-            <a:r>
-              <a:rPr lang="en-US" sz="1200" dirty="0">
-                <a:solidFill>
-                  <a:srgbClr val="2C353C"/>
-                </a:solidFill>
-                <a:latin typeface="Arial" pitchFamily="34" charset="0"/>
-                <a:ea typeface="Arial" pitchFamily="34" charset="-122"/>
-                <a:cs typeface="Arial" pitchFamily="34" charset="-120"/>
-              </a:rPr>
-              <a:t>Asignar responsable, estado, acción y fecha en Seguimiento_INCERPAZ.</a:t>
-            </a:r>
-            <a:endParaRPr lang="en-US" sz="1200" dirty="0"/>
-          </a:p>
-        </p:txBody>
-      </p:sp>
-      <p:sp>
-        <p:nvSpPr>
-          <p:cNvPr id="51" name="Shape 49"/>
-          <p:cNvSpPr/>
-          <p:nvPr/>
-        </p:nvSpPr>
-        <p:spPr>
-          <a:xfrm>
-            <a:off x="8321040" y="4809744"/>
-            <a:ext cx="274320" cy="274320"/>
-          </a:xfrm>
-          <a:prstGeom prst="ellipse">
-            <a:avLst/>
-          </a:prstGeom>
-          <a:solidFill>
-            <a:srgbClr val="C79A45"/>
-          </a:solidFill>
-          <a:ln w="12700">
-            <a:solidFill>
-              <a:srgbClr val="C79A45"/>
-            </a:solidFill>
-            <a:prstDash val="solid"/>
-          </a:ln>
-        </p:spPr>
-      </p:sp>
-      <p:sp>
-        <p:nvSpPr>
-          <p:cNvPr id="52" name="Text 50"/>
-          <p:cNvSpPr txBox="1"/>
-          <p:nvPr/>
-        </p:nvSpPr>
-        <p:spPr>
-          <a:xfrm>
-            <a:off x="8321040" y="4809744"/>
-            <a:ext cx="274320" cy="274320"/>
-          </a:xfrm>
-          <a:prstGeom prst="rect">
-            <a:avLst/>
-          </a:prstGeom>
-          <a:noFill/>
-          <a:ln/>
-        </p:spPr>
-        <p:txBody>
-          <a:bodyPr wrap="square" lIns="0" tIns="0" rIns="0" bIns="0" rtlCol="0" anchor="ctr"/>
-          <a:lstStyle/>
-          <a:p>
-            <a:pPr algn="ctr" indent="0" marL="0">
-              <a:buNone/>
-            </a:pPr>
-            <a:r>
-              <a:rPr lang="en-US" sz="1100" b="1" dirty="0">
-                <a:solidFill>
-                  <a:srgbClr val="1B2126"/>
-                </a:solidFill>
-                <a:latin typeface="Arial" pitchFamily="34" charset="0"/>
-                <a:ea typeface="Arial" pitchFamily="34" charset="-122"/>
-                <a:cs typeface="Arial" pitchFamily="34" charset="-120"/>
-              </a:rPr>
-              <a:t>4</a:t>
-            </a:r>
-            <a:endParaRPr lang="en-US" sz="1100" dirty="0"/>
-          </a:p>
-        </p:txBody>
-      </p:sp>
-      <p:sp>
-        <p:nvSpPr>
-          <p:cNvPr id="53" name="Text 51"/>
-          <p:cNvSpPr txBox="1"/>
-          <p:nvPr/>
-        </p:nvSpPr>
-        <p:spPr>
-          <a:xfrm>
-            <a:off x="8714232" y="4773168"/>
-            <a:ext cx="2880360" cy="676656"/>
-          </a:xfrm>
-          <a:prstGeom prst="rect">
-            <a:avLst/>
-          </a:prstGeom>
-          <a:noFill/>
-          <a:ln/>
-        </p:spPr>
-        <p:txBody>
-          <a:bodyPr wrap="square" lIns="0" tIns="0" rIns="0" bIns="0" rtlCol="0" anchor="t"/>
-          <a:lstStyle/>
-          <a:p>
-            <a:pPr indent="0" marL="0">
-              <a:buNone/>
-            </a:pPr>
-            <a:r>
-              <a:rPr lang="en-US" sz="1200" dirty="0">
-                <a:solidFill>
-                  <a:srgbClr val="2C353C"/>
-                </a:solidFill>
-                <a:latin typeface="Arial" pitchFamily="34" charset="0"/>
-                <a:ea typeface="Arial" pitchFamily="34" charset="-122"/>
-                <a:cs typeface="Arial" pitchFamily="34" charset="-120"/>
-              </a:rPr>
-              <a:t>Cerrar cada caso con expediente digital enlazado a folio, plano y polígono.</a:t>
-            </a:r>
-            <a:endParaRPr lang="en-US" sz="1200" dirty="0"/>
-          </a:p>
-        </p:txBody>
-      </p:sp>
-      <p:sp>
-        <p:nvSpPr>
-          <p:cNvPr id="54" name="Shape 52"/>
-          <p:cNvSpPr/>
-          <p:nvPr/>
-        </p:nvSpPr>
-        <p:spPr>
-          <a:xfrm>
-            <a:off x="457200" y="5715000"/>
-            <a:ext cx="11274552" cy="640080"/>
-          </a:xfrm>
-          <a:prstGeom prst="rect">
-            <a:avLst/>
-          </a:prstGeom>
-          <a:solidFill>
-            <a:srgbClr val="1B2126"/>
-          </a:solidFill>
-          <a:ln w="12700">
-            <a:solidFill>
-              <a:srgbClr val="1B2126"/>
-            </a:solidFill>
-            <a:prstDash val="solid"/>
-          </a:ln>
-        </p:spPr>
-      </p:sp>
-      <p:sp>
-        <p:nvSpPr>
-          <p:cNvPr id="55" name="Shape 53"/>
-          <p:cNvSpPr/>
-          <p:nvPr/>
-        </p:nvSpPr>
-        <p:spPr>
-          <a:xfrm>
-            <a:off x="457200" y="5715000"/>
-            <a:ext cx="73152" cy="640080"/>
-          </a:xfrm>
-          <a:prstGeom prst="rect">
-            <a:avLst/>
-          </a:prstGeom>
-          <a:solidFill>
-            <a:srgbClr val="C79A45"/>
-          </a:solidFill>
-          <a:ln w="12700">
-            <a:solidFill>
-              <a:srgbClr val="C79A45"/>
-            </a:solidFill>
-            <a:prstDash val="solid"/>
-          </a:ln>
-        </p:spPr>
-      </p:sp>
-      <p:sp>
-        <p:nvSpPr>
-          <p:cNvPr id="56" name="Text 54"/>
-          <p:cNvSpPr txBox="1"/>
-          <p:nvPr/>
-        </p:nvSpPr>
-        <p:spPr>
-          <a:xfrm>
-            <a:off x="731520" y="5715000"/>
-            <a:ext cx="2377440" cy="640080"/>
-          </a:xfrm>
-          <a:prstGeom prst="rect">
-            <a:avLst/>
-          </a:prstGeom>
-          <a:noFill/>
-          <a:ln/>
-        </p:spPr>
-        <p:txBody>
-          <a:bodyPr wrap="square" lIns="0" tIns="0" rIns="0" bIns="0" rtlCol="0" anchor="ctr"/>
-          <a:lstStyle/>
-          <a:p>
-            <a:pPr indent="0" marL="0">
-              <a:buNone/>
-            </a:pPr>
-            <a:r>
-              <a:rPr lang="en-US" sz="1200" b="1" spc="100" kern="0" dirty="0">
-                <a:solidFill>
-                  <a:srgbClr val="C79A45"/>
-                </a:solidFill>
-                <a:latin typeface="Arial" pitchFamily="34" charset="0"/>
-                <a:ea typeface="Arial" pitchFamily="34" charset="-122"/>
-                <a:cs typeface="Arial" pitchFamily="34" charset="-120"/>
-              </a:rPr>
-              <a:t>CRITERIO DE CIERRE</a:t>
-            </a:r>
-            <a:endParaRPr lang="en-US" sz="1200" dirty="0"/>
-          </a:p>
-        </p:txBody>
-      </p:sp>
-      <p:sp>
-        <p:nvSpPr>
-          <p:cNvPr id="57" name="Text 55"/>
-          <p:cNvSpPr txBox="1"/>
-          <p:nvPr/>
-        </p:nvSpPr>
-        <p:spPr>
-          <a:xfrm>
-            <a:off x="3108960" y="5715000"/>
-            <a:ext cx="8503920" cy="640080"/>
-          </a:xfrm>
-          <a:prstGeom prst="rect">
-            <a:avLst/>
-          </a:prstGeom>
-          <a:noFill/>
-          <a:ln/>
-        </p:spPr>
-        <p:txBody>
-          <a:bodyPr wrap="square" lIns="0" tIns="0" rIns="0" bIns="0" rtlCol="0" anchor="ctr"/>
-          <a:lstStyle/>
-          <a:p>
-            <a:pPr indent="0" marL="0">
-              <a:buNone/>
-            </a:pPr>
-            <a:r>
-              <a:rPr lang="en-US" sz="1300" b="1" dirty="0">
-                <a:solidFill>
-                  <a:srgbClr val="FFFFFF"/>
-                </a:solidFill>
-                <a:latin typeface="Arial" pitchFamily="34" charset="0"/>
-                <a:ea typeface="Arial" pitchFamily="34" charset="-122"/>
-                <a:cs typeface="Arial" pitchFamily="34" charset="-120"/>
-              </a:rPr>
-              <a:t>No consolidar titularidad ni áreas hasta enlazar evidencia registral, municipal, geoespacial y contable para cada caso.</a:t>
-            </a:r>
-            <a:endParaRPr lang="en-US" sz="1300" dirty="0"/>
-          </a:p>
-        </p:txBody>
-      </p:sp>
-      <p:sp>
-        <p:nvSpPr>
-          <p:cNvPr id="58" name="Text 56"/>
-          <p:cNvSpPr txBox="1"/>
-          <p:nvPr/>
-        </p:nvSpPr>
-        <p:spPr>
-          <a:xfrm>
-            <a:off x="457200" y="6446520"/>
-            <a:ext cx="10058400" cy="274320"/>
-          </a:xfrm>
-          <a:prstGeom prst="rect">
-            <a:avLst/>
-          </a:prstGeom>
-          <a:noFill/>
-          <a:ln/>
-        </p:spPr>
-        <p:txBody>
-          <a:bodyPr wrap="square" lIns="0" tIns="0" rIns="0" bIns="0" rtlCol="0" anchor="ctr"/>
-          <a:lstStyle/>
-          <a:p>
             <a:pPr indent="0" marL="0">
               <a:buNone/>
             </a:pPr>
@@ -6128,7 +5275,7 @@
                 <a:ea typeface="Arial" pitchFamily="34" charset="-122"/>
                 <a:cs typeface="Arial" pitchFamily="34" charset="-120"/>
               </a:rPr>
-              <a:t>Fuente de requerimientos: brechas de las fichas 03–08 y matriz de seguimiento disponible.</a:t>
+              <a:t>DDRR: Derechos Reales · COM: planos municipales Contorno Bajo / Mamani · Matriz de cruces e informe de Ariel León.</a:t>
             </a:r>
             <a:endParaRPr lang="en-US" sz="1000" dirty="0"/>
           </a:p>
@@ -6207,6 +5354,3207 @@
           <a:chExt cx="0" cy="0"/>
         </a:xfrm>
       </p:grpSpPr>
+      <p:sp>
+        <p:nvSpPr>
+          <p:cNvPr id="2" name="Text 0"/>
+          <p:cNvSpPr txBox="1"/>
+          <p:nvPr/>
+        </p:nvSpPr>
+        <p:spPr>
+          <a:xfrm>
+            <a:off x="457200" y="384048"/>
+            <a:ext cx="11247120" cy="274320"/>
+          </a:xfrm>
+          <a:prstGeom prst="rect">
+            <a:avLst/>
+          </a:prstGeom>
+          <a:noFill/>
+          <a:ln/>
+        </p:spPr>
+        <p:txBody>
+          <a:bodyPr wrap="square" lIns="0" tIns="0" rIns="0" bIns="0" rtlCol="0" anchor="t"/>
+          <a:lstStyle/>
+          <a:p>
+            <a:pPr indent="0" marL="0">
+              <a:buNone/>
+            </a:pPr>
+            <a:r>
+              <a:rPr lang="en-US" sz="1400" spc="100" kern="0" dirty="0">
+                <a:solidFill>
+                  <a:srgbClr val="5F6A73"/>
+                </a:solidFill>
+                <a:latin typeface="Arial" pitchFamily="34" charset="0"/>
+                <a:ea typeface="Arial" pitchFamily="34" charset="-122"/>
+                <a:cs typeface="Arial" pitchFamily="34" charset="-120"/>
+              </a:rPr>
+              <a:t>10 · EVALUACIÓN</a:t>
+            </a:r>
+            <a:endParaRPr lang="en-US" sz="1400" dirty="0"/>
+          </a:p>
+        </p:txBody>
+      </p:sp>
+      <p:sp>
+        <p:nvSpPr>
+          <p:cNvPr id="3" name="Text 1"/>
+          <p:cNvSpPr txBox="1"/>
+          <p:nvPr/>
+        </p:nvSpPr>
+        <p:spPr>
+          <a:xfrm>
+            <a:off x="457200" y="658368"/>
+            <a:ext cx="11247120" cy="566928"/>
+          </a:xfrm>
+          <a:prstGeom prst="rect">
+            <a:avLst/>
+          </a:prstGeom>
+          <a:noFill/>
+          <a:ln/>
+        </p:spPr>
+        <p:txBody>
+          <a:bodyPr wrap="square" lIns="0" tIns="0" rIns="0" bIns="0" rtlCol="0" anchor="ctr"/>
+          <a:lstStyle/>
+          <a:p>
+            <a:pPr indent="0" marL="0">
+              <a:buNone/>
+            </a:pPr>
+            <a:r>
+              <a:rPr lang="en-US" sz="3200" b="1" dirty="0">
+                <a:solidFill>
+                  <a:srgbClr val="1B2126"/>
+                </a:solidFill>
+                <a:latin typeface="Arial" pitchFamily="34" charset="0"/>
+                <a:ea typeface="Arial" pitchFamily="34" charset="-122"/>
+                <a:cs typeface="Arial" pitchFamily="34" charset="-120"/>
+              </a:rPr>
+              <a:t>Riesgos que impiden una conclusión patrimonial</a:t>
+            </a:r>
+            <a:endParaRPr lang="en-US" sz="3200" dirty="0"/>
+          </a:p>
+        </p:txBody>
+      </p:sp>
+      <p:sp>
+        <p:nvSpPr>
+          <p:cNvPr id="4" name="Marca dorada"/>
+          <p:cNvSpPr/>
+          <p:nvPr/>
+        </p:nvSpPr>
+        <p:spPr>
+          <a:xfrm>
+            <a:off x="457200" y="1298448"/>
+            <a:ext cx="731520" cy="64008"/>
+          </a:xfrm>
+          <a:prstGeom prst="rect">
+            <a:avLst/>
+          </a:prstGeom>
+          <a:solidFill>
+            <a:srgbClr val="C79A45"/>
+          </a:solidFill>
+          <a:ln w="12700">
+            <a:solidFill>
+              <a:srgbClr val="C79A45"/>
+            </a:solidFill>
+            <a:prstDash val="solid"/>
+          </a:ln>
+        </p:spPr>
+      </p:sp>
+      <p:sp>
+        <p:nvSpPr>
+          <p:cNvPr id="5" name="Text 3"/>
+          <p:cNvSpPr txBox="1"/>
+          <p:nvPr/>
+        </p:nvSpPr>
+        <p:spPr>
+          <a:xfrm>
+            <a:off x="457200" y="1444752"/>
+            <a:ext cx="11247120" cy="310896"/>
+          </a:xfrm>
+          <a:prstGeom prst="rect">
+            <a:avLst/>
+          </a:prstGeom>
+          <a:noFill/>
+          <a:ln/>
+        </p:spPr>
+        <p:txBody>
+          <a:bodyPr wrap="square" lIns="0" tIns="0" rIns="0" bIns="0" rtlCol="0" anchor="t"/>
+          <a:lstStyle/>
+          <a:p>
+            <a:pPr indent="0" marL="0">
+              <a:buNone/>
+            </a:pPr>
+            <a:r>
+              <a:rPr lang="en-US" sz="1400" dirty="0">
+                <a:solidFill>
+                  <a:srgbClr val="5F6A73"/>
+                </a:solidFill>
+                <a:latin typeface="Arial" pitchFamily="34" charset="0"/>
+                <a:ea typeface="Arial" pitchFamily="34" charset="-122"/>
+                <a:cs typeface="Arial" pitchFamily="34" charset="-120"/>
+              </a:rPr>
+              <a:t>La revisión identifica necesidades de verificación; no emite conclusión jurídica sobre dominio o posesión.</a:t>
+            </a:r>
+            <a:endParaRPr lang="en-US" sz="1400" dirty="0"/>
+          </a:p>
+        </p:txBody>
+      </p:sp>
+      <p:sp>
+        <p:nvSpPr>
+          <p:cNvPr id="6" name="Shape 4"/>
+          <p:cNvSpPr/>
+          <p:nvPr/>
+        </p:nvSpPr>
+        <p:spPr>
+          <a:xfrm>
+            <a:off x="457200" y="1920240"/>
+            <a:ext cx="11274552" cy="804672"/>
+          </a:xfrm>
+          <a:prstGeom prst="rect">
+            <a:avLst/>
+          </a:prstGeom>
+          <a:solidFill>
+            <a:srgbClr val="FFFFFF"/>
+          </a:solidFill>
+          <a:ln w="9525">
+            <a:solidFill>
+              <a:srgbClr val="E6E8EB"/>
+            </a:solidFill>
+            <a:prstDash val="solid"/>
+          </a:ln>
+          <a:effectLst>
+            <a:outerShdw sx="100000" sy="100000" kx="0" ky="0" algn="bl" rotWithShape="0" blurRad="114300" dist="25400" dir="5400000">
+              <a:srgbClr val="000000">
+                <a:alpha val="14000"/>
+              </a:srgbClr>
+            </a:outerShdw>
+          </a:effectLst>
+        </p:spPr>
+      </p:sp>
+      <p:sp>
+        <p:nvSpPr>
+          <p:cNvPr id="7" name="Shape 5"/>
+          <p:cNvSpPr/>
+          <p:nvPr/>
+        </p:nvSpPr>
+        <p:spPr>
+          <a:xfrm>
+            <a:off x="457200" y="1920240"/>
+            <a:ext cx="73152" cy="804672"/>
+          </a:xfrm>
+          <a:prstGeom prst="rect">
+            <a:avLst/>
+          </a:prstGeom>
+          <a:solidFill>
+            <a:srgbClr val="C79A45"/>
+          </a:solidFill>
+          <a:ln w="12700">
+            <a:solidFill>
+              <a:srgbClr val="C79A45"/>
+            </a:solidFill>
+            <a:prstDash val="solid"/>
+          </a:ln>
+        </p:spPr>
+      </p:sp>
+      <p:sp>
+        <p:nvSpPr>
+          <p:cNvPr id="8" name="Text 6"/>
+          <p:cNvSpPr txBox="1"/>
+          <p:nvPr/>
+        </p:nvSpPr>
+        <p:spPr>
+          <a:xfrm>
+            <a:off x="731520" y="1920240"/>
+            <a:ext cx="3291840" cy="804672"/>
+          </a:xfrm>
+          <a:prstGeom prst="rect">
+            <a:avLst/>
+          </a:prstGeom>
+          <a:noFill/>
+          <a:ln/>
+        </p:spPr>
+        <p:txBody>
+          <a:bodyPr wrap="square" lIns="0" tIns="0" rIns="0" bIns="0" rtlCol="0" anchor="ctr"/>
+          <a:lstStyle/>
+          <a:p>
+            <a:pPr indent="0" marL="0">
+              <a:buNone/>
+            </a:pPr>
+            <a:r>
+              <a:rPr lang="en-US" sz="1600" b="1" dirty="0">
+                <a:solidFill>
+                  <a:srgbClr val="1B2126"/>
+                </a:solidFill>
+                <a:latin typeface="Arial" pitchFamily="34" charset="0"/>
+                <a:ea typeface="Arial" pitchFamily="34" charset="-122"/>
+                <a:cs typeface="Arial" pitchFamily="34" charset="-120"/>
+              </a:rPr>
+              <a:t>Titularidad y vigencia</a:t>
+            </a:r>
+            <a:endParaRPr lang="en-US" sz="1600" dirty="0"/>
+          </a:p>
+        </p:txBody>
+      </p:sp>
+      <p:sp>
+        <p:nvSpPr>
+          <p:cNvPr id="9" name="Shape 7"/>
+          <p:cNvSpPr/>
+          <p:nvPr/>
+        </p:nvSpPr>
+        <p:spPr>
+          <a:xfrm>
+            <a:off x="4114800" y="2176272"/>
+            <a:ext cx="1097280" cy="292608"/>
+          </a:xfrm>
+          <a:prstGeom prst="rect">
+            <a:avLst/>
+          </a:prstGeom>
+          <a:solidFill>
+            <a:srgbClr val="C79A45"/>
+          </a:solidFill>
+          <a:ln w="12700">
+            <a:solidFill>
+              <a:srgbClr val="C79A45"/>
+            </a:solidFill>
+            <a:prstDash val="solid"/>
+          </a:ln>
+        </p:spPr>
+      </p:sp>
+      <p:sp>
+        <p:nvSpPr>
+          <p:cNvPr id="10" name="Text 8"/>
+          <p:cNvSpPr txBox="1"/>
+          <p:nvPr/>
+        </p:nvSpPr>
+        <p:spPr>
+          <a:xfrm>
+            <a:off x="4114800" y="2176272"/>
+            <a:ext cx="1097280" cy="292608"/>
+          </a:xfrm>
+          <a:prstGeom prst="rect">
+            <a:avLst/>
+          </a:prstGeom>
+          <a:noFill/>
+          <a:ln/>
+        </p:spPr>
+        <p:txBody>
+          <a:bodyPr wrap="square" lIns="0" tIns="0" rIns="0" bIns="0" rtlCol="0" anchor="ctr"/>
+          <a:lstStyle/>
+          <a:p>
+            <a:pPr algn="ctr" indent="0" marL="0">
+              <a:buNone/>
+            </a:pPr>
+            <a:r>
+              <a:rPr lang="en-US" sz="1000" b="1" spc="50" kern="0" dirty="0">
+                <a:solidFill>
+                  <a:srgbClr val="FFFFFF"/>
+                </a:solidFill>
+                <a:latin typeface="Arial" pitchFamily="34" charset="0"/>
+                <a:ea typeface="Arial" pitchFamily="34" charset="-122"/>
+                <a:cs typeface="Arial" pitchFamily="34" charset="-120"/>
+              </a:rPr>
+              <a:t>ALTA</a:t>
+            </a:r>
+            <a:endParaRPr lang="en-US" sz="1000" dirty="0"/>
+          </a:p>
+        </p:txBody>
+      </p:sp>
+      <p:sp>
+        <p:nvSpPr>
+          <p:cNvPr id="11" name="Text 9"/>
+          <p:cNvSpPr txBox="1"/>
+          <p:nvPr/>
+        </p:nvSpPr>
+        <p:spPr>
+          <a:xfrm>
+            <a:off x="5486400" y="1920240"/>
+            <a:ext cx="6035040" cy="804672"/>
+          </a:xfrm>
+          <a:prstGeom prst="rect">
+            <a:avLst/>
+          </a:prstGeom>
+          <a:noFill/>
+          <a:ln/>
+        </p:spPr>
+        <p:txBody>
+          <a:bodyPr wrap="square" lIns="0" tIns="0" rIns="0" bIns="0" rtlCol="0" anchor="ctr"/>
+          <a:lstStyle/>
+          <a:p>
+            <a:pPr indent="0" marL="0">
+              <a:buNone/>
+            </a:pPr>
+            <a:r>
+              <a:rPr lang="en-US" sz="1300" dirty="0">
+                <a:solidFill>
+                  <a:srgbClr val="3A444C"/>
+                </a:solidFill>
+                <a:latin typeface="Arial" pitchFamily="34" charset="0"/>
+                <a:ea typeface="Arial" pitchFamily="34" charset="-122"/>
+                <a:cs typeface="Arial" pitchFamily="34" charset="-120"/>
+              </a:rPr>
+              <a:t>Solo Chávez tiene folio revisado en los documentos disponibles; los demás dependen de referencias y copias.</a:t>
+            </a:r>
+            <a:endParaRPr lang="en-US" sz="1300" dirty="0"/>
+          </a:p>
+        </p:txBody>
+      </p:sp>
+      <p:sp>
+        <p:nvSpPr>
+          <p:cNvPr id="12" name="Shape 10"/>
+          <p:cNvSpPr/>
+          <p:nvPr/>
+        </p:nvSpPr>
+        <p:spPr>
+          <a:xfrm>
+            <a:off x="457200" y="2834640"/>
+            <a:ext cx="11274552" cy="804672"/>
+          </a:xfrm>
+          <a:prstGeom prst="rect">
+            <a:avLst/>
+          </a:prstGeom>
+          <a:solidFill>
+            <a:srgbClr val="FFFFFF"/>
+          </a:solidFill>
+          <a:ln w="9525">
+            <a:solidFill>
+              <a:srgbClr val="E6E8EB"/>
+            </a:solidFill>
+            <a:prstDash val="solid"/>
+          </a:ln>
+          <a:effectLst>
+            <a:outerShdw sx="100000" sy="100000" kx="0" ky="0" algn="bl" rotWithShape="0" blurRad="114300" dist="25400" dir="5400000">
+              <a:srgbClr val="000000">
+                <a:alpha val="14000"/>
+              </a:srgbClr>
+            </a:outerShdw>
+          </a:effectLst>
+        </p:spPr>
+      </p:sp>
+      <p:sp>
+        <p:nvSpPr>
+          <p:cNvPr id="13" name="Shape 11"/>
+          <p:cNvSpPr/>
+          <p:nvPr/>
+        </p:nvSpPr>
+        <p:spPr>
+          <a:xfrm>
+            <a:off x="457200" y="2834640"/>
+            <a:ext cx="73152" cy="804672"/>
+          </a:xfrm>
+          <a:prstGeom prst="rect">
+            <a:avLst/>
+          </a:prstGeom>
+          <a:solidFill>
+            <a:srgbClr val="B23A3A"/>
+          </a:solidFill>
+          <a:ln w="12700">
+            <a:solidFill>
+              <a:srgbClr val="B23A3A"/>
+            </a:solidFill>
+            <a:prstDash val="solid"/>
+          </a:ln>
+        </p:spPr>
+      </p:sp>
+      <p:sp>
+        <p:nvSpPr>
+          <p:cNvPr id="14" name="Text 12"/>
+          <p:cNvSpPr txBox="1"/>
+          <p:nvPr/>
+        </p:nvSpPr>
+        <p:spPr>
+          <a:xfrm>
+            <a:off x="731520" y="2834640"/>
+            <a:ext cx="3291840" cy="804672"/>
+          </a:xfrm>
+          <a:prstGeom prst="rect">
+            <a:avLst/>
+          </a:prstGeom>
+          <a:noFill/>
+          <a:ln/>
+        </p:spPr>
+        <p:txBody>
+          <a:bodyPr wrap="square" lIns="0" tIns="0" rIns="0" bIns="0" rtlCol="0" anchor="ctr"/>
+          <a:lstStyle/>
+          <a:p>
+            <a:pPr indent="0" marL="0">
+              <a:buNone/>
+            </a:pPr>
+            <a:r>
+              <a:rPr lang="en-US" sz="1600" b="1" dirty="0">
+                <a:solidFill>
+                  <a:srgbClr val="1B2126"/>
+                </a:solidFill>
+                <a:latin typeface="Arial" pitchFamily="34" charset="0"/>
+                <a:ea typeface="Arial" pitchFamily="34" charset="-122"/>
+                <a:cs typeface="Arial" pitchFamily="34" charset="-120"/>
+              </a:rPr>
+              <a:t>Identidad física y superficie</a:t>
+            </a:r>
+            <a:endParaRPr lang="en-US" sz="1600" dirty="0"/>
+          </a:p>
+        </p:txBody>
+      </p:sp>
+      <p:sp>
+        <p:nvSpPr>
+          <p:cNvPr id="15" name="Shape 13"/>
+          <p:cNvSpPr/>
+          <p:nvPr/>
+        </p:nvSpPr>
+        <p:spPr>
+          <a:xfrm>
+            <a:off x="4114800" y="3090672"/>
+            <a:ext cx="1097280" cy="292608"/>
+          </a:xfrm>
+          <a:prstGeom prst="rect">
+            <a:avLst/>
+          </a:prstGeom>
+          <a:solidFill>
+            <a:srgbClr val="B23A3A"/>
+          </a:solidFill>
+          <a:ln w="12700">
+            <a:solidFill>
+              <a:srgbClr val="B23A3A"/>
+            </a:solidFill>
+            <a:prstDash val="solid"/>
+          </a:ln>
+        </p:spPr>
+      </p:sp>
+      <p:sp>
+        <p:nvSpPr>
+          <p:cNvPr id="16" name="Text 14"/>
+          <p:cNvSpPr txBox="1"/>
+          <p:nvPr/>
+        </p:nvSpPr>
+        <p:spPr>
+          <a:xfrm>
+            <a:off x="4114800" y="3090672"/>
+            <a:ext cx="1097280" cy="292608"/>
+          </a:xfrm>
+          <a:prstGeom prst="rect">
+            <a:avLst/>
+          </a:prstGeom>
+          <a:noFill/>
+          <a:ln/>
+        </p:spPr>
+        <p:txBody>
+          <a:bodyPr wrap="square" lIns="0" tIns="0" rIns="0" bIns="0" rtlCol="0" anchor="ctr"/>
+          <a:lstStyle/>
+          <a:p>
+            <a:pPr algn="ctr" indent="0" marL="0">
+              <a:buNone/>
+            </a:pPr>
+            <a:r>
+              <a:rPr lang="en-US" sz="1000" b="1" spc="50" kern="0" dirty="0">
+                <a:solidFill>
+                  <a:srgbClr val="FFFFFF"/>
+                </a:solidFill>
+                <a:latin typeface="Arial" pitchFamily="34" charset="0"/>
+                <a:ea typeface="Arial" pitchFamily="34" charset="-122"/>
+                <a:cs typeface="Arial" pitchFamily="34" charset="-120"/>
+              </a:rPr>
+              <a:t>CRÍTICA</a:t>
+            </a:r>
+            <a:endParaRPr lang="en-US" sz="1000" dirty="0"/>
+          </a:p>
+        </p:txBody>
+      </p:sp>
+      <p:sp>
+        <p:nvSpPr>
+          <p:cNvPr id="17" name="Text 15"/>
+          <p:cNvSpPr txBox="1"/>
+          <p:nvPr/>
+        </p:nvSpPr>
+        <p:spPr>
+          <a:xfrm>
+            <a:off x="5486400" y="2834640"/>
+            <a:ext cx="6035040" cy="804672"/>
+          </a:xfrm>
+          <a:prstGeom prst="rect">
+            <a:avLst/>
+          </a:prstGeom>
+          <a:noFill/>
+          <a:ln/>
+        </p:spPr>
+        <p:txBody>
+          <a:bodyPr wrap="square" lIns="0" tIns="0" rIns="0" bIns="0" rtlCol="0" anchor="ctr"/>
+          <a:lstStyle/>
+          <a:p>
+            <a:pPr indent="0" marL="0">
+              <a:buNone/>
+            </a:pPr>
+            <a:r>
+              <a:rPr lang="en-US" sz="1300" dirty="0">
+                <a:solidFill>
+                  <a:srgbClr val="3A444C"/>
+                </a:solidFill>
+                <a:latin typeface="Arial" pitchFamily="34" charset="0"/>
+                <a:ea typeface="Arial" pitchFamily="34" charset="-122"/>
+                <a:cs typeface="Arial" pitchFamily="34" charset="-120"/>
+              </a:rPr>
+              <a:t>Falta ligar matrícula, plano y polígono levantado; Antonio presenta una diferencia aritmética relevante.</a:t>
+            </a:r>
+            <a:endParaRPr lang="en-US" sz="1300" dirty="0"/>
+          </a:p>
+        </p:txBody>
+      </p:sp>
+      <p:sp>
+        <p:nvSpPr>
+          <p:cNvPr id="18" name="Shape 16"/>
+          <p:cNvSpPr/>
+          <p:nvPr/>
+        </p:nvSpPr>
+        <p:spPr>
+          <a:xfrm>
+            <a:off x="457200" y="3749040"/>
+            <a:ext cx="11274552" cy="804672"/>
+          </a:xfrm>
+          <a:prstGeom prst="rect">
+            <a:avLst/>
+          </a:prstGeom>
+          <a:solidFill>
+            <a:srgbClr val="FFFFFF"/>
+          </a:solidFill>
+          <a:ln w="9525">
+            <a:solidFill>
+              <a:srgbClr val="E6E8EB"/>
+            </a:solidFill>
+            <a:prstDash val="solid"/>
+          </a:ln>
+          <a:effectLst>
+            <a:outerShdw sx="100000" sy="100000" kx="0" ky="0" algn="bl" rotWithShape="0" blurRad="114300" dist="25400" dir="5400000">
+              <a:srgbClr val="000000">
+                <a:alpha val="14000"/>
+              </a:srgbClr>
+            </a:outerShdw>
+          </a:effectLst>
+        </p:spPr>
+      </p:sp>
+      <p:sp>
+        <p:nvSpPr>
+          <p:cNvPr id="19" name="Shape 17"/>
+          <p:cNvSpPr/>
+          <p:nvPr/>
+        </p:nvSpPr>
+        <p:spPr>
+          <a:xfrm>
+            <a:off x="457200" y="3749040"/>
+            <a:ext cx="73152" cy="804672"/>
+          </a:xfrm>
+          <a:prstGeom prst="rect">
+            <a:avLst/>
+          </a:prstGeom>
+          <a:solidFill>
+            <a:srgbClr val="C79A45"/>
+          </a:solidFill>
+          <a:ln w="12700">
+            <a:solidFill>
+              <a:srgbClr val="C79A45"/>
+            </a:solidFill>
+            <a:prstDash val="solid"/>
+          </a:ln>
+        </p:spPr>
+      </p:sp>
+      <p:sp>
+        <p:nvSpPr>
+          <p:cNvPr id="20" name="Text 18"/>
+          <p:cNvSpPr txBox="1"/>
+          <p:nvPr/>
+        </p:nvSpPr>
+        <p:spPr>
+          <a:xfrm>
+            <a:off x="731520" y="3749040"/>
+            <a:ext cx="3291840" cy="804672"/>
+          </a:xfrm>
+          <a:prstGeom prst="rect">
+            <a:avLst/>
+          </a:prstGeom>
+          <a:noFill/>
+          <a:ln/>
+        </p:spPr>
+        <p:txBody>
+          <a:bodyPr wrap="square" lIns="0" tIns="0" rIns="0" bIns="0" rtlCol="0" anchor="ctr"/>
+          <a:lstStyle/>
+          <a:p>
+            <a:pPr indent="0" marL="0">
+              <a:buNone/>
+            </a:pPr>
+            <a:r>
+              <a:rPr lang="en-US" sz="1600" b="1" dirty="0">
+                <a:solidFill>
+                  <a:srgbClr val="1B2126"/>
+                </a:solidFill>
+                <a:latin typeface="Arial" pitchFamily="34" charset="0"/>
+                <a:ea typeface="Arial" pitchFamily="34" charset="-122"/>
+                <a:cs typeface="Arial" pitchFamily="34" charset="-120"/>
+              </a:rPr>
+              <a:t>Individualización / duplicidad</a:t>
+            </a:r>
+            <a:endParaRPr lang="en-US" sz="1600" dirty="0"/>
+          </a:p>
+        </p:txBody>
+      </p:sp>
+      <p:sp>
+        <p:nvSpPr>
+          <p:cNvPr id="21" name="Shape 19"/>
+          <p:cNvSpPr/>
+          <p:nvPr/>
+        </p:nvSpPr>
+        <p:spPr>
+          <a:xfrm>
+            <a:off x="4114800" y="4005072"/>
+            <a:ext cx="1097280" cy="292608"/>
+          </a:xfrm>
+          <a:prstGeom prst="rect">
+            <a:avLst/>
+          </a:prstGeom>
+          <a:solidFill>
+            <a:srgbClr val="C79A45"/>
+          </a:solidFill>
+          <a:ln w="12700">
+            <a:solidFill>
+              <a:srgbClr val="C79A45"/>
+            </a:solidFill>
+            <a:prstDash val="solid"/>
+          </a:ln>
+        </p:spPr>
+      </p:sp>
+      <p:sp>
+        <p:nvSpPr>
+          <p:cNvPr id="22" name="Text 20"/>
+          <p:cNvSpPr txBox="1"/>
+          <p:nvPr/>
+        </p:nvSpPr>
+        <p:spPr>
+          <a:xfrm>
+            <a:off x="4114800" y="4005072"/>
+            <a:ext cx="1097280" cy="292608"/>
+          </a:xfrm>
+          <a:prstGeom prst="rect">
+            <a:avLst/>
+          </a:prstGeom>
+          <a:noFill/>
+          <a:ln/>
+        </p:spPr>
+        <p:txBody>
+          <a:bodyPr wrap="square" lIns="0" tIns="0" rIns="0" bIns="0" rtlCol="0" anchor="ctr"/>
+          <a:lstStyle/>
+          <a:p>
+            <a:pPr algn="ctr" indent="0" marL="0">
+              <a:buNone/>
+            </a:pPr>
+            <a:r>
+              <a:rPr lang="en-US" sz="1000" b="1" spc="50" kern="0" dirty="0">
+                <a:solidFill>
+                  <a:srgbClr val="FFFFFF"/>
+                </a:solidFill>
+                <a:latin typeface="Arial" pitchFamily="34" charset="0"/>
+                <a:ea typeface="Arial" pitchFamily="34" charset="-122"/>
+                <a:cs typeface="Arial" pitchFamily="34" charset="-120"/>
+              </a:rPr>
+              <a:t>ALTA</a:t>
+            </a:r>
+            <a:endParaRPr lang="en-US" sz="1000" dirty="0"/>
+          </a:p>
+        </p:txBody>
+      </p:sp>
+      <p:sp>
+        <p:nvSpPr>
+          <p:cNvPr id="23" name="Text 21"/>
+          <p:cNvSpPr txBox="1"/>
+          <p:nvPr/>
+        </p:nvSpPr>
+        <p:spPr>
+          <a:xfrm>
+            <a:off x="5486400" y="3749040"/>
+            <a:ext cx="6035040" cy="804672"/>
+          </a:xfrm>
+          <a:prstGeom prst="rect">
+            <a:avLst/>
+          </a:prstGeom>
+          <a:noFill/>
+          <a:ln/>
+        </p:spPr>
+        <p:txBody>
+          <a:bodyPr wrap="square" lIns="0" tIns="0" rIns="0" bIns="0" rtlCol="0" anchor="ctr"/>
+          <a:lstStyle/>
+          <a:p>
+            <a:pPr indent="0" marL="0">
+              <a:buNone/>
+            </a:pPr>
+            <a:r>
+              <a:rPr lang="en-US" sz="1300" dirty="0">
+                <a:solidFill>
+                  <a:srgbClr val="3A444C"/>
+                </a:solidFill>
+                <a:latin typeface="Arial" pitchFamily="34" charset="0"/>
+                <a:ea typeface="Arial" pitchFamily="34" charset="-122"/>
+                <a:cs typeface="Arial" pitchFamily="34" charset="-120"/>
+              </a:rPr>
+              <a:t>Posible colisión Quispe-Limachi y repetición de tablas municipales no resuelta.</a:t>
+            </a:r>
+            <a:endParaRPr lang="en-US" sz="1300" dirty="0"/>
+          </a:p>
+        </p:txBody>
+      </p:sp>
+      <p:sp>
+        <p:nvSpPr>
+          <p:cNvPr id="24" name="Shape 22"/>
+          <p:cNvSpPr/>
+          <p:nvPr/>
+        </p:nvSpPr>
+        <p:spPr>
+          <a:xfrm>
+            <a:off x="457200" y="4663440"/>
+            <a:ext cx="11274552" cy="804672"/>
+          </a:xfrm>
+          <a:prstGeom prst="rect">
+            <a:avLst/>
+          </a:prstGeom>
+          <a:solidFill>
+            <a:srgbClr val="FFFFFF"/>
+          </a:solidFill>
+          <a:ln w="9525">
+            <a:solidFill>
+              <a:srgbClr val="E6E8EB"/>
+            </a:solidFill>
+            <a:prstDash val="solid"/>
+          </a:ln>
+          <a:effectLst>
+            <a:outerShdw sx="100000" sy="100000" kx="0" ky="0" algn="bl" rotWithShape="0" blurRad="114300" dist="25400" dir="5400000">
+              <a:srgbClr val="000000">
+                <a:alpha val="14000"/>
+              </a:srgbClr>
+            </a:outerShdw>
+          </a:effectLst>
+        </p:spPr>
+      </p:sp>
+      <p:sp>
+        <p:nvSpPr>
+          <p:cNvPr id="25" name="Shape 23"/>
+          <p:cNvSpPr/>
+          <p:nvPr/>
+        </p:nvSpPr>
+        <p:spPr>
+          <a:xfrm>
+            <a:off x="457200" y="4663440"/>
+            <a:ext cx="73152" cy="804672"/>
+          </a:xfrm>
+          <a:prstGeom prst="rect">
+            <a:avLst/>
+          </a:prstGeom>
+          <a:solidFill>
+            <a:srgbClr val="C79A45"/>
+          </a:solidFill>
+          <a:ln w="12700">
+            <a:solidFill>
+              <a:srgbClr val="C79A45"/>
+            </a:solidFill>
+            <a:prstDash val="solid"/>
+          </a:ln>
+        </p:spPr>
+      </p:sp>
+      <p:sp>
+        <p:nvSpPr>
+          <p:cNvPr id="26" name="Text 24"/>
+          <p:cNvSpPr txBox="1"/>
+          <p:nvPr/>
+        </p:nvSpPr>
+        <p:spPr>
+          <a:xfrm>
+            <a:off x="731520" y="4663440"/>
+            <a:ext cx="3291840" cy="804672"/>
+          </a:xfrm>
+          <a:prstGeom prst="rect">
+            <a:avLst/>
+          </a:prstGeom>
+          <a:noFill/>
+          <a:ln/>
+        </p:spPr>
+        <p:txBody>
+          <a:bodyPr wrap="square" lIns="0" tIns="0" rIns="0" bIns="0" rtlCol="0" anchor="ctr"/>
+          <a:lstStyle/>
+          <a:p>
+            <a:pPr indent="0" marL="0">
+              <a:buNone/>
+            </a:pPr>
+            <a:r>
+              <a:rPr lang="en-US" sz="1600" b="1" dirty="0">
+                <a:solidFill>
+                  <a:srgbClr val="1B2126"/>
+                </a:solidFill>
+                <a:latin typeface="Arial" pitchFamily="34" charset="0"/>
+                <a:ea typeface="Arial" pitchFamily="34" charset="-122"/>
+                <a:cs typeface="Arial" pitchFamily="34" charset="-120"/>
+              </a:rPr>
+              <a:t>Registro contable y seguimiento</a:t>
+            </a:r>
+            <a:endParaRPr lang="en-US" sz="1600" dirty="0"/>
+          </a:p>
+        </p:txBody>
+      </p:sp>
+      <p:sp>
+        <p:nvSpPr>
+          <p:cNvPr id="27" name="Shape 25"/>
+          <p:cNvSpPr/>
+          <p:nvPr/>
+        </p:nvSpPr>
+        <p:spPr>
+          <a:xfrm>
+            <a:off x="4114800" y="4919472"/>
+            <a:ext cx="1097280" cy="292608"/>
+          </a:xfrm>
+          <a:prstGeom prst="rect">
+            <a:avLst/>
+          </a:prstGeom>
+          <a:solidFill>
+            <a:srgbClr val="C79A45"/>
+          </a:solidFill>
+          <a:ln w="12700">
+            <a:solidFill>
+              <a:srgbClr val="C79A45"/>
+            </a:solidFill>
+            <a:prstDash val="solid"/>
+          </a:ln>
+        </p:spPr>
+      </p:sp>
+      <p:sp>
+        <p:nvSpPr>
+          <p:cNvPr id="28" name="Text 26"/>
+          <p:cNvSpPr txBox="1"/>
+          <p:nvPr/>
+        </p:nvSpPr>
+        <p:spPr>
+          <a:xfrm>
+            <a:off x="4114800" y="4919472"/>
+            <a:ext cx="1097280" cy="292608"/>
+          </a:xfrm>
+          <a:prstGeom prst="rect">
+            <a:avLst/>
+          </a:prstGeom>
+          <a:noFill/>
+          <a:ln/>
+        </p:spPr>
+        <p:txBody>
+          <a:bodyPr wrap="square" lIns="0" tIns="0" rIns="0" bIns="0" rtlCol="0" anchor="ctr"/>
+          <a:lstStyle/>
+          <a:p>
+            <a:pPr algn="ctr" indent="0" marL="0">
+              <a:buNone/>
+            </a:pPr>
+            <a:r>
+              <a:rPr lang="en-US" sz="1000" b="1" spc="50" kern="0" dirty="0">
+                <a:solidFill>
+                  <a:srgbClr val="FFFFFF"/>
+                </a:solidFill>
+                <a:latin typeface="Arial" pitchFamily="34" charset="0"/>
+                <a:ea typeface="Arial" pitchFamily="34" charset="-122"/>
+                <a:cs typeface="Arial" pitchFamily="34" charset="-120"/>
+              </a:rPr>
+              <a:t>ALTA</a:t>
+            </a:r>
+            <a:endParaRPr lang="en-US" sz="1000" dirty="0"/>
+          </a:p>
+        </p:txBody>
+      </p:sp>
+      <p:sp>
+        <p:nvSpPr>
+          <p:cNvPr id="29" name="Text 27"/>
+          <p:cNvSpPr txBox="1"/>
+          <p:nvPr/>
+        </p:nvSpPr>
+        <p:spPr>
+          <a:xfrm>
+            <a:off x="5486400" y="4663440"/>
+            <a:ext cx="6035040" cy="804672"/>
+          </a:xfrm>
+          <a:prstGeom prst="rect">
+            <a:avLst/>
+          </a:prstGeom>
+          <a:noFill/>
+          <a:ln/>
+        </p:spPr>
+        <p:txBody>
+          <a:bodyPr wrap="square" lIns="0" tIns="0" rIns="0" bIns="0" rtlCol="0" anchor="ctr"/>
+          <a:lstStyle/>
+          <a:p>
+            <a:pPr indent="0" marL="0">
+              <a:buNone/>
+            </a:pPr>
+            <a:r>
+              <a:rPr lang="en-US" sz="1300" dirty="0">
+                <a:solidFill>
+                  <a:srgbClr val="3A444C"/>
+                </a:solidFill>
+                <a:latin typeface="Arial" pitchFamily="34" charset="0"/>
+                <a:ea typeface="Arial" pitchFamily="34" charset="-122"/>
+                <a:cs typeface="Arial" pitchFamily="34" charset="-120"/>
+              </a:rPr>
+              <a:t>Moneda no indicada en dos saldos y campos de responsable/estado/fecha vacíos.</a:t>
+            </a:r>
+            <a:endParaRPr lang="en-US" sz="1300" dirty="0"/>
+          </a:p>
+        </p:txBody>
+      </p:sp>
+      <p:sp>
+        <p:nvSpPr>
+          <p:cNvPr id="30" name="Shape 28"/>
+          <p:cNvSpPr/>
+          <p:nvPr/>
+        </p:nvSpPr>
+        <p:spPr>
+          <a:xfrm>
+            <a:off x="457200" y="5623560"/>
+            <a:ext cx="11274552" cy="731520"/>
+          </a:xfrm>
+          <a:prstGeom prst="rect">
+            <a:avLst/>
+          </a:prstGeom>
+          <a:solidFill>
+            <a:srgbClr val="1B2126"/>
+          </a:solidFill>
+          <a:ln w="12700">
+            <a:solidFill>
+              <a:srgbClr val="1B2126"/>
+            </a:solidFill>
+            <a:prstDash val="solid"/>
+          </a:ln>
+        </p:spPr>
+      </p:sp>
+      <p:sp>
+        <p:nvSpPr>
+          <p:cNvPr id="31" name="Shape 29"/>
+          <p:cNvSpPr/>
+          <p:nvPr/>
+        </p:nvSpPr>
+        <p:spPr>
+          <a:xfrm>
+            <a:off x="457200" y="5623560"/>
+            <a:ext cx="73152" cy="731520"/>
+          </a:xfrm>
+          <a:prstGeom prst="rect">
+            <a:avLst/>
+          </a:prstGeom>
+          <a:solidFill>
+            <a:srgbClr val="C79A45"/>
+          </a:solidFill>
+          <a:ln w="12700">
+            <a:solidFill>
+              <a:srgbClr val="C79A45"/>
+            </a:solidFill>
+            <a:prstDash val="solid"/>
+          </a:ln>
+        </p:spPr>
+      </p:sp>
+      <p:sp>
+        <p:nvSpPr>
+          <p:cNvPr id="32" name="Text 30"/>
+          <p:cNvSpPr txBox="1"/>
+          <p:nvPr/>
+        </p:nvSpPr>
+        <p:spPr>
+          <a:xfrm>
+            <a:off x="731520" y="5623560"/>
+            <a:ext cx="2560320" cy="731520"/>
+          </a:xfrm>
+          <a:prstGeom prst="rect">
+            <a:avLst/>
+          </a:prstGeom>
+          <a:noFill/>
+          <a:ln/>
+        </p:spPr>
+        <p:txBody>
+          <a:bodyPr wrap="square" lIns="0" tIns="0" rIns="0" bIns="0" rtlCol="0" anchor="ctr"/>
+          <a:lstStyle/>
+          <a:p>
+            <a:pPr indent="0" marL="0">
+              <a:buNone/>
+            </a:pPr>
+            <a:r>
+              <a:rPr lang="en-US" sz="1200" b="1" spc="100" kern="0" dirty="0">
+                <a:solidFill>
+                  <a:srgbClr val="C79A45"/>
+                </a:solidFill>
+                <a:latin typeface="Arial" pitchFamily="34" charset="0"/>
+                <a:ea typeface="Arial" pitchFamily="34" charset="-122"/>
+                <a:cs typeface="Arial" pitchFamily="34" charset="-120"/>
+              </a:rPr>
+              <a:t>CONCLUSIÓN DE CONTROL</a:t>
+            </a:r>
+            <a:endParaRPr lang="en-US" sz="1200" dirty="0"/>
+          </a:p>
+        </p:txBody>
+      </p:sp>
+      <p:sp>
+        <p:nvSpPr>
+          <p:cNvPr id="33" name="Text 31"/>
+          <p:cNvSpPr txBox="1"/>
+          <p:nvPr/>
+        </p:nvSpPr>
+        <p:spPr>
+          <a:xfrm>
+            <a:off x="3291840" y="5623560"/>
+            <a:ext cx="8229600" cy="731520"/>
+          </a:xfrm>
+          <a:prstGeom prst="rect">
+            <a:avLst/>
+          </a:prstGeom>
+          <a:noFill/>
+          <a:ln/>
+        </p:spPr>
+        <p:txBody>
+          <a:bodyPr wrap="square" lIns="0" tIns="0" rIns="0" bIns="0" rtlCol="0" anchor="ctr"/>
+          <a:lstStyle/>
+          <a:p>
+            <a:pPr indent="0" marL="0">
+              <a:buNone/>
+            </a:pPr>
+            <a:r>
+              <a:rPr lang="en-US" sz="1300" b="1" dirty="0">
+                <a:solidFill>
+                  <a:srgbClr val="FFFFFF"/>
+                </a:solidFill>
+                <a:latin typeface="Arial" pitchFamily="34" charset="0"/>
+                <a:ea typeface="Arial" pitchFamily="34" charset="-122"/>
+                <a:cs typeface="Arial" pitchFamily="34" charset="-120"/>
+              </a:rPr>
+              <a:t>Con estos antecedentes no se confirma que sean cinco predios distintos ni que las superficies coincidan con polígonos físicos vigentes.</a:t>
+            </a:r>
+            <a:endParaRPr lang="en-US" sz="1300" dirty="0"/>
+          </a:p>
+        </p:txBody>
+      </p:sp>
+      <p:sp>
+        <p:nvSpPr>
+          <p:cNvPr id="34" name="Text 32"/>
+          <p:cNvSpPr txBox="1"/>
+          <p:nvPr/>
+        </p:nvSpPr>
+        <p:spPr>
+          <a:xfrm>
+            <a:off x="457200" y="6446520"/>
+            <a:ext cx="10058400" cy="274320"/>
+          </a:xfrm>
+          <a:prstGeom prst="rect">
+            <a:avLst/>
+          </a:prstGeom>
+          <a:noFill/>
+          <a:ln/>
+        </p:spPr>
+        <p:txBody>
+          <a:bodyPr wrap="square" lIns="0" tIns="0" rIns="0" bIns="0" rtlCol="0" anchor="ctr"/>
+          <a:lstStyle/>
+          <a:p>
+            <a:pPr indent="0" marL="0">
+              <a:buNone/>
+            </a:pPr>
+            <a:r>
+              <a:rPr lang="en-US" sz="1000" dirty="0">
+                <a:solidFill>
+                  <a:srgbClr val="8A939B"/>
+                </a:solidFill>
+                <a:latin typeface="Arial" pitchFamily="34" charset="0"/>
+                <a:ea typeface="Arial" pitchFamily="34" charset="-122"/>
+                <a:cs typeface="Arial" pitchFamily="34" charset="-120"/>
+              </a:rPr>
+              <a:t>Fuente: cinco fichas de caso; Matriz de Cruces; Seguimiento_INCERPAZ.xlsx.</a:t>
+            </a:r>
+            <a:endParaRPr lang="en-US" sz="1000" dirty="0"/>
+          </a:p>
+        </p:txBody>
+      </p:sp>
+      <p:sp>
+        <p:nvSpPr>
+          <p:cNvPr id="25" name="Slide Number Placeholder 0"/>
+          <p:cNvSpPr>
+            <a:spLocks noGrp="1"/>
+          </p:cNvSpPr>
+          <p:nvPr>
+            <p:ph type="sldNum" sz="quarter" idx="4294967295"/>
+          </p:nvPr>
+        </p:nvSpPr>
+        <p:spPr>
+          <a:xfrm>
+            <a:off x="11247120" y="6473952"/>
+            <a:ext cx="502920" cy="228600"/>
+          </a:xfrm>
+          <a:prstGeom prst="rect">
+            <a:avLst/>
+          </a:prstGeom>
+          <a:extLst>
+            <a:ext uri="{C572A759-6A51-4108-AA02-DFA0A04FC94B}">
+              <ma14:wrappingTextBoxFlag xmlns:ma14="http://schemas.microsoft.com/office/mac/drawingml/2011/main" val="0"/>
+            </a:ext>
+          </a:extLst>
+        </p:spPr>
+        <p:txBody>
+          <a:bodyPr lIns="0" tIns="0" rIns="0" bIns="0"/>
+          <a:lstStyle>
+            <a:lvl1pPr>
+              <a:defRPr sz="1000">
+                <a:solidFill>
+                  <a:srgbClr val="8A939B"/>
+                </a:solidFill>
+                <a:latin typeface="Arial"/>
+                <a:ea typeface="Arial"/>
+                <a:cs typeface="Arial"/>
+              </a:defRPr>
+            </a:lvl1pPr>
+          </a:lstStyle>
+          <a:p>
+            <a:pPr algn="r"/>
+            <a:fld id="{F7021451-1387-4CA6-816F-3879F97B5CBC}" type="slidenum">
+              <a:rPr b="0" lang="en-US"/>
+              <a:t>12</a:t>
+            </a:fld>
+            <a:endParaRPr lang="en-US"/>
+          </a:p>
+        </p:txBody>
+      </p:sp>
+    </p:spTree>
+  </p:cSld>
+  <p:clrMapOvr>
+    <a:masterClrMapping/>
+  </p:clrMapOvr>
+</p:sld>
+</file>
+
+<file path=ppt/slides/slide13.xml><?xml version="1.0" encoding="utf-8"?>
+<p:sld xmlns:a="http://schemas.openxmlformats.org/drawingml/2006/main" xmlns:r="http://schemas.openxmlformats.org/officeDocument/2006/relationships" xmlns:p="http://schemas.openxmlformats.org/presentationml/2006/main">
+  <p:cSld name="Slide 13">
+    <p:spTree>
+      <p:nvGrpSpPr>
+        <p:cNvPr id="1" name=""/>
+        <p:cNvGrpSpPr/>
+        <p:nvPr/>
+      </p:nvGrpSpPr>
+      <p:grpSpPr>
+        <a:xfrm>
+          <a:off x="0" y="0"/>
+          <a:ext cx="0" cy="0"/>
+          <a:chOff x="0" y="0"/>
+          <a:chExt cx="0" cy="0"/>
+        </a:xfrm>
+      </p:grpSpPr>
+      <p:sp>
+        <p:nvSpPr>
+          <p:cNvPr id="2" name="Text 0"/>
+          <p:cNvSpPr txBox="1"/>
+          <p:nvPr/>
+        </p:nvSpPr>
+        <p:spPr>
+          <a:xfrm>
+            <a:off x="457200" y="384048"/>
+            <a:ext cx="11247120" cy="274320"/>
+          </a:xfrm>
+          <a:prstGeom prst="rect">
+            <a:avLst/>
+          </a:prstGeom>
+          <a:noFill/>
+          <a:ln/>
+        </p:spPr>
+        <p:txBody>
+          <a:bodyPr wrap="square" lIns="0" tIns="0" rIns="0" bIns="0" rtlCol="0" anchor="t"/>
+          <a:lstStyle/>
+          <a:p>
+            <a:pPr indent="0" marL="0">
+              <a:buNone/>
+            </a:pPr>
+            <a:r>
+              <a:rPr lang="en-US" sz="1400" spc="100" kern="0" dirty="0">
+                <a:solidFill>
+                  <a:srgbClr val="5F6A73"/>
+                </a:solidFill>
+                <a:latin typeface="Arial" pitchFamily="34" charset="0"/>
+                <a:ea typeface="Arial" pitchFamily="34" charset="-122"/>
+                <a:cs typeface="Arial" pitchFamily="34" charset="-120"/>
+              </a:rPr>
+              <a:t>11 · ACCIONES RECOMENDADAS</a:t>
+            </a:r>
+            <a:endParaRPr lang="en-US" sz="1400" dirty="0"/>
+          </a:p>
+        </p:txBody>
+      </p:sp>
+      <p:sp>
+        <p:nvSpPr>
+          <p:cNvPr id="3" name="Text 1"/>
+          <p:cNvSpPr txBox="1"/>
+          <p:nvPr/>
+        </p:nvSpPr>
+        <p:spPr>
+          <a:xfrm>
+            <a:off x="457200" y="658368"/>
+            <a:ext cx="11247120" cy="566928"/>
+          </a:xfrm>
+          <a:prstGeom prst="rect">
+            <a:avLst/>
+          </a:prstGeom>
+          <a:noFill/>
+          <a:ln/>
+        </p:spPr>
+        <p:txBody>
+          <a:bodyPr wrap="square" lIns="0" tIns="0" rIns="0" bIns="0" rtlCol="0" anchor="ctr"/>
+          <a:lstStyle/>
+          <a:p>
+            <a:pPr indent="0" marL="0">
+              <a:buNone/>
+            </a:pPr>
+            <a:r>
+              <a:rPr lang="en-US" sz="3200" b="1" dirty="0">
+                <a:solidFill>
+                  <a:srgbClr val="1B2126"/>
+                </a:solidFill>
+                <a:latin typeface="Arial" pitchFamily="34" charset="0"/>
+                <a:ea typeface="Arial" pitchFamily="34" charset="-122"/>
+                <a:cs typeface="Arial" pitchFamily="34" charset="-120"/>
+              </a:rPr>
+              <a:t>Plan de cierre documental</a:t>
+            </a:r>
+            <a:endParaRPr lang="en-US" sz="3200" dirty="0"/>
+          </a:p>
+        </p:txBody>
+      </p:sp>
+      <p:sp>
+        <p:nvSpPr>
+          <p:cNvPr id="4" name="Marca dorada"/>
+          <p:cNvSpPr/>
+          <p:nvPr/>
+        </p:nvSpPr>
+        <p:spPr>
+          <a:xfrm>
+            <a:off x="457200" y="1298448"/>
+            <a:ext cx="731520" cy="64008"/>
+          </a:xfrm>
+          <a:prstGeom prst="rect">
+            <a:avLst/>
+          </a:prstGeom>
+          <a:solidFill>
+            <a:srgbClr val="C79A45"/>
+          </a:solidFill>
+          <a:ln w="12700">
+            <a:solidFill>
+              <a:srgbClr val="C79A45"/>
+            </a:solidFill>
+            <a:prstDash val="solid"/>
+          </a:ln>
+        </p:spPr>
+      </p:sp>
+      <p:sp>
+        <p:nvSpPr>
+          <p:cNvPr id="5" name="Text 3"/>
+          <p:cNvSpPr txBox="1"/>
+          <p:nvPr/>
+        </p:nvSpPr>
+        <p:spPr>
+          <a:xfrm>
+            <a:off x="457200" y="1444752"/>
+            <a:ext cx="11247120" cy="310896"/>
+          </a:xfrm>
+          <a:prstGeom prst="rect">
+            <a:avLst/>
+          </a:prstGeom>
+          <a:noFill/>
+          <a:ln/>
+        </p:spPr>
+        <p:txBody>
+          <a:bodyPr wrap="square" lIns="0" tIns="0" rIns="0" bIns="0" rtlCol="0" anchor="t"/>
+          <a:lstStyle/>
+          <a:p>
+            <a:pPr indent="0" marL="0">
+              <a:buNone/>
+            </a:pPr>
+            <a:r>
+              <a:rPr lang="en-US" sz="1400" dirty="0">
+                <a:solidFill>
+                  <a:srgbClr val="5F6A73"/>
+                </a:solidFill>
+                <a:latin typeface="Arial" pitchFamily="34" charset="0"/>
+                <a:ea typeface="Arial" pitchFamily="34" charset="-122"/>
+                <a:cs typeface="Arial" pitchFamily="34" charset="-120"/>
+              </a:rPr>
+              <a:t>Tres frentes en paralelo; las fechas y responsables deben asignarse en la matriz de seguimiento.</a:t>
+            </a:r>
+            <a:endParaRPr lang="en-US" sz="1400" dirty="0"/>
+          </a:p>
+        </p:txBody>
+      </p:sp>
+      <p:sp>
+        <p:nvSpPr>
+          <p:cNvPr id="6" name="Shape 4"/>
+          <p:cNvSpPr/>
+          <p:nvPr/>
+        </p:nvSpPr>
+        <p:spPr>
+          <a:xfrm>
+            <a:off x="457200" y="1901952"/>
+            <a:ext cx="3611880" cy="3657600"/>
+          </a:xfrm>
+          <a:prstGeom prst="rect">
+            <a:avLst/>
+          </a:prstGeom>
+          <a:solidFill>
+            <a:srgbClr val="FFFFFF"/>
+          </a:solidFill>
+          <a:ln w="9525">
+            <a:solidFill>
+              <a:srgbClr val="E6E8EB"/>
+            </a:solidFill>
+            <a:prstDash val="solid"/>
+          </a:ln>
+          <a:effectLst>
+            <a:outerShdw sx="100000" sy="100000" kx="0" ky="0" algn="bl" rotWithShape="0" blurRad="114300" dist="25400" dir="5400000">
+              <a:srgbClr val="000000">
+                <a:alpha val="14000"/>
+              </a:srgbClr>
+            </a:outerShdw>
+          </a:effectLst>
+        </p:spPr>
+      </p:sp>
+      <p:sp>
+        <p:nvSpPr>
+          <p:cNvPr id="7" name="Shape 5"/>
+          <p:cNvSpPr/>
+          <p:nvPr/>
+        </p:nvSpPr>
+        <p:spPr>
+          <a:xfrm>
+            <a:off x="457200" y="1901952"/>
+            <a:ext cx="3611880" cy="594360"/>
+          </a:xfrm>
+          <a:prstGeom prst="rect">
+            <a:avLst/>
+          </a:prstGeom>
+          <a:solidFill>
+            <a:srgbClr val="1B2126"/>
+          </a:solidFill>
+          <a:ln w="12700">
+            <a:solidFill>
+              <a:srgbClr val="1B2126"/>
+            </a:solidFill>
+            <a:prstDash val="solid"/>
+          </a:ln>
+        </p:spPr>
+      </p:sp>
+      <p:sp>
+        <p:nvSpPr>
+          <p:cNvPr id="8" name="Text 6"/>
+          <p:cNvSpPr txBox="1"/>
+          <p:nvPr/>
+        </p:nvSpPr>
+        <p:spPr>
+          <a:xfrm>
+            <a:off x="685800" y="1901952"/>
+            <a:ext cx="548640" cy="594360"/>
+          </a:xfrm>
+          <a:prstGeom prst="rect">
+            <a:avLst/>
+          </a:prstGeom>
+          <a:noFill/>
+          <a:ln/>
+        </p:spPr>
+        <p:txBody>
+          <a:bodyPr wrap="square" lIns="0" tIns="0" rIns="0" bIns="0" rtlCol="0" anchor="ctr"/>
+          <a:lstStyle/>
+          <a:p>
+            <a:pPr indent="0" marL="0">
+              <a:buNone/>
+            </a:pPr>
+            <a:r>
+              <a:rPr lang="en-US" sz="2000" b="1" dirty="0">
+                <a:solidFill>
+                  <a:srgbClr val="C79A45"/>
+                </a:solidFill>
+                <a:latin typeface="Arial" pitchFamily="34" charset="0"/>
+                <a:ea typeface="Arial" pitchFamily="34" charset="-122"/>
+                <a:cs typeface="Arial" pitchFamily="34" charset="-120"/>
+              </a:rPr>
+              <a:t>01</a:t>
+            </a:r>
+            <a:endParaRPr lang="en-US" sz="2000" dirty="0"/>
+          </a:p>
+        </p:txBody>
+      </p:sp>
+      <p:sp>
+        <p:nvSpPr>
+          <p:cNvPr id="9" name="Text 7"/>
+          <p:cNvSpPr txBox="1"/>
+          <p:nvPr/>
+        </p:nvSpPr>
+        <p:spPr>
+          <a:xfrm>
+            <a:off x="1234440" y="1901952"/>
+            <a:ext cx="2743200" cy="594360"/>
+          </a:xfrm>
+          <a:prstGeom prst="rect">
+            <a:avLst/>
+          </a:prstGeom>
+          <a:noFill/>
+          <a:ln/>
+        </p:spPr>
+        <p:txBody>
+          <a:bodyPr wrap="square" lIns="0" tIns="0" rIns="0" bIns="0" rtlCol="0" anchor="ctr"/>
+          <a:lstStyle/>
+          <a:p>
+            <a:pPr indent="0" marL="0">
+              <a:buNone/>
+            </a:pPr>
+            <a:r>
+              <a:rPr lang="en-US" sz="1600" b="1" dirty="0">
+                <a:solidFill>
+                  <a:srgbClr val="FFFFFF"/>
+                </a:solidFill>
+                <a:latin typeface="Arial" pitchFamily="34" charset="0"/>
+                <a:ea typeface="Arial" pitchFamily="34" charset="-122"/>
+                <a:cs typeface="Arial" pitchFamily="34" charset="-120"/>
+              </a:rPr>
+              <a:t>Jurídico / registral</a:t>
+            </a:r>
+            <a:endParaRPr lang="en-US" sz="1600" dirty="0"/>
+          </a:p>
+        </p:txBody>
+      </p:sp>
+      <p:sp>
+        <p:nvSpPr>
+          <p:cNvPr id="10" name="Shape 8"/>
+          <p:cNvSpPr/>
+          <p:nvPr/>
+        </p:nvSpPr>
+        <p:spPr>
+          <a:xfrm>
+            <a:off x="658368" y="2670048"/>
+            <a:ext cx="274320" cy="274320"/>
+          </a:xfrm>
+          <a:prstGeom prst="ellipse">
+            <a:avLst/>
+          </a:prstGeom>
+          <a:solidFill>
+            <a:srgbClr val="C79A45"/>
+          </a:solidFill>
+          <a:ln w="12700">
+            <a:solidFill>
+              <a:srgbClr val="C79A45"/>
+            </a:solidFill>
+            <a:prstDash val="solid"/>
+          </a:ln>
+        </p:spPr>
+      </p:sp>
+      <p:sp>
+        <p:nvSpPr>
+          <p:cNvPr id="11" name="Text 9"/>
+          <p:cNvSpPr txBox="1"/>
+          <p:nvPr/>
+        </p:nvSpPr>
+        <p:spPr>
+          <a:xfrm>
+            <a:off x="658368" y="2670048"/>
+            <a:ext cx="274320" cy="274320"/>
+          </a:xfrm>
+          <a:prstGeom prst="rect">
+            <a:avLst/>
+          </a:prstGeom>
+          <a:noFill/>
+          <a:ln/>
+        </p:spPr>
+        <p:txBody>
+          <a:bodyPr wrap="square" lIns="0" tIns="0" rIns="0" bIns="0" rtlCol="0" anchor="ctr"/>
+          <a:lstStyle/>
+          <a:p>
+            <a:pPr algn="ctr" indent="0" marL="0">
+              <a:buNone/>
+            </a:pPr>
+            <a:r>
+              <a:rPr lang="en-US" sz="1100" b="1" dirty="0">
+                <a:solidFill>
+                  <a:srgbClr val="1B2126"/>
+                </a:solidFill>
+                <a:latin typeface="Arial" pitchFamily="34" charset="0"/>
+                <a:ea typeface="Arial" pitchFamily="34" charset="-122"/>
+                <a:cs typeface="Arial" pitchFamily="34" charset="-120"/>
+              </a:rPr>
+              <a:t>1</a:t>
+            </a:r>
+            <a:endParaRPr lang="en-US" sz="1100" dirty="0"/>
+          </a:p>
+        </p:txBody>
+      </p:sp>
+      <p:sp>
+        <p:nvSpPr>
+          <p:cNvPr id="12" name="Text 10"/>
+          <p:cNvSpPr txBox="1"/>
+          <p:nvPr/>
+        </p:nvSpPr>
+        <p:spPr>
+          <a:xfrm>
+            <a:off x="1051560" y="2633472"/>
+            <a:ext cx="2880360" cy="676656"/>
+          </a:xfrm>
+          <a:prstGeom prst="rect">
+            <a:avLst/>
+          </a:prstGeom>
+          <a:noFill/>
+          <a:ln/>
+        </p:spPr>
+        <p:txBody>
+          <a:bodyPr wrap="square" lIns="0" tIns="0" rIns="0" bIns="0" rtlCol="0" anchor="t"/>
+          <a:lstStyle/>
+          <a:p>
+            <a:pPr indent="0" marL="0">
+              <a:buNone/>
+            </a:pPr>
+            <a:r>
+              <a:rPr lang="en-US" sz="1200" dirty="0">
+                <a:solidFill>
+                  <a:srgbClr val="2C353C"/>
+                </a:solidFill>
+                <a:latin typeface="Arial" pitchFamily="34" charset="0"/>
+                <a:ea typeface="Arial" pitchFamily="34" charset="-122"/>
+                <a:cs typeface="Arial" pitchFamily="34" charset="-120"/>
+              </a:rPr>
+              <a:t>Obtener folios certificados vigentes de cada matrícula identificada.</a:t>
+            </a:r>
+            <a:endParaRPr lang="en-US" sz="1200" dirty="0"/>
+          </a:p>
+        </p:txBody>
+      </p:sp>
+      <p:sp>
+        <p:nvSpPr>
+          <p:cNvPr id="13" name="Shape 11"/>
+          <p:cNvSpPr/>
+          <p:nvPr/>
+        </p:nvSpPr>
+        <p:spPr>
+          <a:xfrm>
+            <a:off x="658368" y="3383280"/>
+            <a:ext cx="274320" cy="274320"/>
+          </a:xfrm>
+          <a:prstGeom prst="ellipse">
+            <a:avLst/>
+          </a:prstGeom>
+          <a:solidFill>
+            <a:srgbClr val="C79A45"/>
+          </a:solidFill>
+          <a:ln w="12700">
+            <a:solidFill>
+              <a:srgbClr val="C79A45"/>
+            </a:solidFill>
+            <a:prstDash val="solid"/>
+          </a:ln>
+        </p:spPr>
+      </p:sp>
+      <p:sp>
+        <p:nvSpPr>
+          <p:cNvPr id="14" name="Text 12"/>
+          <p:cNvSpPr txBox="1"/>
+          <p:nvPr/>
+        </p:nvSpPr>
+        <p:spPr>
+          <a:xfrm>
+            <a:off x="658368" y="3383280"/>
+            <a:ext cx="274320" cy="274320"/>
+          </a:xfrm>
+          <a:prstGeom prst="rect">
+            <a:avLst/>
+          </a:prstGeom>
+          <a:noFill/>
+          <a:ln/>
+        </p:spPr>
+        <p:txBody>
+          <a:bodyPr wrap="square" lIns="0" tIns="0" rIns="0" bIns="0" rtlCol="0" anchor="ctr"/>
+          <a:lstStyle/>
+          <a:p>
+            <a:pPr algn="ctr" indent="0" marL="0">
+              <a:buNone/>
+            </a:pPr>
+            <a:r>
+              <a:rPr lang="en-US" sz="1100" b="1" dirty="0">
+                <a:solidFill>
+                  <a:srgbClr val="1B2126"/>
+                </a:solidFill>
+                <a:latin typeface="Arial" pitchFamily="34" charset="0"/>
+                <a:ea typeface="Arial" pitchFamily="34" charset="-122"/>
+                <a:cs typeface="Arial" pitchFamily="34" charset="-120"/>
+              </a:rPr>
+              <a:t>2</a:t>
+            </a:r>
+            <a:endParaRPr lang="en-US" sz="1100" dirty="0"/>
+          </a:p>
+        </p:txBody>
+      </p:sp>
+      <p:sp>
+        <p:nvSpPr>
+          <p:cNvPr id="15" name="Text 13"/>
+          <p:cNvSpPr txBox="1"/>
+          <p:nvPr/>
+        </p:nvSpPr>
+        <p:spPr>
+          <a:xfrm>
+            <a:off x="1051560" y="3346704"/>
+            <a:ext cx="2880360" cy="676656"/>
+          </a:xfrm>
+          <a:prstGeom prst="rect">
+            <a:avLst/>
+          </a:prstGeom>
+          <a:noFill/>
+          <a:ln/>
+        </p:spPr>
+        <p:txBody>
+          <a:bodyPr wrap="square" lIns="0" tIns="0" rIns="0" bIns="0" rtlCol="0" anchor="t"/>
+          <a:lstStyle/>
+          <a:p>
+            <a:pPr indent="0" marL="0">
+              <a:buNone/>
+            </a:pPr>
+            <a:r>
+              <a:rPr lang="en-US" sz="1200" dirty="0">
+                <a:solidFill>
+                  <a:srgbClr val="2C353C"/>
+                </a:solidFill>
+                <a:latin typeface="Arial" pitchFamily="34" charset="0"/>
+                <a:ea typeface="Arial" pitchFamily="34" charset="-122"/>
+                <a:cs typeface="Arial" pitchFamily="34" charset="-120"/>
+              </a:rPr>
+              <a:t>Para Chávez: verificar titularidad, gravámenes y saldo de cuota.</a:t>
+            </a:r>
+            <a:endParaRPr lang="en-US" sz="1200" dirty="0"/>
+          </a:p>
+        </p:txBody>
+      </p:sp>
+      <p:sp>
+        <p:nvSpPr>
+          <p:cNvPr id="16" name="Shape 14"/>
+          <p:cNvSpPr/>
+          <p:nvPr/>
+        </p:nvSpPr>
+        <p:spPr>
+          <a:xfrm>
+            <a:off x="658368" y="4096512"/>
+            <a:ext cx="274320" cy="274320"/>
+          </a:xfrm>
+          <a:prstGeom prst="ellipse">
+            <a:avLst/>
+          </a:prstGeom>
+          <a:solidFill>
+            <a:srgbClr val="C79A45"/>
+          </a:solidFill>
+          <a:ln w="12700">
+            <a:solidFill>
+              <a:srgbClr val="C79A45"/>
+            </a:solidFill>
+            <a:prstDash val="solid"/>
+          </a:ln>
+        </p:spPr>
+      </p:sp>
+      <p:sp>
+        <p:nvSpPr>
+          <p:cNvPr id="17" name="Text 15"/>
+          <p:cNvSpPr txBox="1"/>
+          <p:nvPr/>
+        </p:nvSpPr>
+        <p:spPr>
+          <a:xfrm>
+            <a:off x="658368" y="4096512"/>
+            <a:ext cx="274320" cy="274320"/>
+          </a:xfrm>
+          <a:prstGeom prst="rect">
+            <a:avLst/>
+          </a:prstGeom>
+          <a:noFill/>
+          <a:ln/>
+        </p:spPr>
+        <p:txBody>
+          <a:bodyPr wrap="square" lIns="0" tIns="0" rIns="0" bIns="0" rtlCol="0" anchor="ctr"/>
+          <a:lstStyle/>
+          <a:p>
+            <a:pPr algn="ctr" indent="0" marL="0">
+              <a:buNone/>
+            </a:pPr>
+            <a:r>
+              <a:rPr lang="en-US" sz="1100" b="1" dirty="0">
+                <a:solidFill>
+                  <a:srgbClr val="1B2126"/>
+                </a:solidFill>
+                <a:latin typeface="Arial" pitchFamily="34" charset="0"/>
+                <a:ea typeface="Arial" pitchFamily="34" charset="-122"/>
+                <a:cs typeface="Arial" pitchFamily="34" charset="-120"/>
+              </a:rPr>
+              <a:t>3</a:t>
+            </a:r>
+            <a:endParaRPr lang="en-US" sz="1100" dirty="0"/>
+          </a:p>
+        </p:txBody>
+      </p:sp>
+      <p:sp>
+        <p:nvSpPr>
+          <p:cNvPr id="18" name="Text 16"/>
+          <p:cNvSpPr txBox="1"/>
+          <p:nvPr/>
+        </p:nvSpPr>
+        <p:spPr>
+          <a:xfrm>
+            <a:off x="1051560" y="4059936"/>
+            <a:ext cx="2880360" cy="676656"/>
+          </a:xfrm>
+          <a:prstGeom prst="rect">
+            <a:avLst/>
+          </a:prstGeom>
+          <a:noFill/>
+          <a:ln/>
+        </p:spPr>
+        <p:txBody>
+          <a:bodyPr wrap="square" lIns="0" tIns="0" rIns="0" bIns="0" rtlCol="0" anchor="t"/>
+          <a:lstStyle/>
+          <a:p>
+            <a:pPr indent="0" marL="0">
+              <a:buNone/>
+            </a:pPr>
+            <a:r>
+              <a:rPr lang="en-US" sz="1200" dirty="0">
+                <a:solidFill>
+                  <a:srgbClr val="2C353C"/>
+                </a:solidFill>
+                <a:latin typeface="Arial" pitchFamily="34" charset="0"/>
+                <a:ea typeface="Arial" pitchFamily="34" charset="-122"/>
+                <a:cs typeface="Arial" pitchFamily="34" charset="-120"/>
+              </a:rPr>
+              <a:t>Localizar contratos y testimonios originales; aclarar transferencia Antonio y referencias Quispe.</a:t>
+            </a:r>
+            <a:endParaRPr lang="en-US" sz="1200" dirty="0"/>
+          </a:p>
+        </p:txBody>
+      </p:sp>
+      <p:sp>
+        <p:nvSpPr>
+          <p:cNvPr id="19" name="Shape 17"/>
+          <p:cNvSpPr/>
+          <p:nvPr/>
+        </p:nvSpPr>
+        <p:spPr>
+          <a:xfrm>
+            <a:off x="658368" y="4809744"/>
+            <a:ext cx="274320" cy="274320"/>
+          </a:xfrm>
+          <a:prstGeom prst="ellipse">
+            <a:avLst/>
+          </a:prstGeom>
+          <a:solidFill>
+            <a:srgbClr val="C79A45"/>
+          </a:solidFill>
+          <a:ln w="12700">
+            <a:solidFill>
+              <a:srgbClr val="C79A45"/>
+            </a:solidFill>
+            <a:prstDash val="solid"/>
+          </a:ln>
+        </p:spPr>
+      </p:sp>
+      <p:sp>
+        <p:nvSpPr>
+          <p:cNvPr id="20" name="Text 18"/>
+          <p:cNvSpPr txBox="1"/>
+          <p:nvPr/>
+        </p:nvSpPr>
+        <p:spPr>
+          <a:xfrm>
+            <a:off x="658368" y="4809744"/>
+            <a:ext cx="274320" cy="274320"/>
+          </a:xfrm>
+          <a:prstGeom prst="rect">
+            <a:avLst/>
+          </a:prstGeom>
+          <a:noFill/>
+          <a:ln/>
+        </p:spPr>
+        <p:txBody>
+          <a:bodyPr wrap="square" lIns="0" tIns="0" rIns="0" bIns="0" rtlCol="0" anchor="ctr"/>
+          <a:lstStyle/>
+          <a:p>
+            <a:pPr algn="ctr" indent="0" marL="0">
+              <a:buNone/>
+            </a:pPr>
+            <a:r>
+              <a:rPr lang="en-US" sz="1100" b="1" dirty="0">
+                <a:solidFill>
+                  <a:srgbClr val="1B2126"/>
+                </a:solidFill>
+                <a:latin typeface="Arial" pitchFamily="34" charset="0"/>
+                <a:ea typeface="Arial" pitchFamily="34" charset="-122"/>
+                <a:cs typeface="Arial" pitchFamily="34" charset="-120"/>
+              </a:rPr>
+              <a:t>4</a:t>
+            </a:r>
+            <a:endParaRPr lang="en-US" sz="1100" dirty="0"/>
+          </a:p>
+        </p:txBody>
+      </p:sp>
+      <p:sp>
+        <p:nvSpPr>
+          <p:cNvPr id="21" name="Text 19"/>
+          <p:cNvSpPr txBox="1"/>
+          <p:nvPr/>
+        </p:nvSpPr>
+        <p:spPr>
+          <a:xfrm>
+            <a:off x="1051560" y="4773168"/>
+            <a:ext cx="2880360" cy="676656"/>
+          </a:xfrm>
+          <a:prstGeom prst="rect">
+            <a:avLst/>
+          </a:prstGeom>
+          <a:noFill/>
+          <a:ln/>
+        </p:spPr>
+        <p:txBody>
+          <a:bodyPr wrap="square" lIns="0" tIns="0" rIns="0" bIns="0" rtlCol="0" anchor="t"/>
+          <a:lstStyle/>
+          <a:p>
+            <a:pPr indent="0" marL="0">
+              <a:buNone/>
+            </a:pPr>
+            <a:r>
+              <a:rPr lang="en-US" sz="1200" dirty="0">
+                <a:solidFill>
+                  <a:srgbClr val="2C353C"/>
+                </a:solidFill>
+                <a:latin typeface="Arial" pitchFamily="34" charset="0"/>
+                <a:ea typeface="Arial" pitchFamily="34" charset="-122"/>
+                <a:cs typeface="Arial" pitchFamily="34" charset="-120"/>
+              </a:rPr>
+              <a:t>Documentar cadena de tradición y correspondencia titular–matrícula.</a:t>
+            </a:r>
+            <a:endParaRPr lang="en-US" sz="1200" dirty="0"/>
+          </a:p>
+        </p:txBody>
+      </p:sp>
+      <p:sp>
+        <p:nvSpPr>
+          <p:cNvPr id="22" name="Shape 20"/>
+          <p:cNvSpPr/>
+          <p:nvPr/>
+        </p:nvSpPr>
+        <p:spPr>
+          <a:xfrm>
+            <a:off x="4288536" y="1901952"/>
+            <a:ext cx="3611880" cy="3657600"/>
+          </a:xfrm>
+          <a:prstGeom prst="rect">
+            <a:avLst/>
+          </a:prstGeom>
+          <a:solidFill>
+            <a:srgbClr val="FFFFFF"/>
+          </a:solidFill>
+          <a:ln w="9525">
+            <a:solidFill>
+              <a:srgbClr val="E6E8EB"/>
+            </a:solidFill>
+            <a:prstDash val="solid"/>
+          </a:ln>
+          <a:effectLst>
+            <a:outerShdw sx="100000" sy="100000" kx="0" ky="0" algn="bl" rotWithShape="0" blurRad="114300" dist="25400" dir="5400000">
+              <a:srgbClr val="000000">
+                <a:alpha val="14000"/>
+              </a:srgbClr>
+            </a:outerShdw>
+          </a:effectLst>
+        </p:spPr>
+      </p:sp>
+      <p:sp>
+        <p:nvSpPr>
+          <p:cNvPr id="23" name="Shape 21"/>
+          <p:cNvSpPr/>
+          <p:nvPr/>
+        </p:nvSpPr>
+        <p:spPr>
+          <a:xfrm>
+            <a:off x="4288536" y="1901952"/>
+            <a:ext cx="3611880" cy="594360"/>
+          </a:xfrm>
+          <a:prstGeom prst="rect">
+            <a:avLst/>
+          </a:prstGeom>
+          <a:solidFill>
+            <a:srgbClr val="C79A45"/>
+          </a:solidFill>
+          <a:ln w="12700">
+            <a:solidFill>
+              <a:srgbClr val="C79A45"/>
+            </a:solidFill>
+            <a:prstDash val="solid"/>
+          </a:ln>
+        </p:spPr>
+      </p:sp>
+      <p:sp>
+        <p:nvSpPr>
+          <p:cNvPr id="24" name="Text 22"/>
+          <p:cNvSpPr txBox="1"/>
+          <p:nvPr/>
+        </p:nvSpPr>
+        <p:spPr>
+          <a:xfrm>
+            <a:off x="4517136" y="1901952"/>
+            <a:ext cx="548640" cy="594360"/>
+          </a:xfrm>
+          <a:prstGeom prst="rect">
+            <a:avLst/>
+          </a:prstGeom>
+          <a:noFill/>
+          <a:ln/>
+        </p:spPr>
+        <p:txBody>
+          <a:bodyPr wrap="square" lIns="0" tIns="0" rIns="0" bIns="0" rtlCol="0" anchor="ctr"/>
+          <a:lstStyle/>
+          <a:p>
+            <a:pPr indent="0" marL="0">
+              <a:buNone/>
+            </a:pPr>
+            <a:r>
+              <a:rPr lang="en-US" sz="2000" b="1" dirty="0">
+                <a:solidFill>
+                  <a:srgbClr val="1B2126"/>
+                </a:solidFill>
+                <a:latin typeface="Arial" pitchFamily="34" charset="0"/>
+                <a:ea typeface="Arial" pitchFamily="34" charset="-122"/>
+                <a:cs typeface="Arial" pitchFamily="34" charset="-120"/>
+              </a:rPr>
+              <a:t>02</a:t>
+            </a:r>
+            <a:endParaRPr lang="en-US" sz="2000" dirty="0"/>
+          </a:p>
+        </p:txBody>
+      </p:sp>
+      <p:sp>
+        <p:nvSpPr>
+          <p:cNvPr id="25" name="Text 23"/>
+          <p:cNvSpPr txBox="1"/>
+          <p:nvPr/>
+        </p:nvSpPr>
+        <p:spPr>
+          <a:xfrm>
+            <a:off x="5065776" y="1901952"/>
+            <a:ext cx="2743200" cy="594360"/>
+          </a:xfrm>
+          <a:prstGeom prst="rect">
+            <a:avLst/>
+          </a:prstGeom>
+          <a:noFill/>
+          <a:ln/>
+        </p:spPr>
+        <p:txBody>
+          <a:bodyPr wrap="square" lIns="0" tIns="0" rIns="0" bIns="0" rtlCol="0" anchor="ctr"/>
+          <a:lstStyle/>
+          <a:p>
+            <a:pPr indent="0" marL="0">
+              <a:buNone/>
+            </a:pPr>
+            <a:r>
+              <a:rPr lang="en-US" sz="1600" b="1" dirty="0">
+                <a:solidFill>
+                  <a:srgbClr val="1B2126"/>
+                </a:solidFill>
+                <a:latin typeface="Arial" pitchFamily="34" charset="0"/>
+                <a:ea typeface="Arial" pitchFamily="34" charset="-122"/>
+                <a:cs typeface="Arial" pitchFamily="34" charset="-120"/>
+              </a:rPr>
+              <a:t>Técnico / catastral</a:t>
+            </a:r>
+            <a:endParaRPr lang="en-US" sz="1600" dirty="0"/>
+          </a:p>
+        </p:txBody>
+      </p:sp>
+      <p:sp>
+        <p:nvSpPr>
+          <p:cNvPr id="26" name="Shape 24"/>
+          <p:cNvSpPr/>
+          <p:nvPr/>
+        </p:nvSpPr>
+        <p:spPr>
+          <a:xfrm>
+            <a:off x="4489704" y="2670048"/>
+            <a:ext cx="274320" cy="274320"/>
+          </a:xfrm>
+          <a:prstGeom prst="ellipse">
+            <a:avLst/>
+          </a:prstGeom>
+          <a:solidFill>
+            <a:srgbClr val="C79A45"/>
+          </a:solidFill>
+          <a:ln w="12700">
+            <a:solidFill>
+              <a:srgbClr val="C79A45"/>
+            </a:solidFill>
+            <a:prstDash val="solid"/>
+          </a:ln>
+        </p:spPr>
+      </p:sp>
+      <p:sp>
+        <p:nvSpPr>
+          <p:cNvPr id="27" name="Text 25"/>
+          <p:cNvSpPr txBox="1"/>
+          <p:nvPr/>
+        </p:nvSpPr>
+        <p:spPr>
+          <a:xfrm>
+            <a:off x="4489704" y="2670048"/>
+            <a:ext cx="274320" cy="274320"/>
+          </a:xfrm>
+          <a:prstGeom prst="rect">
+            <a:avLst/>
+          </a:prstGeom>
+          <a:noFill/>
+          <a:ln/>
+        </p:spPr>
+        <p:txBody>
+          <a:bodyPr wrap="square" lIns="0" tIns="0" rIns="0" bIns="0" rtlCol="0" anchor="ctr"/>
+          <a:lstStyle/>
+          <a:p>
+            <a:pPr algn="ctr" indent="0" marL="0">
+              <a:buNone/>
+            </a:pPr>
+            <a:r>
+              <a:rPr lang="en-US" sz="1100" b="1" dirty="0">
+                <a:solidFill>
+                  <a:srgbClr val="1B2126"/>
+                </a:solidFill>
+                <a:latin typeface="Arial" pitchFamily="34" charset="0"/>
+                <a:ea typeface="Arial" pitchFamily="34" charset="-122"/>
+                <a:cs typeface="Arial" pitchFamily="34" charset="-120"/>
+              </a:rPr>
+              <a:t>1</a:t>
+            </a:r>
+            <a:endParaRPr lang="en-US" sz="1100" dirty="0"/>
+          </a:p>
+        </p:txBody>
+      </p:sp>
+      <p:sp>
+        <p:nvSpPr>
+          <p:cNvPr id="28" name="Text 26"/>
+          <p:cNvSpPr txBox="1"/>
+          <p:nvPr/>
+        </p:nvSpPr>
+        <p:spPr>
+          <a:xfrm>
+            <a:off x="4882896" y="2633472"/>
+            <a:ext cx="2880360" cy="676656"/>
+          </a:xfrm>
+          <a:prstGeom prst="rect">
+            <a:avLst/>
+          </a:prstGeom>
+          <a:noFill/>
+          <a:ln/>
+        </p:spPr>
+        <p:txBody>
+          <a:bodyPr wrap="square" lIns="0" tIns="0" rIns="0" bIns="0" rtlCol="0" anchor="t"/>
+          <a:lstStyle/>
+          <a:p>
+            <a:pPr indent="0" marL="0">
+              <a:buNone/>
+            </a:pPr>
+            <a:r>
+              <a:rPr lang="en-US" sz="1200" dirty="0">
+                <a:solidFill>
+                  <a:srgbClr val="2C353C"/>
+                </a:solidFill>
+                <a:latin typeface="Arial" pitchFamily="34" charset="0"/>
+                <a:ea typeface="Arial" pitchFamily="34" charset="-122"/>
+                <a:cs typeface="Arial" pitchFamily="34" charset="-120"/>
+              </a:rPr>
+              <a:t>Solicitar planos municipales certificados y archivos digitales de polígonos.</a:t>
+            </a:r>
+            <a:endParaRPr lang="en-US" sz="1200" dirty="0"/>
+          </a:p>
+        </p:txBody>
+      </p:sp>
+      <p:sp>
+        <p:nvSpPr>
+          <p:cNvPr id="29" name="Shape 27"/>
+          <p:cNvSpPr/>
+          <p:nvPr/>
+        </p:nvSpPr>
+        <p:spPr>
+          <a:xfrm>
+            <a:off x="4489704" y="3383280"/>
+            <a:ext cx="274320" cy="274320"/>
+          </a:xfrm>
+          <a:prstGeom prst="ellipse">
+            <a:avLst/>
+          </a:prstGeom>
+          <a:solidFill>
+            <a:srgbClr val="C79A45"/>
+          </a:solidFill>
+          <a:ln w="12700">
+            <a:solidFill>
+              <a:srgbClr val="C79A45"/>
+            </a:solidFill>
+            <a:prstDash val="solid"/>
+          </a:ln>
+        </p:spPr>
+      </p:sp>
+      <p:sp>
+        <p:nvSpPr>
+          <p:cNvPr id="30" name="Text 28"/>
+          <p:cNvSpPr txBox="1"/>
+          <p:nvPr/>
+        </p:nvSpPr>
+        <p:spPr>
+          <a:xfrm>
+            <a:off x="4489704" y="3383280"/>
+            <a:ext cx="274320" cy="274320"/>
+          </a:xfrm>
+          <a:prstGeom prst="rect">
+            <a:avLst/>
+          </a:prstGeom>
+          <a:noFill/>
+          <a:ln/>
+        </p:spPr>
+        <p:txBody>
+          <a:bodyPr wrap="square" lIns="0" tIns="0" rIns="0" bIns="0" rtlCol="0" anchor="ctr"/>
+          <a:lstStyle/>
+          <a:p>
+            <a:pPr algn="ctr" indent="0" marL="0">
+              <a:buNone/>
+            </a:pPr>
+            <a:r>
+              <a:rPr lang="en-US" sz="1100" b="1" dirty="0">
+                <a:solidFill>
+                  <a:srgbClr val="1B2126"/>
+                </a:solidFill>
+                <a:latin typeface="Arial" pitchFamily="34" charset="0"/>
+                <a:ea typeface="Arial" pitchFamily="34" charset="-122"/>
+                <a:cs typeface="Arial" pitchFamily="34" charset="-120"/>
+              </a:rPr>
+              <a:t>2</a:t>
+            </a:r>
+            <a:endParaRPr lang="en-US" sz="1100" dirty="0"/>
+          </a:p>
+        </p:txBody>
+      </p:sp>
+      <p:sp>
+        <p:nvSpPr>
+          <p:cNvPr id="31" name="Text 29"/>
+          <p:cNvSpPr txBox="1"/>
+          <p:nvPr/>
+        </p:nvSpPr>
+        <p:spPr>
+          <a:xfrm>
+            <a:off x="4882896" y="3346704"/>
+            <a:ext cx="2880360" cy="676656"/>
+          </a:xfrm>
+          <a:prstGeom prst="rect">
+            <a:avLst/>
+          </a:prstGeom>
+          <a:noFill/>
+          <a:ln/>
+        </p:spPr>
+        <p:txBody>
+          <a:bodyPr wrap="square" lIns="0" tIns="0" rIns="0" bIns="0" rtlCol="0" anchor="t"/>
+          <a:lstStyle/>
+          <a:p>
+            <a:pPr indent="0" marL="0">
+              <a:buNone/>
+            </a:pPr>
+            <a:r>
+              <a:rPr lang="en-US" sz="1200" dirty="0">
+                <a:solidFill>
+                  <a:srgbClr val="2C353C"/>
+                </a:solidFill>
+                <a:latin typeface="Arial" pitchFamily="34" charset="0"/>
+                <a:ea typeface="Arial" pitchFamily="34" charset="-122"/>
+                <a:cs typeface="Arial" pitchFamily="34" charset="-120"/>
+              </a:rPr>
+              <a:t>Georreferenciar las parcelas candidatas y contrastar superficie y linderos.</a:t>
+            </a:r>
+            <a:endParaRPr lang="en-US" sz="1200" dirty="0"/>
+          </a:p>
+        </p:txBody>
+      </p:sp>
+      <p:sp>
+        <p:nvSpPr>
+          <p:cNvPr id="32" name="Shape 30"/>
+          <p:cNvSpPr/>
+          <p:nvPr/>
+        </p:nvSpPr>
+        <p:spPr>
+          <a:xfrm>
+            <a:off x="4489704" y="4096512"/>
+            <a:ext cx="274320" cy="274320"/>
+          </a:xfrm>
+          <a:prstGeom prst="ellipse">
+            <a:avLst/>
+          </a:prstGeom>
+          <a:solidFill>
+            <a:srgbClr val="C79A45"/>
+          </a:solidFill>
+          <a:ln w="12700">
+            <a:solidFill>
+              <a:srgbClr val="C79A45"/>
+            </a:solidFill>
+            <a:prstDash val="solid"/>
+          </a:ln>
+        </p:spPr>
+      </p:sp>
+      <p:sp>
+        <p:nvSpPr>
+          <p:cNvPr id="33" name="Text 31"/>
+          <p:cNvSpPr txBox="1"/>
+          <p:nvPr/>
+        </p:nvSpPr>
+        <p:spPr>
+          <a:xfrm>
+            <a:off x="4489704" y="4096512"/>
+            <a:ext cx="274320" cy="274320"/>
+          </a:xfrm>
+          <a:prstGeom prst="rect">
+            <a:avLst/>
+          </a:prstGeom>
+          <a:noFill/>
+          <a:ln/>
+        </p:spPr>
+        <p:txBody>
+          <a:bodyPr wrap="square" lIns="0" tIns="0" rIns="0" bIns="0" rtlCol="0" anchor="ctr"/>
+          <a:lstStyle/>
+          <a:p>
+            <a:pPr algn="ctr" indent="0" marL="0">
+              <a:buNone/>
+            </a:pPr>
+            <a:r>
+              <a:rPr lang="en-US" sz="1100" b="1" dirty="0">
+                <a:solidFill>
+                  <a:srgbClr val="1B2126"/>
+                </a:solidFill>
+                <a:latin typeface="Arial" pitchFamily="34" charset="0"/>
+                <a:ea typeface="Arial" pitchFamily="34" charset="-122"/>
+                <a:cs typeface="Arial" pitchFamily="34" charset="-120"/>
+              </a:rPr>
+              <a:t>3</a:t>
+            </a:r>
+            <a:endParaRPr lang="en-US" sz="1100" dirty="0"/>
+          </a:p>
+        </p:txBody>
+      </p:sp>
+      <p:sp>
+        <p:nvSpPr>
+          <p:cNvPr id="34" name="Text 32"/>
+          <p:cNvSpPr txBox="1"/>
+          <p:nvPr/>
+        </p:nvSpPr>
+        <p:spPr>
+          <a:xfrm>
+            <a:off x="4882896" y="4059936"/>
+            <a:ext cx="2880360" cy="676656"/>
+          </a:xfrm>
+          <a:prstGeom prst="rect">
+            <a:avLst/>
+          </a:prstGeom>
+          <a:noFill/>
+          <a:ln/>
+        </p:spPr>
+        <p:txBody>
+          <a:bodyPr wrap="square" lIns="0" tIns="0" rIns="0" bIns="0" rtlCol="0" anchor="t"/>
+          <a:lstStyle/>
+          <a:p>
+            <a:pPr indent="0" marL="0">
+              <a:buNone/>
+            </a:pPr>
+            <a:r>
+              <a:rPr lang="en-US" sz="1200" dirty="0">
+                <a:solidFill>
+                  <a:srgbClr val="2C353C"/>
+                </a:solidFill>
+                <a:latin typeface="Arial" pitchFamily="34" charset="0"/>
+                <a:ea typeface="Arial" pitchFamily="34" charset="-122"/>
+                <a:cs typeface="Arial" pitchFamily="34" charset="-120"/>
+              </a:rPr>
+              <a:t>Resolver si Mamani y Contorno Bajo corresponden a la misma ubicación.</a:t>
+            </a:r>
+            <a:endParaRPr lang="en-US" sz="1200" dirty="0"/>
+          </a:p>
+        </p:txBody>
+      </p:sp>
+      <p:sp>
+        <p:nvSpPr>
+          <p:cNvPr id="35" name="Shape 33"/>
+          <p:cNvSpPr/>
+          <p:nvPr/>
+        </p:nvSpPr>
+        <p:spPr>
+          <a:xfrm>
+            <a:off x="4489704" y="4809744"/>
+            <a:ext cx="274320" cy="274320"/>
+          </a:xfrm>
+          <a:prstGeom prst="ellipse">
+            <a:avLst/>
+          </a:prstGeom>
+          <a:solidFill>
+            <a:srgbClr val="C79A45"/>
+          </a:solidFill>
+          <a:ln w="12700">
+            <a:solidFill>
+              <a:srgbClr val="C79A45"/>
+            </a:solidFill>
+            <a:prstDash val="solid"/>
+          </a:ln>
+        </p:spPr>
+      </p:sp>
+      <p:sp>
+        <p:nvSpPr>
+          <p:cNvPr id="36" name="Text 34"/>
+          <p:cNvSpPr txBox="1"/>
+          <p:nvPr/>
+        </p:nvSpPr>
+        <p:spPr>
+          <a:xfrm>
+            <a:off x="4489704" y="4809744"/>
+            <a:ext cx="274320" cy="274320"/>
+          </a:xfrm>
+          <a:prstGeom prst="rect">
+            <a:avLst/>
+          </a:prstGeom>
+          <a:noFill/>
+          <a:ln/>
+        </p:spPr>
+        <p:txBody>
+          <a:bodyPr wrap="square" lIns="0" tIns="0" rIns="0" bIns="0" rtlCol="0" anchor="ctr"/>
+          <a:lstStyle/>
+          <a:p>
+            <a:pPr algn="ctr" indent="0" marL="0">
+              <a:buNone/>
+            </a:pPr>
+            <a:r>
+              <a:rPr lang="en-US" sz="1100" b="1" dirty="0">
+                <a:solidFill>
+                  <a:srgbClr val="1B2126"/>
+                </a:solidFill>
+                <a:latin typeface="Arial" pitchFamily="34" charset="0"/>
+                <a:ea typeface="Arial" pitchFamily="34" charset="-122"/>
+                <a:cs typeface="Arial" pitchFamily="34" charset="-120"/>
+              </a:rPr>
+              <a:t>4</a:t>
+            </a:r>
+            <a:endParaRPr lang="en-US" sz="1100" dirty="0"/>
+          </a:p>
+        </p:txBody>
+      </p:sp>
+      <p:sp>
+        <p:nvSpPr>
+          <p:cNvPr id="37" name="Text 35"/>
+          <p:cNvSpPr txBox="1"/>
+          <p:nvPr/>
+        </p:nvSpPr>
+        <p:spPr>
+          <a:xfrm>
+            <a:off x="4882896" y="4773168"/>
+            <a:ext cx="2880360" cy="676656"/>
+          </a:xfrm>
+          <a:prstGeom prst="rect">
+            <a:avLst/>
+          </a:prstGeom>
+          <a:noFill/>
+          <a:ln/>
+        </p:spPr>
+        <p:txBody>
+          <a:bodyPr wrap="square" lIns="0" tIns="0" rIns="0" bIns="0" rtlCol="0" anchor="t"/>
+          <a:lstStyle/>
+          <a:p>
+            <a:pPr indent="0" marL="0">
+              <a:buNone/>
+            </a:pPr>
+            <a:r>
+              <a:rPr lang="en-US" sz="1200" dirty="0">
+                <a:solidFill>
+                  <a:srgbClr val="2C353C"/>
+                </a:solidFill>
+                <a:latin typeface="Arial" pitchFamily="34" charset="0"/>
+                <a:ea typeface="Arial" pitchFamily="34" charset="-122"/>
+                <a:cs typeface="Arial" pitchFamily="34" charset="-120"/>
+              </a:rPr>
+              <a:t>Revisar superposiciones y si las tablas repetidas describen una o varias parcelas.</a:t>
+            </a:r>
+            <a:endParaRPr lang="en-US" sz="1200" dirty="0"/>
+          </a:p>
+        </p:txBody>
+      </p:sp>
+      <p:sp>
+        <p:nvSpPr>
+          <p:cNvPr id="38" name="Shape 36"/>
+          <p:cNvSpPr/>
+          <p:nvPr/>
+        </p:nvSpPr>
+        <p:spPr>
+          <a:xfrm>
+            <a:off x="8119872" y="1901952"/>
+            <a:ext cx="3611880" cy="3657600"/>
+          </a:xfrm>
+          <a:prstGeom prst="rect">
+            <a:avLst/>
+          </a:prstGeom>
+          <a:solidFill>
+            <a:srgbClr val="FFFFFF"/>
+          </a:solidFill>
+          <a:ln w="9525">
+            <a:solidFill>
+              <a:srgbClr val="E6E8EB"/>
+            </a:solidFill>
+            <a:prstDash val="solid"/>
+          </a:ln>
+          <a:effectLst>
+            <a:outerShdw sx="100000" sy="100000" kx="0" ky="0" algn="bl" rotWithShape="0" blurRad="114300" dist="25400" dir="5400000">
+              <a:srgbClr val="000000">
+                <a:alpha val="14000"/>
+              </a:srgbClr>
+            </a:outerShdw>
+          </a:effectLst>
+        </p:spPr>
+      </p:sp>
+      <p:sp>
+        <p:nvSpPr>
+          <p:cNvPr id="39" name="Shape 37"/>
+          <p:cNvSpPr/>
+          <p:nvPr/>
+        </p:nvSpPr>
+        <p:spPr>
+          <a:xfrm>
+            <a:off x="8119872" y="1901952"/>
+            <a:ext cx="3611880" cy="594360"/>
+          </a:xfrm>
+          <a:prstGeom prst="rect">
+            <a:avLst/>
+          </a:prstGeom>
+          <a:solidFill>
+            <a:srgbClr val="5A6670"/>
+          </a:solidFill>
+          <a:ln w="12700">
+            <a:solidFill>
+              <a:srgbClr val="5A6670"/>
+            </a:solidFill>
+            <a:prstDash val="solid"/>
+          </a:ln>
+        </p:spPr>
+      </p:sp>
+      <p:sp>
+        <p:nvSpPr>
+          <p:cNvPr id="40" name="Text 38"/>
+          <p:cNvSpPr txBox="1"/>
+          <p:nvPr/>
+        </p:nvSpPr>
+        <p:spPr>
+          <a:xfrm>
+            <a:off x="8348472" y="1901952"/>
+            <a:ext cx="548640" cy="594360"/>
+          </a:xfrm>
+          <a:prstGeom prst="rect">
+            <a:avLst/>
+          </a:prstGeom>
+          <a:noFill/>
+          <a:ln/>
+        </p:spPr>
+        <p:txBody>
+          <a:bodyPr wrap="square" lIns="0" tIns="0" rIns="0" bIns="0" rtlCol="0" anchor="ctr"/>
+          <a:lstStyle/>
+          <a:p>
+            <a:pPr indent="0" marL="0">
+              <a:buNone/>
+            </a:pPr>
+            <a:r>
+              <a:rPr lang="en-US" sz="2000" b="1" dirty="0">
+                <a:solidFill>
+                  <a:srgbClr val="C79A45"/>
+                </a:solidFill>
+                <a:latin typeface="Arial" pitchFamily="34" charset="0"/>
+                <a:ea typeface="Arial" pitchFamily="34" charset="-122"/>
+                <a:cs typeface="Arial" pitchFamily="34" charset="-120"/>
+              </a:rPr>
+              <a:t>03</a:t>
+            </a:r>
+            <a:endParaRPr lang="en-US" sz="2000" dirty="0"/>
+          </a:p>
+        </p:txBody>
+      </p:sp>
+      <p:sp>
+        <p:nvSpPr>
+          <p:cNvPr id="41" name="Text 39"/>
+          <p:cNvSpPr txBox="1"/>
+          <p:nvPr/>
+        </p:nvSpPr>
+        <p:spPr>
+          <a:xfrm>
+            <a:off x="8897112" y="1901952"/>
+            <a:ext cx="2743200" cy="594360"/>
+          </a:xfrm>
+          <a:prstGeom prst="rect">
+            <a:avLst/>
+          </a:prstGeom>
+          <a:noFill/>
+          <a:ln/>
+        </p:spPr>
+        <p:txBody>
+          <a:bodyPr wrap="square" lIns="0" tIns="0" rIns="0" bIns="0" rtlCol="0" anchor="ctr"/>
+          <a:lstStyle/>
+          <a:p>
+            <a:pPr indent="0" marL="0">
+              <a:buNone/>
+            </a:pPr>
+            <a:r>
+              <a:rPr lang="en-US" sz="1600" b="1" dirty="0">
+                <a:solidFill>
+                  <a:srgbClr val="FFFFFF"/>
+                </a:solidFill>
+                <a:latin typeface="Arial" pitchFamily="34" charset="0"/>
+                <a:ea typeface="Arial" pitchFamily="34" charset="-122"/>
+                <a:cs typeface="Arial" pitchFamily="34" charset="-120"/>
+              </a:rPr>
+              <a:t>Contable / gestión</a:t>
+            </a:r>
+            <a:endParaRPr lang="en-US" sz="1600" dirty="0"/>
+          </a:p>
+        </p:txBody>
+      </p:sp>
+      <p:sp>
+        <p:nvSpPr>
+          <p:cNvPr id="42" name="Shape 40"/>
+          <p:cNvSpPr/>
+          <p:nvPr/>
+        </p:nvSpPr>
+        <p:spPr>
+          <a:xfrm>
+            <a:off x="8321040" y="2670048"/>
+            <a:ext cx="274320" cy="274320"/>
+          </a:xfrm>
+          <a:prstGeom prst="ellipse">
+            <a:avLst/>
+          </a:prstGeom>
+          <a:solidFill>
+            <a:srgbClr val="C79A45"/>
+          </a:solidFill>
+          <a:ln w="12700">
+            <a:solidFill>
+              <a:srgbClr val="C79A45"/>
+            </a:solidFill>
+            <a:prstDash val="solid"/>
+          </a:ln>
+        </p:spPr>
+      </p:sp>
+      <p:sp>
+        <p:nvSpPr>
+          <p:cNvPr id="43" name="Text 41"/>
+          <p:cNvSpPr txBox="1"/>
+          <p:nvPr/>
+        </p:nvSpPr>
+        <p:spPr>
+          <a:xfrm>
+            <a:off x="8321040" y="2670048"/>
+            <a:ext cx="274320" cy="274320"/>
+          </a:xfrm>
+          <a:prstGeom prst="rect">
+            <a:avLst/>
+          </a:prstGeom>
+          <a:noFill/>
+          <a:ln/>
+        </p:spPr>
+        <p:txBody>
+          <a:bodyPr wrap="square" lIns="0" tIns="0" rIns="0" bIns="0" rtlCol="0" anchor="ctr"/>
+          <a:lstStyle/>
+          <a:p>
+            <a:pPr algn="ctr" indent="0" marL="0">
+              <a:buNone/>
+            </a:pPr>
+            <a:r>
+              <a:rPr lang="en-US" sz="1100" b="1" dirty="0">
+                <a:solidFill>
+                  <a:srgbClr val="1B2126"/>
+                </a:solidFill>
+                <a:latin typeface="Arial" pitchFamily="34" charset="0"/>
+                <a:ea typeface="Arial" pitchFamily="34" charset="-122"/>
+                <a:cs typeface="Arial" pitchFamily="34" charset="-120"/>
+              </a:rPr>
+              <a:t>1</a:t>
+            </a:r>
+            <a:endParaRPr lang="en-US" sz="1100" dirty="0"/>
+          </a:p>
+        </p:txBody>
+      </p:sp>
+      <p:sp>
+        <p:nvSpPr>
+          <p:cNvPr id="44" name="Text 42"/>
+          <p:cNvSpPr txBox="1"/>
+          <p:nvPr/>
+        </p:nvSpPr>
+        <p:spPr>
+          <a:xfrm>
+            <a:off x="8714232" y="2633472"/>
+            <a:ext cx="2880360" cy="676656"/>
+          </a:xfrm>
+          <a:prstGeom prst="rect">
+            <a:avLst/>
+          </a:prstGeom>
+          <a:noFill/>
+          <a:ln/>
+        </p:spPr>
+        <p:txBody>
+          <a:bodyPr wrap="square" lIns="0" tIns="0" rIns="0" bIns="0" rtlCol="0" anchor="t"/>
+          <a:lstStyle/>
+          <a:p>
+            <a:pPr indent="0" marL="0">
+              <a:buNone/>
+            </a:pPr>
+            <a:r>
+              <a:rPr lang="en-US" sz="1200" dirty="0">
+                <a:solidFill>
+                  <a:srgbClr val="2C353C"/>
+                </a:solidFill>
+                <a:latin typeface="Arial" pitchFamily="34" charset="0"/>
+                <a:ea typeface="Arial" pitchFamily="34" charset="-122"/>
+                <a:cs typeface="Arial" pitchFamily="34" charset="-120"/>
+              </a:rPr>
+              <a:t>Identificar moneda, fecha, comprobantes y origen de saldos 12102002030 y 12102002038.</a:t>
+            </a:r>
+            <a:endParaRPr lang="en-US" sz="1200" dirty="0"/>
+          </a:p>
+        </p:txBody>
+      </p:sp>
+      <p:sp>
+        <p:nvSpPr>
+          <p:cNvPr id="45" name="Shape 43"/>
+          <p:cNvSpPr/>
+          <p:nvPr/>
+        </p:nvSpPr>
+        <p:spPr>
+          <a:xfrm>
+            <a:off x="8321040" y="3383280"/>
+            <a:ext cx="274320" cy="274320"/>
+          </a:xfrm>
+          <a:prstGeom prst="ellipse">
+            <a:avLst/>
+          </a:prstGeom>
+          <a:solidFill>
+            <a:srgbClr val="C79A45"/>
+          </a:solidFill>
+          <a:ln w="12700">
+            <a:solidFill>
+              <a:srgbClr val="C79A45"/>
+            </a:solidFill>
+            <a:prstDash val="solid"/>
+          </a:ln>
+        </p:spPr>
+      </p:sp>
+      <p:sp>
+        <p:nvSpPr>
+          <p:cNvPr id="46" name="Text 44"/>
+          <p:cNvSpPr txBox="1"/>
+          <p:nvPr/>
+        </p:nvSpPr>
+        <p:spPr>
+          <a:xfrm>
+            <a:off x="8321040" y="3383280"/>
+            <a:ext cx="274320" cy="274320"/>
+          </a:xfrm>
+          <a:prstGeom prst="rect">
+            <a:avLst/>
+          </a:prstGeom>
+          <a:noFill/>
+          <a:ln/>
+        </p:spPr>
+        <p:txBody>
+          <a:bodyPr wrap="square" lIns="0" tIns="0" rIns="0" bIns="0" rtlCol="0" anchor="ctr"/>
+          <a:lstStyle/>
+          <a:p>
+            <a:pPr algn="ctr" indent="0" marL="0">
+              <a:buNone/>
+            </a:pPr>
+            <a:r>
+              <a:rPr lang="en-US" sz="1100" b="1" dirty="0">
+                <a:solidFill>
+                  <a:srgbClr val="1B2126"/>
+                </a:solidFill>
+                <a:latin typeface="Arial" pitchFamily="34" charset="0"/>
+                <a:ea typeface="Arial" pitchFamily="34" charset="-122"/>
+                <a:cs typeface="Arial" pitchFamily="34" charset="-120"/>
+              </a:rPr>
+              <a:t>2</a:t>
+            </a:r>
+            <a:endParaRPr lang="en-US" sz="1100" dirty="0"/>
+          </a:p>
+        </p:txBody>
+      </p:sp>
+      <p:sp>
+        <p:nvSpPr>
+          <p:cNvPr id="47" name="Text 45"/>
+          <p:cNvSpPr txBox="1"/>
+          <p:nvPr/>
+        </p:nvSpPr>
+        <p:spPr>
+          <a:xfrm>
+            <a:off x="8714232" y="3346704"/>
+            <a:ext cx="2880360" cy="676656"/>
+          </a:xfrm>
+          <a:prstGeom prst="rect">
+            <a:avLst/>
+          </a:prstGeom>
+          <a:noFill/>
+          <a:ln/>
+        </p:spPr>
+        <p:txBody>
+          <a:bodyPr wrap="square" lIns="0" tIns="0" rIns="0" bIns="0" rtlCol="0" anchor="t"/>
+          <a:lstStyle/>
+          <a:p>
+            <a:pPr indent="0" marL="0">
+              <a:buNone/>
+            </a:pPr>
+            <a:r>
+              <a:rPr lang="en-US" sz="1200" dirty="0">
+                <a:solidFill>
+                  <a:srgbClr val="2C353C"/>
+                </a:solidFill>
+                <a:latin typeface="Arial" pitchFamily="34" charset="0"/>
+                <a:ea typeface="Arial" pitchFamily="34" charset="-122"/>
+                <a:cs typeface="Arial" pitchFamily="34" charset="-120"/>
+              </a:rPr>
+              <a:t>Conciliar saldos contables con contratos, pagos y asientos patrimoniales.</a:t>
+            </a:r>
+            <a:endParaRPr lang="en-US" sz="1200" dirty="0"/>
+          </a:p>
+        </p:txBody>
+      </p:sp>
+      <p:sp>
+        <p:nvSpPr>
+          <p:cNvPr id="48" name="Shape 46"/>
+          <p:cNvSpPr/>
+          <p:nvPr/>
+        </p:nvSpPr>
+        <p:spPr>
+          <a:xfrm>
+            <a:off x="8321040" y="4096512"/>
+            <a:ext cx="274320" cy="274320"/>
+          </a:xfrm>
+          <a:prstGeom prst="ellipse">
+            <a:avLst/>
+          </a:prstGeom>
+          <a:solidFill>
+            <a:srgbClr val="C79A45"/>
+          </a:solidFill>
+          <a:ln w="12700">
+            <a:solidFill>
+              <a:srgbClr val="C79A45"/>
+            </a:solidFill>
+            <a:prstDash val="solid"/>
+          </a:ln>
+        </p:spPr>
+      </p:sp>
+      <p:sp>
+        <p:nvSpPr>
+          <p:cNvPr id="49" name="Text 47"/>
+          <p:cNvSpPr txBox="1"/>
+          <p:nvPr/>
+        </p:nvSpPr>
+        <p:spPr>
+          <a:xfrm>
+            <a:off x="8321040" y="4096512"/>
+            <a:ext cx="274320" cy="274320"/>
+          </a:xfrm>
+          <a:prstGeom prst="rect">
+            <a:avLst/>
+          </a:prstGeom>
+          <a:noFill/>
+          <a:ln/>
+        </p:spPr>
+        <p:txBody>
+          <a:bodyPr wrap="square" lIns="0" tIns="0" rIns="0" bIns="0" rtlCol="0" anchor="ctr"/>
+          <a:lstStyle/>
+          <a:p>
+            <a:pPr algn="ctr" indent="0" marL="0">
+              <a:buNone/>
+            </a:pPr>
+            <a:r>
+              <a:rPr lang="en-US" sz="1100" b="1" dirty="0">
+                <a:solidFill>
+                  <a:srgbClr val="1B2126"/>
+                </a:solidFill>
+                <a:latin typeface="Arial" pitchFamily="34" charset="0"/>
+                <a:ea typeface="Arial" pitchFamily="34" charset="-122"/>
+                <a:cs typeface="Arial" pitchFamily="34" charset="-120"/>
+              </a:rPr>
+              <a:t>3</a:t>
+            </a:r>
+            <a:endParaRPr lang="en-US" sz="1100" dirty="0"/>
+          </a:p>
+        </p:txBody>
+      </p:sp>
+      <p:sp>
+        <p:nvSpPr>
+          <p:cNvPr id="50" name="Text 48"/>
+          <p:cNvSpPr txBox="1"/>
+          <p:nvPr/>
+        </p:nvSpPr>
+        <p:spPr>
+          <a:xfrm>
+            <a:off x="8714232" y="4059936"/>
+            <a:ext cx="2880360" cy="676656"/>
+          </a:xfrm>
+          <a:prstGeom prst="rect">
+            <a:avLst/>
+          </a:prstGeom>
+          <a:noFill/>
+          <a:ln/>
+        </p:spPr>
+        <p:txBody>
+          <a:bodyPr wrap="square" lIns="0" tIns="0" rIns="0" bIns="0" rtlCol="0" anchor="t"/>
+          <a:lstStyle/>
+          <a:p>
+            <a:pPr indent="0" marL="0">
+              <a:buNone/>
+            </a:pPr>
+            <a:r>
+              <a:rPr lang="en-US" sz="1200" dirty="0">
+                <a:solidFill>
+                  <a:srgbClr val="2C353C"/>
+                </a:solidFill>
+                <a:latin typeface="Arial" pitchFamily="34" charset="0"/>
+                <a:ea typeface="Arial" pitchFamily="34" charset="-122"/>
+                <a:cs typeface="Arial" pitchFamily="34" charset="-120"/>
+              </a:rPr>
+              <a:t>Asignar responsable, estado, acción y fecha en Seguimiento_INCERPAZ.</a:t>
+            </a:r>
+            <a:endParaRPr lang="en-US" sz="1200" dirty="0"/>
+          </a:p>
+        </p:txBody>
+      </p:sp>
+      <p:sp>
+        <p:nvSpPr>
+          <p:cNvPr id="51" name="Shape 49"/>
+          <p:cNvSpPr/>
+          <p:nvPr/>
+        </p:nvSpPr>
+        <p:spPr>
+          <a:xfrm>
+            <a:off x="8321040" y="4809744"/>
+            <a:ext cx="274320" cy="274320"/>
+          </a:xfrm>
+          <a:prstGeom prst="ellipse">
+            <a:avLst/>
+          </a:prstGeom>
+          <a:solidFill>
+            <a:srgbClr val="C79A45"/>
+          </a:solidFill>
+          <a:ln w="12700">
+            <a:solidFill>
+              <a:srgbClr val="C79A45"/>
+            </a:solidFill>
+            <a:prstDash val="solid"/>
+          </a:ln>
+        </p:spPr>
+      </p:sp>
+      <p:sp>
+        <p:nvSpPr>
+          <p:cNvPr id="52" name="Text 50"/>
+          <p:cNvSpPr txBox="1"/>
+          <p:nvPr/>
+        </p:nvSpPr>
+        <p:spPr>
+          <a:xfrm>
+            <a:off x="8321040" y="4809744"/>
+            <a:ext cx="274320" cy="274320"/>
+          </a:xfrm>
+          <a:prstGeom prst="rect">
+            <a:avLst/>
+          </a:prstGeom>
+          <a:noFill/>
+          <a:ln/>
+        </p:spPr>
+        <p:txBody>
+          <a:bodyPr wrap="square" lIns="0" tIns="0" rIns="0" bIns="0" rtlCol="0" anchor="ctr"/>
+          <a:lstStyle/>
+          <a:p>
+            <a:pPr algn="ctr" indent="0" marL="0">
+              <a:buNone/>
+            </a:pPr>
+            <a:r>
+              <a:rPr lang="en-US" sz="1100" b="1" dirty="0">
+                <a:solidFill>
+                  <a:srgbClr val="1B2126"/>
+                </a:solidFill>
+                <a:latin typeface="Arial" pitchFamily="34" charset="0"/>
+                <a:ea typeface="Arial" pitchFamily="34" charset="-122"/>
+                <a:cs typeface="Arial" pitchFamily="34" charset="-120"/>
+              </a:rPr>
+              <a:t>4</a:t>
+            </a:r>
+            <a:endParaRPr lang="en-US" sz="1100" dirty="0"/>
+          </a:p>
+        </p:txBody>
+      </p:sp>
+      <p:sp>
+        <p:nvSpPr>
+          <p:cNvPr id="53" name="Text 51"/>
+          <p:cNvSpPr txBox="1"/>
+          <p:nvPr/>
+        </p:nvSpPr>
+        <p:spPr>
+          <a:xfrm>
+            <a:off x="8714232" y="4773168"/>
+            <a:ext cx="2880360" cy="676656"/>
+          </a:xfrm>
+          <a:prstGeom prst="rect">
+            <a:avLst/>
+          </a:prstGeom>
+          <a:noFill/>
+          <a:ln/>
+        </p:spPr>
+        <p:txBody>
+          <a:bodyPr wrap="square" lIns="0" tIns="0" rIns="0" bIns="0" rtlCol="0" anchor="t"/>
+          <a:lstStyle/>
+          <a:p>
+            <a:pPr indent="0" marL="0">
+              <a:buNone/>
+            </a:pPr>
+            <a:r>
+              <a:rPr lang="en-US" sz="1200" dirty="0">
+                <a:solidFill>
+                  <a:srgbClr val="2C353C"/>
+                </a:solidFill>
+                <a:latin typeface="Arial" pitchFamily="34" charset="0"/>
+                <a:ea typeface="Arial" pitchFamily="34" charset="-122"/>
+                <a:cs typeface="Arial" pitchFamily="34" charset="-120"/>
+              </a:rPr>
+              <a:t>Cerrar cada caso con expediente digital enlazado a folio, plano y polígono.</a:t>
+            </a:r>
+            <a:endParaRPr lang="en-US" sz="1200" dirty="0"/>
+          </a:p>
+        </p:txBody>
+      </p:sp>
+      <p:sp>
+        <p:nvSpPr>
+          <p:cNvPr id="54" name="Shape 52"/>
+          <p:cNvSpPr/>
+          <p:nvPr/>
+        </p:nvSpPr>
+        <p:spPr>
+          <a:xfrm>
+            <a:off x="457200" y="5715000"/>
+            <a:ext cx="11274552" cy="640080"/>
+          </a:xfrm>
+          <a:prstGeom prst="rect">
+            <a:avLst/>
+          </a:prstGeom>
+          <a:solidFill>
+            <a:srgbClr val="1B2126"/>
+          </a:solidFill>
+          <a:ln w="12700">
+            <a:solidFill>
+              <a:srgbClr val="1B2126"/>
+            </a:solidFill>
+            <a:prstDash val="solid"/>
+          </a:ln>
+        </p:spPr>
+      </p:sp>
+      <p:sp>
+        <p:nvSpPr>
+          <p:cNvPr id="55" name="Shape 53"/>
+          <p:cNvSpPr/>
+          <p:nvPr/>
+        </p:nvSpPr>
+        <p:spPr>
+          <a:xfrm>
+            <a:off x="457200" y="5715000"/>
+            <a:ext cx="73152" cy="640080"/>
+          </a:xfrm>
+          <a:prstGeom prst="rect">
+            <a:avLst/>
+          </a:prstGeom>
+          <a:solidFill>
+            <a:srgbClr val="C79A45"/>
+          </a:solidFill>
+          <a:ln w="12700">
+            <a:solidFill>
+              <a:srgbClr val="C79A45"/>
+            </a:solidFill>
+            <a:prstDash val="solid"/>
+          </a:ln>
+        </p:spPr>
+      </p:sp>
+      <p:sp>
+        <p:nvSpPr>
+          <p:cNvPr id="56" name="Text 54"/>
+          <p:cNvSpPr txBox="1"/>
+          <p:nvPr/>
+        </p:nvSpPr>
+        <p:spPr>
+          <a:xfrm>
+            <a:off x="731520" y="5715000"/>
+            <a:ext cx="2377440" cy="640080"/>
+          </a:xfrm>
+          <a:prstGeom prst="rect">
+            <a:avLst/>
+          </a:prstGeom>
+          <a:noFill/>
+          <a:ln/>
+        </p:spPr>
+        <p:txBody>
+          <a:bodyPr wrap="square" lIns="0" tIns="0" rIns="0" bIns="0" rtlCol="0" anchor="ctr"/>
+          <a:lstStyle/>
+          <a:p>
+            <a:pPr indent="0" marL="0">
+              <a:buNone/>
+            </a:pPr>
+            <a:r>
+              <a:rPr lang="en-US" sz="1200" b="1" spc="100" kern="0" dirty="0">
+                <a:solidFill>
+                  <a:srgbClr val="C79A45"/>
+                </a:solidFill>
+                <a:latin typeface="Arial" pitchFamily="34" charset="0"/>
+                <a:ea typeface="Arial" pitchFamily="34" charset="-122"/>
+                <a:cs typeface="Arial" pitchFamily="34" charset="-120"/>
+              </a:rPr>
+              <a:t>CRITERIO DE CIERRE</a:t>
+            </a:r>
+            <a:endParaRPr lang="en-US" sz="1200" dirty="0"/>
+          </a:p>
+        </p:txBody>
+      </p:sp>
+      <p:sp>
+        <p:nvSpPr>
+          <p:cNvPr id="57" name="Text 55"/>
+          <p:cNvSpPr txBox="1"/>
+          <p:nvPr/>
+        </p:nvSpPr>
+        <p:spPr>
+          <a:xfrm>
+            <a:off x="3108960" y="5715000"/>
+            <a:ext cx="8503920" cy="640080"/>
+          </a:xfrm>
+          <a:prstGeom prst="rect">
+            <a:avLst/>
+          </a:prstGeom>
+          <a:noFill/>
+          <a:ln/>
+        </p:spPr>
+        <p:txBody>
+          <a:bodyPr wrap="square" lIns="0" tIns="0" rIns="0" bIns="0" rtlCol="0" anchor="ctr"/>
+          <a:lstStyle/>
+          <a:p>
+            <a:pPr indent="0" marL="0">
+              <a:buNone/>
+            </a:pPr>
+            <a:r>
+              <a:rPr lang="en-US" sz="1300" b="1" dirty="0">
+                <a:solidFill>
+                  <a:srgbClr val="FFFFFF"/>
+                </a:solidFill>
+                <a:latin typeface="Arial" pitchFamily="34" charset="0"/>
+                <a:ea typeface="Arial" pitchFamily="34" charset="-122"/>
+                <a:cs typeface="Arial" pitchFamily="34" charset="-120"/>
+              </a:rPr>
+              <a:t>No consolidar titularidad ni áreas hasta enlazar evidencia registral, municipal, geoespacial y contable para cada caso.</a:t>
+            </a:r>
+            <a:endParaRPr lang="en-US" sz="1300" dirty="0"/>
+          </a:p>
+        </p:txBody>
+      </p:sp>
+      <p:sp>
+        <p:nvSpPr>
+          <p:cNvPr id="58" name="Text 56"/>
+          <p:cNvSpPr txBox="1"/>
+          <p:nvPr/>
+        </p:nvSpPr>
+        <p:spPr>
+          <a:xfrm>
+            <a:off x="457200" y="6446520"/>
+            <a:ext cx="10058400" cy="274320"/>
+          </a:xfrm>
+          <a:prstGeom prst="rect">
+            <a:avLst/>
+          </a:prstGeom>
+          <a:noFill/>
+          <a:ln/>
+        </p:spPr>
+        <p:txBody>
+          <a:bodyPr wrap="square" lIns="0" tIns="0" rIns="0" bIns="0" rtlCol="0" anchor="ctr"/>
+          <a:lstStyle/>
+          <a:p>
+            <a:pPr indent="0" marL="0">
+              <a:buNone/>
+            </a:pPr>
+            <a:r>
+              <a:rPr lang="en-US" sz="1000" dirty="0">
+                <a:solidFill>
+                  <a:srgbClr val="8A939B"/>
+                </a:solidFill>
+                <a:latin typeface="Arial" pitchFamily="34" charset="0"/>
+                <a:ea typeface="Arial" pitchFamily="34" charset="-122"/>
+                <a:cs typeface="Arial" pitchFamily="34" charset="-120"/>
+              </a:rPr>
+              <a:t>Fuente de requerimientos: brechas de las fichas 03–08 y matriz de seguimiento disponible.</a:t>
+            </a:r>
+            <a:endParaRPr lang="en-US" sz="1000" dirty="0"/>
+          </a:p>
+        </p:txBody>
+      </p:sp>
+      <p:sp>
+        <p:nvSpPr>
+          <p:cNvPr id="25" name="Slide Number Placeholder 0"/>
+          <p:cNvSpPr>
+            <a:spLocks noGrp="1"/>
+          </p:cNvSpPr>
+          <p:nvPr>
+            <p:ph type="sldNum" sz="quarter" idx="4294967295"/>
+          </p:nvPr>
+        </p:nvSpPr>
+        <p:spPr>
+          <a:xfrm>
+            <a:off x="11247120" y="6473952"/>
+            <a:ext cx="502920" cy="228600"/>
+          </a:xfrm>
+          <a:prstGeom prst="rect">
+            <a:avLst/>
+          </a:prstGeom>
+          <a:extLst>
+            <a:ext uri="{C572A759-6A51-4108-AA02-DFA0A04FC94B}">
+              <ma14:wrappingTextBoxFlag xmlns:ma14="http://schemas.microsoft.com/office/mac/drawingml/2011/main" val="0"/>
+            </a:ext>
+          </a:extLst>
+        </p:spPr>
+        <p:txBody>
+          <a:bodyPr lIns="0" tIns="0" rIns="0" bIns="0"/>
+          <a:lstStyle>
+            <a:lvl1pPr>
+              <a:defRPr sz="1000">
+                <a:solidFill>
+                  <a:srgbClr val="8A939B"/>
+                </a:solidFill>
+                <a:latin typeface="Arial"/>
+                <a:ea typeface="Arial"/>
+                <a:cs typeface="Arial"/>
+              </a:defRPr>
+            </a:lvl1pPr>
+          </a:lstStyle>
+          <a:p>
+            <a:pPr algn="r"/>
+            <a:fld id="{F7021451-1387-4CA6-816F-3879F97B5CBC}" type="slidenum">
+              <a:rPr b="0" lang="en-US"/>
+              <a:t>13</a:t>
+            </a:fld>
+            <a:endParaRPr lang="en-US"/>
+          </a:p>
+        </p:txBody>
+      </p:sp>
+    </p:spTree>
+  </p:cSld>
+  <p:clrMapOvr>
+    <a:masterClrMapping/>
+  </p:clrMapOvr>
+</p:sld>
+</file>
+
+<file path=ppt/slides/slide14.xml><?xml version="1.0" encoding="utf-8"?>
+<p:sld xmlns:a="http://schemas.openxmlformats.org/drawingml/2006/main" xmlns:r="http://schemas.openxmlformats.org/officeDocument/2006/relationships" xmlns:p="http://schemas.openxmlformats.org/presentationml/2006/main">
+  <p:cSld name="Slide 14">
+    <p:spTree>
+      <p:nvGrpSpPr>
+        <p:cNvPr id="1" name=""/>
+        <p:cNvGrpSpPr/>
+        <p:nvPr/>
+      </p:nvGrpSpPr>
+      <p:grpSpPr>
+        <a:xfrm>
+          <a:off x="0" y="0"/>
+          <a:ext cx="0" cy="0"/>
+          <a:chOff x="0" y="0"/>
+          <a:chExt cx="0" cy="0"/>
+        </a:xfrm>
+      </p:grpSpPr>
       <p:pic>
         <p:nvPicPr>
           <p:cNvPr id="2" name="Image 0" descr="Fondo aéreo oscurecido">    </p:cNvPr>
@@ -6876,7 +9224,7 @@
                 <a:ea typeface="Arial" pitchFamily="34" charset="-122"/>
                 <a:cs typeface="Arial" pitchFamily="34" charset="-120"/>
               </a:rPr>
-              <a:t>Pestaña Cruces; campos de matrícula, superficie, titularidad, cuenta y observaciones.</a:t>
+              <a:t>Informe Ariel León 2012, mayores de marzo de 2026, lista DDRR y siete planos COM.</a:t>
             </a:r>
             <a:endParaRPr lang="en-US" sz="1100" dirty="0"/>
           </a:p>
@@ -7185,7 +9533,7 @@
                 <a:ea typeface="Arial" pitchFamily="34" charset="-122"/>
                 <a:cs typeface="Arial" pitchFamily="34" charset="-120"/>
               </a:rPr>
-              <a:t>Informe documental Roberto Chávez</a:t>
+              <a:t>Informe Roberto Chávez + Folio Real</a:t>
             </a:r>
             <a:endParaRPr lang="en-US" sz="1200" dirty="0"/>
           </a:p>
@@ -7224,7 +9572,7 @@
                 <a:ea typeface="Arial" pitchFamily="34" charset="-122"/>
                 <a:cs typeface="Arial" pitchFamily="34" charset="-120"/>
               </a:rPr>
-              <a:t>Revisión de Folio Real; 14/10/2026.</a:t>
+              <a:t>14/10/2026, pp. 1–2; doc. 1.293.550, trámite 1.997.596.</a:t>
             </a:r>
             <a:endParaRPr lang="en-US" sz="1100" dirty="0"/>
           </a:p>
@@ -7359,7 +9707,7 @@
                 <a:ea typeface="Arial" pitchFamily="34" charset="-122"/>
                 <a:cs typeface="Arial" pitchFamily="34" charset="-120"/>
               </a:rPr>
-              <a:t>INCERPAZ.docx</a:t>
+              <a:t>INCERPAZ 3.docx</a:t>
             </a:r>
             <a:endParaRPr lang="en-US" sz="1200" dirty="0"/>
           </a:p>
@@ -7398,7 +9746,7 @@
                 <a:ea typeface="Arial" pitchFamily="34" charset="-122"/>
                 <a:cs typeface="Arial" pitchFamily="34" charset="-120"/>
               </a:rPr>
-              <a:t>Listado documental de folios y superficies.</a:t>
+              <a:t>Lista preliminar de DDRR: folios y superficies.</a:t>
             </a:r>
             <a:endParaRPr lang="en-US" sz="1100" dirty="0"/>
           </a:p>
@@ -7833,7 +10181,7 @@
             <a:pPr algn="r"/>
             <a:fld id="{F7021451-1387-4CA6-816F-3879F97B5CBC}" type="slidenum">
               <a:rPr b="0" lang="en-US"/>
-              <a:t>12</a:t>
+              <a:t>14</a:t>
             </a:fld>
             <a:endParaRPr lang="en-US"/>
           </a:p>
@@ -8189,7 +10537,7 @@
         <p:spPr>
           <a:xfrm>
             <a:off x="6400800" y="1901952"/>
-            <a:ext cx="3337560" cy="658368"/>
+            <a:ext cx="3017520" cy="658368"/>
           </a:xfrm>
           <a:prstGeom prst="rect">
             <a:avLst/>
@@ -8227,8 +10575,8 @@
         </p:nvSpPr>
         <p:spPr>
           <a:xfrm>
-            <a:off x="9921240" y="2084832"/>
-            <a:ext cx="1645920" cy="292608"/>
+            <a:off x="9555480" y="2084832"/>
+            <a:ext cx="2011680" cy="292608"/>
           </a:xfrm>
           <a:prstGeom prst="rect">
             <a:avLst/>
@@ -8252,8 +10600,8 @@
         </p:nvSpPr>
         <p:spPr>
           <a:xfrm>
-            <a:off x="9921240" y="2084832"/>
-            <a:ext cx="1645920" cy="292608"/>
+            <a:off x="9555480" y="2084832"/>
+            <a:ext cx="2011680" cy="292608"/>
           </a:xfrm>
           <a:prstGeom prst="rect">
             <a:avLst/>
@@ -8277,7 +10625,7 @@
                 <a:ea typeface="Arial" pitchFamily="34" charset="-122"/>
                 <a:cs typeface="Arial" pitchFamily="34" charset="-120"/>
               </a:rPr>
-              <a:t>VERIFICACIÓN PARCIAL</a:t>
+              <a:t>HALLAZGO REGISTRAL</a:t>
             </a:r>
             <a:endParaRPr lang="en-US" sz="900" dirty="0"/>
           </a:p>
@@ -8466,7 +10814,7 @@
         <p:spPr>
           <a:xfrm>
             <a:off x="6400800" y="2660904"/>
-            <a:ext cx="3337560" cy="658368"/>
+            <a:ext cx="3017520" cy="658368"/>
           </a:xfrm>
           <a:prstGeom prst="rect">
             <a:avLst/>
@@ -8504,8 +10852,8 @@
         </p:nvSpPr>
         <p:spPr>
           <a:xfrm>
-            <a:off x="9921240" y="2843784"/>
-            <a:ext cx="1645920" cy="292608"/>
+            <a:off x="9555480" y="2843784"/>
+            <a:ext cx="2011680" cy="292608"/>
           </a:xfrm>
           <a:prstGeom prst="rect">
             <a:avLst/>
@@ -8529,8 +10877,8 @@
         </p:nvSpPr>
         <p:spPr>
           <a:xfrm>
-            <a:off x="9921240" y="2843784"/>
-            <a:ext cx="1645920" cy="292608"/>
+            <a:off x="9555480" y="2843784"/>
+            <a:ext cx="2011680" cy="292608"/>
           </a:xfrm>
           <a:prstGeom prst="rect">
             <a:avLst/>
@@ -8554,7 +10902,7 @@
                 <a:ea typeface="Arial" pitchFamily="34" charset="-122"/>
                 <a:cs typeface="Arial" pitchFamily="34" charset="-120"/>
               </a:rPr>
-              <a:t>COTEJO REGISTRAL</a:t>
+              <a:t>CRUCE DOC. PENDIENTE</a:t>
             </a:r>
             <a:endParaRPr lang="en-US" sz="900" dirty="0"/>
           </a:p>
@@ -8743,7 +11091,7 @@
         <p:spPr>
           <a:xfrm>
             <a:off x="6400800" y="3419856"/>
-            <a:ext cx="3337560" cy="658368"/>
+            <a:ext cx="3017520" cy="658368"/>
           </a:xfrm>
           <a:prstGeom prst="rect">
             <a:avLst/>
@@ -8781,8 +11129,8 @@
         </p:nvSpPr>
         <p:spPr>
           <a:xfrm>
-            <a:off x="9921240" y="3602736"/>
-            <a:ext cx="1645920" cy="292608"/>
+            <a:off x="9555480" y="3602736"/>
+            <a:ext cx="2011680" cy="292608"/>
           </a:xfrm>
           <a:prstGeom prst="rect">
             <a:avLst/>
@@ -8806,8 +11154,8 @@
         </p:nvSpPr>
         <p:spPr>
           <a:xfrm>
-            <a:off x="9921240" y="3602736"/>
-            <a:ext cx="1645920" cy="292608"/>
+            <a:off x="9555480" y="3602736"/>
+            <a:ext cx="2011680" cy="292608"/>
           </a:xfrm>
           <a:prstGeom prst="rect">
             <a:avLst/>
@@ -8831,7 +11179,7 @@
                 <a:ea typeface="Arial" pitchFamily="34" charset="-122"/>
                 <a:cs typeface="Arial" pitchFamily="34" charset="-120"/>
               </a:rPr>
-              <a:t>COTEJO REGISTRAL</a:t>
+              <a:t>CRUCE DOC. PENDIENTE</a:t>
             </a:r>
             <a:endParaRPr lang="en-US" sz="900" dirty="0"/>
           </a:p>
@@ -9020,7 +11368,7 @@
         <p:spPr>
           <a:xfrm>
             <a:off x="6400800" y="4178808"/>
-            <a:ext cx="3337560" cy="658368"/>
+            <a:ext cx="3017520" cy="658368"/>
           </a:xfrm>
           <a:prstGeom prst="rect">
             <a:avLst/>
@@ -9058,8 +11406,8 @@
         </p:nvSpPr>
         <p:spPr>
           <a:xfrm>
-            <a:off x="9921240" y="4361688"/>
-            <a:ext cx="1645920" cy="292608"/>
+            <a:off x="9555480" y="4361688"/>
+            <a:ext cx="2011680" cy="292608"/>
           </a:xfrm>
           <a:prstGeom prst="rect">
             <a:avLst/>
@@ -9083,8 +11431,8 @@
         </p:nvSpPr>
         <p:spPr>
           <a:xfrm>
-            <a:off x="9921240" y="4361688"/>
-            <a:ext cx="1645920" cy="292608"/>
+            <a:off x="9555480" y="4361688"/>
+            <a:ext cx="2011680" cy="292608"/>
           </a:xfrm>
           <a:prstGeom prst="rect">
             <a:avLst/>
@@ -9108,7 +11456,7 @@
                 <a:ea typeface="Arial" pitchFamily="34" charset="-122"/>
                 <a:cs typeface="Arial" pitchFamily="34" charset="-120"/>
               </a:rPr>
-              <a:t>DIFERENCIA CRÍTICA</a:t>
+              <a:t>DIFERENCIA POR CONCILIAR</a:t>
             </a:r>
             <a:endParaRPr lang="en-US" sz="900" dirty="0"/>
           </a:p>
@@ -9297,7 +11645,7 @@
         <p:spPr>
           <a:xfrm>
             <a:off x="6400800" y="4937760"/>
-            <a:ext cx="3337560" cy="658368"/>
+            <a:ext cx="3017520" cy="658368"/>
           </a:xfrm>
           <a:prstGeom prst="rect">
             <a:avLst/>
@@ -9335,8 +11683,8 @@
         </p:nvSpPr>
         <p:spPr>
           <a:xfrm>
-            <a:off x="9921240" y="5120640"/>
-            <a:ext cx="1645920" cy="292608"/>
+            <a:off x="9555480" y="5120640"/>
+            <a:ext cx="2011680" cy="292608"/>
           </a:xfrm>
           <a:prstGeom prst="rect">
             <a:avLst/>
@@ -9360,8 +11708,8 @@
         </p:nvSpPr>
         <p:spPr>
           <a:xfrm>
-            <a:off x="9921240" y="5120640"/>
-            <a:ext cx="1645920" cy="292608"/>
+            <a:off x="9555480" y="5120640"/>
+            <a:ext cx="2011680" cy="292608"/>
           </a:xfrm>
           <a:prstGeom prst="rect">
             <a:avLst/>
@@ -11497,8 +13845,8 @@
         </p:nvSpPr>
         <p:spPr>
           <a:xfrm>
-            <a:off x="457200" y="5394960"/>
-            <a:ext cx="3108960" cy="868680"/>
+            <a:off x="457200" y="5212080"/>
+            <a:ext cx="3108960" cy="1143000"/>
           </a:xfrm>
           <a:prstGeom prst="rect">
             <a:avLst/>
@@ -11522,8 +13870,8 @@
         </p:nvSpPr>
         <p:spPr>
           <a:xfrm>
-            <a:off x="594360" y="5394960"/>
-            <a:ext cx="2834640" cy="868680"/>
+            <a:off x="594360" y="5212080"/>
+            <a:ext cx="2834640" cy="1143000"/>
           </a:xfrm>
           <a:prstGeom prst="rect">
             <a:avLst/>
@@ -11536,10 +13884,13 @@
           <a:lstStyle/>
           <a:p>
             <a:pPr indent="0" marL="0">
-              <a:buNone/>
-            </a:pPr>
-            <a:r>
-              <a:rPr lang="en-US" sz="1200" dirty="0">
+              <a:spcAft>
+                <a:spcPts val="600"/>
+              </a:spcAft>
+              <a:buNone/>
+            </a:pPr>
+            <a:r>
+              <a:rPr lang="en-US" sz="1100" dirty="0">
                 <a:solidFill>
                   <a:srgbClr val="E4E7EA"/>
                 </a:solidFill>
@@ -11547,9 +13898,26 @@
                 <a:ea typeface="Arial" pitchFamily="34" charset="-122"/>
                 <a:cs typeface="Arial" pitchFamily="34" charset="-120"/>
               </a:rPr>
+              <a:t>Folio Real doc. 1.293.550 · trámite 1.997.596 · antecedente WANG 1101644</a:t>
+            </a:r>
+            <a:endParaRPr lang="en-US" sz="1100" dirty="0"/>
+          </a:p>
+          <a:p>
+            <a:pPr indent="0" marL="0">
+              <a:buNone/>
+            </a:pPr>
+            <a:r>
+              <a:rPr lang="en-US" sz="1100" dirty="0">
+                <a:solidFill>
+                  <a:srgbClr val="E4E7EA"/>
+                </a:solidFill>
+                <a:latin typeface="Arial" pitchFamily="34" charset="0"/>
+                <a:ea typeface="Arial" pitchFamily="34" charset="-122"/>
+                <a:cs typeface="Arial" pitchFamily="34" charset="-120"/>
+              </a:rPr>
               <a:t>No confundir con “Roberto Chávez” (cuenta 12102002026; caso separado).</a:t>
             </a:r>
-            <a:endParaRPr lang="en-US" sz="1200" dirty="0"/>
+            <a:endParaRPr lang="en-US" sz="1100" dirty="0"/>
           </a:p>
         </p:txBody>
       </p:sp>
@@ -12298,7 +14666,7 @@
                 <a:ea typeface="Arial" pitchFamily="34" charset="-122"/>
                 <a:cs typeface="Arial" pitchFamily="34" charset="-120"/>
               </a:rPr>
-              <a:t>Fuentes: Informe Roberto Chávez (14/10/2026); Matriz de Cruces; listado INCERPAZ.</a:t>
+              <a:t>Fuentes: Informe Roberto Chávez (14/10/2026, pp. 1–2); Folio Real; lista preliminar DDRR (INCERPAZ 3.docx).</a:t>
             </a:r>
             <a:endParaRPr lang="en-US" sz="1000" dirty="0"/>
           </a:p>
@@ -13728,7 +16096,7 @@
                 <a:ea typeface="Arial" pitchFamily="34" charset="-122"/>
                 <a:cs typeface="Arial" pitchFamily="34" charset="-120"/>
               </a:rPr>
-              <a:t>Fuentes: Matriz de Cruces; INCERPAZ.docx; Ariel León (09/04/2012), pp. 6–9.</a:t>
+              <a:t>Fuentes: Ariel León § IV.1 (Test. 914/93); lista preliminar DDRR (INCERPAZ 3.docx); Matriz de Cruces.</a:t>
             </a:r>
             <a:endParaRPr lang="en-US" sz="1000" dirty="0"/>
           </a:p>
@@ -14191,7 +16559,7 @@
                 <a:ea typeface="Arial" pitchFamily="34" charset="-122"/>
                 <a:cs typeface="Arial" pitchFamily="34" charset="-120"/>
               </a:rPr>
-              <a:t>El expediente lo identifica en copia. Otro informe menciona Quispe-Limachi: verificar si se trata de la misma cadena o referencia duplicada.</a:t>
+              <a:t>Fotocopia del testimonio citada en el informe. Otro informe menciona Quispe-Limachi: verificar si se trata de la misma cadena o referencia duplicada.</a:t>
             </a:r>
             <a:endParaRPr lang="en-US" sz="1200" dirty="0"/>
           </a:p>
@@ -15158,7 +17526,7 @@
                 <a:ea typeface="Arial" pitchFamily="34" charset="-122"/>
                 <a:cs typeface="Arial" pitchFamily="34" charset="-120"/>
               </a:rPr>
-              <a:t>Fuentes: Matriz de Cruces; INCERPAZ.docx; Ariel León (09/04/2012), pp. 6–9.  * Suma nominal, no certificada.</a:t>
+              <a:t>Fuentes: Ariel León § IV.1 (Test. 718/96) y § III.1 (Quispe-Limachi); lista preliminar DDRR (INCERPAZ 3.docx).</a:t>
             </a:r>
             <a:endParaRPr lang="en-US" sz="1000" dirty="0"/>
           </a:p>
@@ -16785,7 +19153,7 @@
                 <a:ea typeface="Arial" pitchFamily="34" charset="-122"/>
                 <a:cs typeface="Arial" pitchFamily="34" charset="-120"/>
               </a:rPr>
-              <a:t>Plano previo: Distrito 3 / Mamani. La matriz lo vincula con COM Contorno Bajo; comprobar que describan el mismo polígono.</a:t>
+              <a:t>Distrito 3 / Mamani; tabla repetida en plano COM Mamani. Comprobar que describan el mismo polígono que COM Contorno Bajo.</a:t>
             </a:r>
             <a:endParaRPr lang="en-US" sz="1400" dirty="0"/>
           </a:p>

--- a/Informe_5_Casos_Patrimoniales_Viacha_2026_v2.pptx
+++ b/Informe_5_Casos_Patrimoniales_Viacha_2026_v2.pptx
@@ -13419,16 +13419,39 @@
           </a:ln>
         </p:spPr>
       </p:sp>
-      <p:sp>
-        <p:nvSpPr>
-          <p:cNvPr id="3" name="Etiqueta"/>
+      <p:pic>
+        <p:nvPicPr>
+          <p:cNvPr id="3" name="Image 0" descr="Mapa referencial de la zona Mamani y la ciudad de Viacha">    </p:cNvPr>
+          <p:cNvPicPr>
+            <a:picLocks noChangeAspect="1"/>
+          </p:cNvPicPr>
+          <p:nvPr/>
+        </p:nvPicPr>
+        <p:blipFill>
+          <a:blip r:embed="rId1"/>
+          <a:srcRect l="0" r="0" t="0" b="0"/>
+          <a:stretch/>
+        </p:blipFill>
+        <p:spPr>
+          <a:xfrm>
+            <a:off x="0" y="0"/>
+            <a:ext cx="4023360" cy="2651760"/>
+          </a:xfrm>
+          <a:prstGeom prst="rect">
+            <a:avLst/>
+          </a:prstGeom>
+        </p:spPr>
+      </p:pic>
+      <p:sp>
+        <p:nvSpPr>
+          <p:cNvPr id="4" name="Etiqueta"/>
           <p:cNvSpPr/>
           <p:nvPr/>
         </p:nvSpPr>
         <p:spPr>
           <a:xfrm>
-            <a:off x="457200" y="457200"/>
-            <a:ext cx="3108960" cy="822960"/>
+            <a:off x="274320" y="274320"/>
+            <a:ext cx="2286000" cy="731520"/>
           </a:xfrm>
           <a:prstGeom prst="rect">
             <a:avLst/>
@@ -13446,14 +13469,14 @@
       </p:sp>
       <p:sp>
         <p:nvSpPr>
-          <p:cNvPr id="4" name="Etiqueta barra"/>
+          <p:cNvPr id="5" name="Etiqueta barra"/>
           <p:cNvSpPr/>
           <p:nvPr/>
         </p:nvSpPr>
         <p:spPr>
           <a:xfrm>
-            <a:off x="457200" y="457200"/>
-            <a:ext cx="64008" cy="822960"/>
+            <a:off x="274320" y="274320"/>
+            <a:ext cx="64008" cy="731520"/>
           </a:xfrm>
           <a:prstGeom prst="rect">
             <a:avLst/>
@@ -13471,14 +13494,14 @@
       </p:sp>
       <p:sp>
         <p:nvSpPr>
-          <p:cNvPr id="5" name="Text 3"/>
-          <p:cNvSpPr txBox="1"/>
-          <p:nvPr/>
-        </p:nvSpPr>
-        <p:spPr>
-          <a:xfrm>
-            <a:off x="731520" y="457200"/>
-            <a:ext cx="2743200" cy="822960"/>
+          <p:cNvPr id="6" name="Text 3"/>
+          <p:cNvSpPr txBox="1"/>
+          <p:nvPr/>
+        </p:nvSpPr>
+        <p:spPr>
+          <a:xfrm>
+            <a:off x="548640" y="274320"/>
+            <a:ext cx="1920240" cy="731520"/>
           </a:xfrm>
           <a:prstGeom prst="rect">
             <a:avLst/>
@@ -13494,7 +13517,7 @@
               <a:buNone/>
             </a:pPr>
             <a:r>
-              <a:rPr lang="en-US" sz="1300" dirty="0">
+              <a:rPr lang="en-US" sz="1200" dirty="0">
                 <a:solidFill>
                   <a:srgbClr val="FFFFFF"/>
                 </a:solidFill>
@@ -13511,7 +13534,7 @@
               <a:buNone/>
             </a:pPr>
             <a:r>
-              <a:rPr lang="en-US" sz="1800" b="1" dirty="0">
+              <a:rPr lang="en-US" sz="1600" b="1" dirty="0">
                 <a:solidFill>
                   <a:srgbClr val="FFFFFF"/>
                 </a:solidFill>
@@ -13527,13 +13550,77 @@
       </p:sp>
       <p:sp>
         <p:nvSpPr>
-          <p:cNvPr id="6" name="Text 4"/>
-          <p:cNvSpPr txBox="1"/>
-          <p:nvPr/>
-        </p:nvSpPr>
-        <p:spPr>
-          <a:xfrm>
-            <a:off x="457200" y="1737360"/>
+          <p:cNvPr id="7" name="Shape 4"/>
+          <p:cNvSpPr/>
+          <p:nvPr/>
+        </p:nvSpPr>
+        <p:spPr>
+          <a:xfrm>
+            <a:off x="0" y="2286000"/>
+            <a:ext cx="4023360" cy="365760"/>
+          </a:xfrm>
+          <a:prstGeom prst="rect">
+            <a:avLst/>
+          </a:prstGeom>
+          <a:solidFill>
+            <a:srgbClr val="1B2126"/>
+          </a:solidFill>
+          <a:ln w="12700">
+            <a:solidFill>
+              <a:srgbClr val="1B2126"/>
+            </a:solidFill>
+            <a:prstDash val="solid"/>
+          </a:ln>
+        </p:spPr>
+      </p:sp>
+      <p:sp>
+        <p:nvSpPr>
+          <p:cNvPr id="8" name="Text 5"/>
+          <p:cNvSpPr txBox="1"/>
+          <p:nvPr/>
+        </p:nvSpPr>
+        <p:spPr>
+          <a:xfrm>
+            <a:off x="274320" y="2286000"/>
+            <a:ext cx="3657600" cy="365760"/>
+          </a:xfrm>
+          <a:prstGeom prst="rect">
+            <a:avLst/>
+          </a:prstGeom>
+          <a:noFill/>
+          <a:ln/>
+        </p:spPr>
+        <p:txBody>
+          <a:bodyPr wrap="square" lIns="0" tIns="0" rIns="0" bIns="0" rtlCol="0" anchor="ctr"/>
+          <a:lstStyle/>
+          <a:p>
+            <a:pPr indent="0" marL="0">
+              <a:buNone/>
+            </a:pPr>
+            <a:r>
+              <a:rPr lang="en-US" sz="900" b="1" spc="50" kern="0" dirty="0">
+                <a:solidFill>
+                  <a:srgbClr val="FFFFFF"/>
+                </a:solidFill>
+                <a:latin typeface="Arial" pitchFamily="34" charset="0"/>
+                <a:ea typeface="Arial" pitchFamily="34" charset="-122"/>
+                <a:cs typeface="Arial" pitchFamily="34" charset="-120"/>
+              </a:rPr>
+              <a:t>UBICACIÓN REFERENCIAL · NO DELIMITA EL PREDIO</a:t>
+            </a:r>
+            <a:endParaRPr lang="en-US" sz="900" dirty="0"/>
+          </a:p>
+        </p:txBody>
+      </p:sp>
+      <p:sp>
+        <p:nvSpPr>
+          <p:cNvPr id="9" name="Text 6"/>
+          <p:cNvSpPr txBox="1"/>
+          <p:nvPr/>
+        </p:nvSpPr>
+        <p:spPr>
+          <a:xfrm>
+            <a:off x="457200" y="2834640"/>
             <a:ext cx="3200400" cy="274320"/>
           </a:xfrm>
           <a:prstGeom prst="rect">
@@ -13566,14 +13653,14 @@
       </p:sp>
       <p:sp>
         <p:nvSpPr>
-          <p:cNvPr id="7" name="Text 5"/>
-          <p:cNvSpPr txBox="1"/>
-          <p:nvPr/>
-        </p:nvSpPr>
-        <p:spPr>
-          <a:xfrm>
-            <a:off x="457200" y="2011680"/>
-            <a:ext cx="3291840" cy="868680"/>
+          <p:cNvPr id="10" name="Text 7"/>
+          <p:cNvSpPr txBox="1"/>
+          <p:nvPr/>
+        </p:nvSpPr>
+        <p:spPr>
+          <a:xfrm>
+            <a:off x="457200" y="3108960"/>
+            <a:ext cx="3383280" cy="685800"/>
           </a:xfrm>
           <a:prstGeom prst="rect">
             <a:avLst/>
@@ -13589,7 +13676,7 @@
               <a:buNone/>
             </a:pPr>
             <a:r>
-              <a:rPr lang="en-US" sz="5400" b="1" dirty="0">
+              <a:rPr lang="en-US" sz="4400" b="1" dirty="0">
                 <a:solidFill>
                   <a:srgbClr val="FFFFFF"/>
                 </a:solidFill>
@@ -13599,20 +13686,34 @@
               </a:rPr>
               <a:t>9,3250</a:t>
             </a:r>
-            <a:endParaRPr lang="en-US" sz="5400" dirty="0"/>
-          </a:p>
-        </p:txBody>
-      </p:sp>
-      <p:sp>
-        <p:nvSpPr>
-          <p:cNvPr id="8" name="Text 6"/>
-          <p:cNvSpPr txBox="1"/>
-          <p:nvPr/>
-        </p:nvSpPr>
-        <p:spPr>
-          <a:xfrm>
-            <a:off x="457200" y="2880360"/>
-            <a:ext cx="3200400" cy="274320"/>
+            <a:pPr indent="0" marL="0">
+              <a:buNone/>
+            </a:pPr>
+            <a:r>
+              <a:rPr lang="en-US" sz="1600" dirty="0">
+                <a:solidFill>
+                  <a:srgbClr val="C9CED3"/>
+                </a:solidFill>
+                <a:latin typeface="Arial" pitchFamily="34" charset="0"/>
+                <a:ea typeface="Arial" pitchFamily="34" charset="-122"/>
+                <a:cs typeface="Arial" pitchFamily="34" charset="-120"/>
+              </a:rPr>
+              <a:t>  ha</a:t>
+            </a:r>
+            <a:endParaRPr lang="en-US" sz="1400" dirty="0"/>
+          </a:p>
+        </p:txBody>
+      </p:sp>
+      <p:sp>
+        <p:nvSpPr>
+          <p:cNvPr id="11" name="Text 8"/>
+          <p:cNvSpPr txBox="1"/>
+          <p:nvPr/>
+        </p:nvSpPr>
+        <p:spPr>
+          <a:xfrm>
+            <a:off x="457200" y="3886200"/>
+            <a:ext cx="3200400" cy="228600"/>
           </a:xfrm>
           <a:prstGeom prst="rect">
             <a:avLst/>
@@ -13628,7 +13729,7 @@
               <a:buNone/>
             </a:pPr>
             <a:r>
-              <a:rPr lang="en-US" sz="1400" dirty="0">
+              <a:rPr lang="en-US" sz="1200" dirty="0">
                 <a:solidFill>
                   <a:srgbClr val="C9CED3"/>
                 </a:solidFill>
@@ -13636,7 +13737,124 @@
                 <a:ea typeface="Arial" pitchFamily="34" charset="-122"/>
                 <a:cs typeface="Arial" pitchFamily="34" charset="-120"/>
               </a:rPr>
-              <a:t>hectáreas</a:t>
+              <a:t>Matrícula</a:t>
+            </a:r>
+            <a:endParaRPr lang="en-US" sz="1200" dirty="0"/>
+          </a:p>
+        </p:txBody>
+      </p:sp>
+      <p:sp>
+        <p:nvSpPr>
+          <p:cNvPr id="12" name="Text 9"/>
+          <p:cNvSpPr txBox="1"/>
+          <p:nvPr/>
+        </p:nvSpPr>
+        <p:spPr>
+          <a:xfrm>
+            <a:off x="457200" y="4114800"/>
+            <a:ext cx="3291840" cy="320040"/>
+          </a:xfrm>
+          <a:prstGeom prst="rect">
+            <a:avLst/>
+          </a:prstGeom>
+          <a:noFill/>
+          <a:ln/>
+        </p:spPr>
+        <p:txBody>
+          <a:bodyPr wrap="square" lIns="0" tIns="0" rIns="0" bIns="0" rtlCol="0" anchor="t"/>
+          <a:lstStyle/>
+          <a:p>
+            <a:pPr indent="0" marL="0">
+              <a:buNone/>
+            </a:pPr>
+            <a:r>
+              <a:rPr lang="en-US" sz="1700" b="1" dirty="0">
+                <a:solidFill>
+                  <a:srgbClr val="FFFFFF"/>
+                </a:solidFill>
+                <a:latin typeface="Arial" pitchFamily="34" charset="0"/>
+                <a:ea typeface="Arial" pitchFamily="34" charset="-122"/>
+                <a:cs typeface="Arial" pitchFamily="34" charset="-120"/>
+              </a:rPr>
+              <a:t>2.08.1.01.0019611</a:t>
+            </a:r>
+            <a:endParaRPr lang="en-US" sz="1700" dirty="0"/>
+          </a:p>
+        </p:txBody>
+      </p:sp>
+      <p:sp>
+        <p:nvSpPr>
+          <p:cNvPr id="13" name="Text 10"/>
+          <p:cNvSpPr txBox="1"/>
+          <p:nvPr/>
+        </p:nvSpPr>
+        <p:spPr>
+          <a:xfrm>
+            <a:off x="457200" y="4526280"/>
+            <a:ext cx="3200400" cy="228600"/>
+          </a:xfrm>
+          <a:prstGeom prst="rect">
+            <a:avLst/>
+          </a:prstGeom>
+          <a:noFill/>
+          <a:ln/>
+        </p:spPr>
+        <p:txBody>
+          <a:bodyPr wrap="square" lIns="0" tIns="0" rIns="0" bIns="0" rtlCol="0" anchor="t"/>
+          <a:lstStyle/>
+          <a:p>
+            <a:pPr indent="0" marL="0">
+              <a:buNone/>
+            </a:pPr>
+            <a:r>
+              <a:rPr lang="en-US" sz="1200" dirty="0">
+                <a:solidFill>
+                  <a:srgbClr val="C9CED3"/>
+                </a:solidFill>
+                <a:latin typeface="Arial" pitchFamily="34" charset="0"/>
+                <a:ea typeface="Arial" pitchFamily="34" charset="-122"/>
+                <a:cs typeface="Arial" pitchFamily="34" charset="-120"/>
+              </a:rPr>
+              <a:t>Cuenta contable relacionada</a:t>
+            </a:r>
+            <a:endParaRPr lang="en-US" sz="1200" dirty="0"/>
+          </a:p>
+        </p:txBody>
+      </p:sp>
+      <p:sp>
+        <p:nvSpPr>
+          <p:cNvPr id="14" name="Text 11"/>
+          <p:cNvSpPr txBox="1"/>
+          <p:nvPr/>
+        </p:nvSpPr>
+        <p:spPr>
+          <a:xfrm>
+            <a:off x="457200" y="4754880"/>
+            <a:ext cx="3291840" cy="274320"/>
+          </a:xfrm>
+          <a:prstGeom prst="rect">
+            <a:avLst/>
+          </a:prstGeom>
+          <a:noFill/>
+          <a:ln/>
+        </p:spPr>
+        <p:txBody>
+          <a:bodyPr wrap="square" lIns="0" tIns="0" rIns="0" bIns="0" rtlCol="0" anchor="t"/>
+          <a:lstStyle/>
+          <a:p>
+            <a:pPr indent="0" marL="0">
+              <a:buNone/>
+            </a:pPr>
+            <a:r>
+              <a:rPr lang="en-US" sz="1400" b="1" dirty="0">
+                <a:solidFill>
+                  <a:srgbClr val="FFFFFF"/>
+                </a:solidFill>
+                <a:latin typeface="Arial" pitchFamily="34" charset="0"/>
+                <a:ea typeface="Arial" pitchFamily="34" charset="-122"/>
+                <a:cs typeface="Arial" pitchFamily="34" charset="-120"/>
+              </a:rPr>
+              <a:t>12102002030 · saldo 10.000,00</a:t>
             </a:r>
             <a:endParaRPr lang="en-US" sz="1400" dirty="0"/>
           </a:p>
@@ -13644,14 +13862,14 @@
       </p:sp>
       <p:sp>
         <p:nvSpPr>
-          <p:cNvPr id="9" name="Text 7"/>
-          <p:cNvSpPr txBox="1"/>
-          <p:nvPr/>
-        </p:nvSpPr>
-        <p:spPr>
-          <a:xfrm>
-            <a:off x="457200" y="3520440"/>
-            <a:ext cx="3200400" cy="228600"/>
+          <p:cNvPr id="15" name="Text 12"/>
+          <p:cNvSpPr txBox="1"/>
+          <p:nvPr/>
+        </p:nvSpPr>
+        <p:spPr>
+          <a:xfrm>
+            <a:off x="457200" y="5029200"/>
+            <a:ext cx="3291840" cy="228600"/>
           </a:xfrm>
           <a:prstGeom prst="rect">
             <a:avLst/>
@@ -13667,162 +13885,6 @@
               <a:buNone/>
             </a:pPr>
             <a:r>
-              <a:rPr lang="en-US" sz="1200" dirty="0">
-                <a:solidFill>
-                  <a:srgbClr val="C9CED3"/>
-                </a:solidFill>
-                <a:latin typeface="Arial" pitchFamily="34" charset="0"/>
-                <a:ea typeface="Arial" pitchFamily="34" charset="-122"/>
-                <a:cs typeface="Arial" pitchFamily="34" charset="-120"/>
-              </a:rPr>
-              <a:t>Matrícula</a:t>
-            </a:r>
-            <a:endParaRPr lang="en-US" sz="1200" dirty="0"/>
-          </a:p>
-        </p:txBody>
-      </p:sp>
-      <p:sp>
-        <p:nvSpPr>
-          <p:cNvPr id="10" name="Text 8"/>
-          <p:cNvSpPr txBox="1"/>
-          <p:nvPr/>
-        </p:nvSpPr>
-        <p:spPr>
-          <a:xfrm>
-            <a:off x="457200" y="3749040"/>
-            <a:ext cx="3291840" cy="320040"/>
-          </a:xfrm>
-          <a:prstGeom prst="rect">
-            <a:avLst/>
-          </a:prstGeom>
-          <a:noFill/>
-          <a:ln/>
-        </p:spPr>
-        <p:txBody>
-          <a:bodyPr wrap="square" lIns="0" tIns="0" rIns="0" bIns="0" rtlCol="0" anchor="t"/>
-          <a:lstStyle/>
-          <a:p>
-            <a:pPr indent="0" marL="0">
-              <a:buNone/>
-            </a:pPr>
-            <a:r>
-              <a:rPr lang="en-US" sz="1700" b="1" dirty="0">
-                <a:solidFill>
-                  <a:srgbClr val="FFFFFF"/>
-                </a:solidFill>
-                <a:latin typeface="Arial" pitchFamily="34" charset="0"/>
-                <a:ea typeface="Arial" pitchFamily="34" charset="-122"/>
-                <a:cs typeface="Arial" pitchFamily="34" charset="-120"/>
-              </a:rPr>
-              <a:t>2.08.1.01.0019611</a:t>
-            </a:r>
-            <a:endParaRPr lang="en-US" sz="1700" dirty="0"/>
-          </a:p>
-        </p:txBody>
-      </p:sp>
-      <p:sp>
-        <p:nvSpPr>
-          <p:cNvPr id="11" name="Text 9"/>
-          <p:cNvSpPr txBox="1"/>
-          <p:nvPr/>
-        </p:nvSpPr>
-        <p:spPr>
-          <a:xfrm>
-            <a:off x="457200" y="4297680"/>
-            <a:ext cx="3200400" cy="228600"/>
-          </a:xfrm>
-          <a:prstGeom prst="rect">
-            <a:avLst/>
-          </a:prstGeom>
-          <a:noFill/>
-          <a:ln/>
-        </p:spPr>
-        <p:txBody>
-          <a:bodyPr wrap="square" lIns="0" tIns="0" rIns="0" bIns="0" rtlCol="0" anchor="t"/>
-          <a:lstStyle/>
-          <a:p>
-            <a:pPr indent="0" marL="0">
-              <a:buNone/>
-            </a:pPr>
-            <a:r>
-              <a:rPr lang="en-US" sz="1200" dirty="0">
-                <a:solidFill>
-                  <a:srgbClr val="C9CED3"/>
-                </a:solidFill>
-                <a:latin typeface="Arial" pitchFamily="34" charset="0"/>
-                <a:ea typeface="Arial" pitchFamily="34" charset="-122"/>
-                <a:cs typeface="Arial" pitchFamily="34" charset="-120"/>
-              </a:rPr>
-              <a:t>Cuenta contable relacionada</a:t>
-            </a:r>
-            <a:endParaRPr lang="en-US" sz="1200" dirty="0"/>
-          </a:p>
-        </p:txBody>
-      </p:sp>
-      <p:sp>
-        <p:nvSpPr>
-          <p:cNvPr id="12" name="Text 10"/>
-          <p:cNvSpPr txBox="1"/>
-          <p:nvPr/>
-        </p:nvSpPr>
-        <p:spPr>
-          <a:xfrm>
-            <a:off x="457200" y="4526280"/>
-            <a:ext cx="3291840" cy="274320"/>
-          </a:xfrm>
-          <a:prstGeom prst="rect">
-            <a:avLst/>
-          </a:prstGeom>
-          <a:noFill/>
-          <a:ln/>
-        </p:spPr>
-        <p:txBody>
-          <a:bodyPr wrap="square" lIns="0" tIns="0" rIns="0" bIns="0" rtlCol="0" anchor="t"/>
-          <a:lstStyle/>
-          <a:p>
-            <a:pPr indent="0" marL="0">
-              <a:buNone/>
-            </a:pPr>
-            <a:r>
-              <a:rPr lang="en-US" sz="1400" b="1" dirty="0">
-                <a:solidFill>
-                  <a:srgbClr val="FFFFFF"/>
-                </a:solidFill>
-                <a:latin typeface="Arial" pitchFamily="34" charset="0"/>
-                <a:ea typeface="Arial" pitchFamily="34" charset="-122"/>
-                <a:cs typeface="Arial" pitchFamily="34" charset="-120"/>
-              </a:rPr>
-              <a:t>12102002030 · saldo 10.000,00</a:t>
-            </a:r>
-            <a:endParaRPr lang="en-US" sz="1400" dirty="0"/>
-          </a:p>
-        </p:txBody>
-      </p:sp>
-      <p:sp>
-        <p:nvSpPr>
-          <p:cNvPr id="13" name="Text 11"/>
-          <p:cNvSpPr txBox="1"/>
-          <p:nvPr/>
-        </p:nvSpPr>
-        <p:spPr>
-          <a:xfrm>
-            <a:off x="457200" y="4828032"/>
-            <a:ext cx="3291840" cy="274320"/>
-          </a:xfrm>
-          <a:prstGeom prst="rect">
-            <a:avLst/>
-          </a:prstGeom>
-          <a:noFill/>
-          <a:ln/>
-        </p:spPr>
-        <p:txBody>
-          <a:bodyPr wrap="square" lIns="0" tIns="0" rIns="0" bIns="0" rtlCol="0" anchor="t"/>
-          <a:lstStyle/>
-          <a:p>
-            <a:pPr indent="0" marL="0">
-              <a:buNone/>
-            </a:pPr>
-            <a:r>
               <a:rPr lang="en-US" sz="1100" dirty="0">
                 <a:solidFill>
                   <a:srgbClr val="9AA3AB"/>
@@ -13839,14 +13901,14 @@
       </p:sp>
       <p:sp>
         <p:nvSpPr>
-          <p:cNvPr id="14" name="Shape 12"/>
+          <p:cNvPr id="16" name="Shape 13"/>
           <p:cNvSpPr/>
           <p:nvPr/>
         </p:nvSpPr>
         <p:spPr>
           <a:xfrm>
-            <a:off x="457200" y="5212080"/>
-            <a:ext cx="3108960" cy="1143000"/>
+            <a:off x="457200" y="5394960"/>
+            <a:ext cx="3108960" cy="1051560"/>
           </a:xfrm>
           <a:prstGeom prst="rect">
             <a:avLst/>
@@ -13864,14 +13926,14 @@
       </p:sp>
       <p:sp>
         <p:nvSpPr>
-          <p:cNvPr id="15" name="Text 13"/>
-          <p:cNvSpPr txBox="1"/>
-          <p:nvPr/>
-        </p:nvSpPr>
-        <p:spPr>
-          <a:xfrm>
-            <a:off x="594360" y="5212080"/>
-            <a:ext cx="2834640" cy="1143000"/>
+          <p:cNvPr id="17" name="Text 14"/>
+          <p:cNvSpPr txBox="1"/>
+          <p:nvPr/>
+        </p:nvSpPr>
+        <p:spPr>
+          <a:xfrm>
+            <a:off x="594360" y="5394960"/>
+            <a:ext cx="2834640" cy="1051560"/>
           </a:xfrm>
           <a:prstGeom prst="rect">
             <a:avLst/>
@@ -13885,7 +13947,7 @@
           <a:p>
             <a:pPr indent="0" marL="0">
               <a:spcAft>
-                <a:spcPts val="600"/>
+                <a:spcPts val="500"/>
               </a:spcAft>
               <a:buNone/>
             </a:pPr>
@@ -13923,7 +13985,7 @@
       </p:sp>
       <p:sp>
         <p:nvSpPr>
-          <p:cNvPr id="16" name="Text 14"/>
+          <p:cNvPr id="18" name="Text 15"/>
           <p:cNvSpPr txBox="1"/>
           <p:nvPr/>
         </p:nvSpPr>
@@ -13962,7 +14024,7 @@
       </p:sp>
       <p:sp>
         <p:nvSpPr>
-          <p:cNvPr id="17" name="Text 15"/>
+          <p:cNvPr id="19" name="Text 16"/>
           <p:cNvSpPr txBox="1"/>
           <p:nvPr/>
         </p:nvSpPr>
@@ -14001,7 +14063,7 @@
       </p:sp>
       <p:sp>
         <p:nvSpPr>
-          <p:cNvPr id="18" name="Marca dorada"/>
+          <p:cNvPr id="20" name="Marca dorada"/>
           <p:cNvSpPr/>
           <p:nvPr/>
         </p:nvSpPr>
@@ -14026,7 +14088,7 @@
       </p:sp>
       <p:sp>
         <p:nvSpPr>
-          <p:cNvPr id="19" name="Text 17"/>
+          <p:cNvPr id="21" name="Text 18"/>
           <p:cNvSpPr txBox="1"/>
           <p:nvPr/>
         </p:nvSpPr>
@@ -14065,7 +14127,7 @@
       </p:sp>
       <p:sp>
         <p:nvSpPr>
-          <p:cNvPr id="20" name="Text 18"/>
+          <p:cNvPr id="22" name="Text 19"/>
           <p:cNvSpPr txBox="1"/>
           <p:nvPr/>
         </p:nvSpPr>
@@ -14104,7 +14166,7 @@
       </p:sp>
       <p:graphicFrame>
         <p:nvGraphicFramePr>
-          <p:cNvPr id="21" name="Chart 0" descr=""/>
+          <p:cNvPr id="23" name="Chart 0" descr=""/>
           <p:cNvGraphicFramePr/>
           <p:nvPr/>
         </p:nvGraphicFramePr>
@@ -14114,13 +14176,13 @@
         </p:xfrm>
         <a:graphic xmlns:a="http://schemas.openxmlformats.org/drawingml/2006/main">
           <a:graphicData uri="http://schemas.openxmlformats.org/drawingml/2006/chart">
-            <c:chart xmlns:c="http://schemas.openxmlformats.org/drawingml/2006/chart" r:id="rId1"/>
+            <c:chart xmlns:c="http://schemas.openxmlformats.org/drawingml/2006/chart" r:id="rId2"/>
           </a:graphicData>
         </a:graphic>
       </p:graphicFrame>
       <p:sp>
         <p:nvSpPr>
-          <p:cNvPr id="22" name="Text 19"/>
+          <p:cNvPr id="24" name="Text 20"/>
           <p:cNvSpPr txBox="1"/>
           <p:nvPr/>
         </p:nvSpPr>
@@ -14159,7 +14221,7 @@
       </p:sp>
       <p:sp>
         <p:nvSpPr>
-          <p:cNvPr id="23" name="Shape 20"/>
+          <p:cNvPr id="25" name="Shape 21"/>
           <p:cNvSpPr/>
           <p:nvPr/>
         </p:nvSpPr>
@@ -14184,7 +14246,7 @@
       </p:sp>
       <p:sp>
         <p:nvSpPr>
-          <p:cNvPr id="24" name="Text 21"/>
+          <p:cNvPr id="26" name="Text 22"/>
           <p:cNvSpPr txBox="1"/>
           <p:nvPr/>
         </p:nvSpPr>
@@ -14223,7 +14285,7 @@
       </p:sp>
       <p:sp>
         <p:nvSpPr>
-          <p:cNvPr id="25" name="Text 22"/>
+          <p:cNvPr id="27" name="Text 23"/>
           <p:cNvSpPr txBox="1"/>
           <p:nvPr/>
         </p:nvSpPr>
@@ -14262,7 +14324,7 @@
       </p:sp>
       <p:sp>
         <p:nvSpPr>
-          <p:cNvPr id="26" name="Shape 23"/>
+          <p:cNvPr id="28" name="Shape 24"/>
           <p:cNvSpPr/>
           <p:nvPr/>
         </p:nvSpPr>
@@ -14287,7 +14349,7 @@
       </p:sp>
       <p:sp>
         <p:nvSpPr>
-          <p:cNvPr id="27" name="Text 24"/>
+          <p:cNvPr id="29" name="Text 25"/>
           <p:cNvSpPr txBox="1"/>
           <p:nvPr/>
         </p:nvSpPr>
@@ -14326,7 +14388,7 @@
       </p:sp>
       <p:sp>
         <p:nvSpPr>
-          <p:cNvPr id="28" name="Text 25"/>
+          <p:cNvPr id="30" name="Text 26"/>
           <p:cNvSpPr txBox="1"/>
           <p:nvPr/>
         </p:nvSpPr>
@@ -14365,7 +14427,7 @@
       </p:sp>
       <p:sp>
         <p:nvSpPr>
-          <p:cNvPr id="29" name="Tarjeta DOS GRAVÁMENES"/>
+          <p:cNvPr id="31" name="Tarjeta DOS GRAVÁMENES"/>
           <p:cNvSpPr/>
           <p:nvPr/>
         </p:nvSpPr>
@@ -14397,7 +14459,7 @@
       </p:sp>
       <p:sp>
         <p:nvSpPr>
-          <p:cNvPr id="30" name="Shape 27"/>
+          <p:cNvPr id="32" name="Shape 28"/>
           <p:cNvSpPr/>
           <p:nvPr/>
         </p:nvSpPr>
@@ -14422,7 +14484,7 @@
       </p:sp>
       <p:sp>
         <p:nvSpPr>
-          <p:cNvPr id="31" name="Text 28"/>
+          <p:cNvPr id="33" name="Text 29"/>
           <p:cNvSpPr txBox="1"/>
           <p:nvPr/>
         </p:nvSpPr>
@@ -14461,7 +14523,7 @@
       </p:sp>
       <p:sp>
         <p:nvSpPr>
-          <p:cNvPr id="32" name="Text 29"/>
+          <p:cNvPr id="34" name="Text 30"/>
           <p:cNvSpPr txBox="1"/>
           <p:nvPr/>
         </p:nvSpPr>
@@ -14500,7 +14562,7 @@
       </p:sp>
       <p:sp>
         <p:nvSpPr>
-          <p:cNvPr id="33" name="Tarjeta LECTURA DE LA CUOTA"/>
+          <p:cNvPr id="35" name="Tarjeta LECTURA DE LA CUOTA"/>
           <p:cNvSpPr/>
           <p:nvPr/>
         </p:nvSpPr>
@@ -14532,7 +14594,7 @@
       </p:sp>
       <p:sp>
         <p:nvSpPr>
-          <p:cNvPr id="34" name="Shape 31"/>
+          <p:cNvPr id="36" name="Shape 32"/>
           <p:cNvSpPr/>
           <p:nvPr/>
         </p:nvSpPr>
@@ -14557,7 +14619,7 @@
       </p:sp>
       <p:sp>
         <p:nvSpPr>
-          <p:cNvPr id="35" name="Text 32"/>
+          <p:cNvPr id="37" name="Text 33"/>
           <p:cNvSpPr txBox="1"/>
           <p:nvPr/>
         </p:nvSpPr>
@@ -14596,7 +14658,7 @@
       </p:sp>
       <p:sp>
         <p:nvSpPr>
-          <p:cNvPr id="36" name="Text 33"/>
+          <p:cNvPr id="38" name="Text 34"/>
           <p:cNvSpPr txBox="1"/>
           <p:nvPr/>
         </p:nvSpPr>
@@ -14635,7 +14697,7 @@
       </p:sp>
       <p:sp>
         <p:nvSpPr>
-          <p:cNvPr id="37" name="Text 34"/>
+          <p:cNvPr id="39" name="Text 35"/>
           <p:cNvSpPr txBox="1"/>
           <p:nvPr/>
         </p:nvSpPr>
@@ -14770,16 +14832,39 @@
           </a:ln>
         </p:spPr>
       </p:sp>
-      <p:sp>
-        <p:nvSpPr>
-          <p:cNvPr id="3" name="Etiqueta"/>
+      <p:pic>
+        <p:nvPicPr>
+          <p:cNvPr id="3" name="Image 0" descr="Mapa referencial de la zona Mamani y la ciudad de Viacha">    </p:cNvPr>
+          <p:cNvPicPr>
+            <a:picLocks noChangeAspect="1"/>
+          </p:cNvPicPr>
+          <p:nvPr/>
+        </p:nvPicPr>
+        <p:blipFill>
+          <a:blip r:embed="rId1"/>
+          <a:srcRect l="0" r="0" t="0" b="0"/>
+          <a:stretch/>
+        </p:blipFill>
+        <p:spPr>
+          <a:xfrm>
+            <a:off x="0" y="0"/>
+            <a:ext cx="4023360" cy="2651760"/>
+          </a:xfrm>
+          <a:prstGeom prst="rect">
+            <a:avLst/>
+          </a:prstGeom>
+        </p:spPr>
+      </p:pic>
+      <p:sp>
+        <p:nvSpPr>
+          <p:cNvPr id="4" name="Etiqueta"/>
           <p:cNvSpPr/>
           <p:nvPr/>
         </p:nvSpPr>
         <p:spPr>
           <a:xfrm>
-            <a:off x="457200" y="457200"/>
-            <a:ext cx="3108960" cy="822960"/>
+            <a:off x="274320" y="274320"/>
+            <a:ext cx="2286000" cy="731520"/>
           </a:xfrm>
           <a:prstGeom prst="rect">
             <a:avLst/>
@@ -14797,14 +14882,14 @@
       </p:sp>
       <p:sp>
         <p:nvSpPr>
-          <p:cNvPr id="4" name="Etiqueta barra"/>
+          <p:cNvPr id="5" name="Etiqueta barra"/>
           <p:cNvSpPr/>
           <p:nvPr/>
         </p:nvSpPr>
         <p:spPr>
           <a:xfrm>
-            <a:off x="457200" y="457200"/>
-            <a:ext cx="64008" cy="822960"/>
+            <a:off x="274320" y="274320"/>
+            <a:ext cx="64008" cy="731520"/>
           </a:xfrm>
           <a:prstGeom prst="rect">
             <a:avLst/>
@@ -14822,14 +14907,14 @@
       </p:sp>
       <p:sp>
         <p:nvSpPr>
-          <p:cNvPr id="5" name="Text 3"/>
-          <p:cNvSpPr txBox="1"/>
-          <p:nvPr/>
-        </p:nvSpPr>
-        <p:spPr>
-          <a:xfrm>
-            <a:off x="731520" y="457200"/>
-            <a:ext cx="2743200" cy="822960"/>
+          <p:cNvPr id="6" name="Text 3"/>
+          <p:cNvSpPr txBox="1"/>
+          <p:nvPr/>
+        </p:nvSpPr>
+        <p:spPr>
+          <a:xfrm>
+            <a:off x="548640" y="274320"/>
+            <a:ext cx="1920240" cy="731520"/>
           </a:xfrm>
           <a:prstGeom prst="rect">
             <a:avLst/>
@@ -14845,7 +14930,7 @@
               <a:buNone/>
             </a:pPr>
             <a:r>
-              <a:rPr lang="en-US" sz="1300" dirty="0">
+              <a:rPr lang="en-US" sz="1200" dirty="0">
                 <a:solidFill>
                   <a:srgbClr val="FFFFFF"/>
                 </a:solidFill>
@@ -14862,7 +14947,7 @@
               <a:buNone/>
             </a:pPr>
             <a:r>
-              <a:rPr lang="en-US" sz="1800" b="1" dirty="0">
+              <a:rPr lang="en-US" sz="1600" b="1" dirty="0">
                 <a:solidFill>
                   <a:srgbClr val="FFFFFF"/>
                 </a:solidFill>
@@ -14878,13 +14963,77 @@
       </p:sp>
       <p:sp>
         <p:nvSpPr>
-          <p:cNvPr id="6" name="Text 4"/>
-          <p:cNvSpPr txBox="1"/>
-          <p:nvPr/>
-        </p:nvSpPr>
-        <p:spPr>
-          <a:xfrm>
-            <a:off x="457200" y="1737360"/>
+          <p:cNvPr id="7" name="Shape 4"/>
+          <p:cNvSpPr/>
+          <p:nvPr/>
+        </p:nvSpPr>
+        <p:spPr>
+          <a:xfrm>
+            <a:off x="0" y="2286000"/>
+            <a:ext cx="4023360" cy="365760"/>
+          </a:xfrm>
+          <a:prstGeom prst="rect">
+            <a:avLst/>
+          </a:prstGeom>
+          <a:solidFill>
+            <a:srgbClr val="1B2126"/>
+          </a:solidFill>
+          <a:ln w="12700">
+            <a:solidFill>
+              <a:srgbClr val="1B2126"/>
+            </a:solidFill>
+            <a:prstDash val="solid"/>
+          </a:ln>
+        </p:spPr>
+      </p:sp>
+      <p:sp>
+        <p:nvSpPr>
+          <p:cNvPr id="8" name="Text 5"/>
+          <p:cNvSpPr txBox="1"/>
+          <p:nvPr/>
+        </p:nvSpPr>
+        <p:spPr>
+          <a:xfrm>
+            <a:off x="274320" y="2286000"/>
+            <a:ext cx="3657600" cy="365760"/>
+          </a:xfrm>
+          <a:prstGeom prst="rect">
+            <a:avLst/>
+          </a:prstGeom>
+          <a:noFill/>
+          <a:ln/>
+        </p:spPr>
+        <p:txBody>
+          <a:bodyPr wrap="square" lIns="0" tIns="0" rIns="0" bIns="0" rtlCol="0" anchor="ctr"/>
+          <a:lstStyle/>
+          <a:p>
+            <a:pPr indent="0" marL="0">
+              <a:buNone/>
+            </a:pPr>
+            <a:r>
+              <a:rPr lang="en-US" sz="900" b="1" spc="50" kern="0" dirty="0">
+                <a:solidFill>
+                  <a:srgbClr val="FFFFFF"/>
+                </a:solidFill>
+                <a:latin typeface="Arial" pitchFamily="34" charset="0"/>
+                <a:ea typeface="Arial" pitchFamily="34" charset="-122"/>
+                <a:cs typeface="Arial" pitchFamily="34" charset="-120"/>
+              </a:rPr>
+              <a:t>UBICACIÓN REFERENCIAL · NO DELIMITA EL PREDIO</a:t>
+            </a:r>
+            <a:endParaRPr lang="en-US" sz="900" dirty="0"/>
+          </a:p>
+        </p:txBody>
+      </p:sp>
+      <p:sp>
+        <p:nvSpPr>
+          <p:cNvPr id="9" name="Text 6"/>
+          <p:cNvSpPr txBox="1"/>
+          <p:nvPr/>
+        </p:nvSpPr>
+        <p:spPr>
+          <a:xfrm>
+            <a:off x="457200" y="2834640"/>
             <a:ext cx="3200400" cy="274320"/>
           </a:xfrm>
           <a:prstGeom prst="rect">
@@ -14917,14 +15066,14 @@
       </p:sp>
       <p:sp>
         <p:nvSpPr>
-          <p:cNvPr id="7" name="Text 5"/>
-          <p:cNvSpPr txBox="1"/>
-          <p:nvPr/>
-        </p:nvSpPr>
-        <p:spPr>
-          <a:xfrm>
-            <a:off x="457200" y="2011680"/>
-            <a:ext cx="3291840" cy="868680"/>
+          <p:cNvPr id="10" name="Text 7"/>
+          <p:cNvSpPr txBox="1"/>
+          <p:nvPr/>
+        </p:nvSpPr>
+        <p:spPr>
+          <a:xfrm>
+            <a:off x="457200" y="3108960"/>
+            <a:ext cx="3383280" cy="685800"/>
           </a:xfrm>
           <a:prstGeom prst="rect">
             <a:avLst/>
@@ -14940,7 +15089,7 @@
               <a:buNone/>
             </a:pPr>
             <a:r>
-              <a:rPr lang="en-US" sz="5400" b="1" dirty="0">
+              <a:rPr lang="en-US" sz="4400" b="1" dirty="0">
                 <a:solidFill>
                   <a:srgbClr val="FFFFFF"/>
                 </a:solidFill>
@@ -14950,20 +15099,34 @@
               </a:rPr>
               <a:t>13,3570</a:t>
             </a:r>
-            <a:endParaRPr lang="en-US" sz="5400" dirty="0"/>
-          </a:p>
-        </p:txBody>
-      </p:sp>
-      <p:sp>
-        <p:nvSpPr>
-          <p:cNvPr id="8" name="Text 6"/>
-          <p:cNvSpPr txBox="1"/>
-          <p:nvPr/>
-        </p:nvSpPr>
-        <p:spPr>
-          <a:xfrm>
-            <a:off x="457200" y="2880360"/>
-            <a:ext cx="3200400" cy="274320"/>
+            <a:pPr indent="0" marL="0">
+              <a:buNone/>
+            </a:pPr>
+            <a:r>
+              <a:rPr lang="en-US" sz="1600" dirty="0">
+                <a:solidFill>
+                  <a:srgbClr val="C9CED3"/>
+                </a:solidFill>
+                <a:latin typeface="Arial" pitchFamily="34" charset="0"/>
+                <a:ea typeface="Arial" pitchFamily="34" charset="-122"/>
+                <a:cs typeface="Arial" pitchFamily="34" charset="-120"/>
+              </a:rPr>
+              <a:t>  ha</a:t>
+            </a:r>
+            <a:endParaRPr lang="en-US" sz="1400" dirty="0"/>
+          </a:p>
+        </p:txBody>
+      </p:sp>
+      <p:sp>
+        <p:nvSpPr>
+          <p:cNvPr id="11" name="Text 8"/>
+          <p:cNvSpPr txBox="1"/>
+          <p:nvPr/>
+        </p:nvSpPr>
+        <p:spPr>
+          <a:xfrm>
+            <a:off x="457200" y="3931920"/>
+            <a:ext cx="3200400" cy="228600"/>
           </a:xfrm>
           <a:prstGeom prst="rect">
             <a:avLst/>
@@ -14979,7 +15142,7 @@
               <a:buNone/>
             </a:pPr>
             <a:r>
-              <a:rPr lang="en-US" sz="1400" dirty="0">
+              <a:rPr lang="en-US" sz="1200" dirty="0">
                 <a:solidFill>
                   <a:srgbClr val="C9CED3"/>
                 </a:solidFill>
@@ -14987,22 +15150,22 @@
                 <a:ea typeface="Arial" pitchFamily="34" charset="-122"/>
                 <a:cs typeface="Arial" pitchFamily="34" charset="-120"/>
               </a:rPr>
-              <a:t>hectáreas</a:t>
-            </a:r>
-            <a:endParaRPr lang="en-US" sz="1400" dirty="0"/>
-          </a:p>
-        </p:txBody>
-      </p:sp>
-      <p:sp>
-        <p:nvSpPr>
-          <p:cNvPr id="9" name="Text 7"/>
-          <p:cNvSpPr txBox="1"/>
-          <p:nvPr/>
-        </p:nvSpPr>
-        <p:spPr>
-          <a:xfrm>
-            <a:off x="457200" y="3520440"/>
-            <a:ext cx="3200400" cy="228600"/>
+              <a:t>Testimonio citado</a:t>
+            </a:r>
+            <a:endParaRPr lang="en-US" sz="1200" dirty="0"/>
+          </a:p>
+        </p:txBody>
+      </p:sp>
+      <p:sp>
+        <p:nvSpPr>
+          <p:cNvPr id="12" name="Text 9"/>
+          <p:cNvSpPr txBox="1"/>
+          <p:nvPr/>
+        </p:nvSpPr>
+        <p:spPr>
+          <a:xfrm>
+            <a:off x="457200" y="4160520"/>
+            <a:ext cx="3291840" cy="365760"/>
           </a:xfrm>
           <a:prstGeom prst="rect">
             <a:avLst/>
@@ -15018,45 +15181,6 @@
               <a:buNone/>
             </a:pPr>
             <a:r>
-              <a:rPr lang="en-US" sz="1200" dirty="0">
-                <a:solidFill>
-                  <a:srgbClr val="C9CED3"/>
-                </a:solidFill>
-                <a:latin typeface="Arial" pitchFamily="34" charset="0"/>
-                <a:ea typeface="Arial" pitchFamily="34" charset="-122"/>
-                <a:cs typeface="Arial" pitchFamily="34" charset="-120"/>
-              </a:rPr>
-              <a:t>Testimonio citado</a:t>
-            </a:r>
-            <a:endParaRPr lang="en-US" sz="1200" dirty="0"/>
-          </a:p>
-        </p:txBody>
-      </p:sp>
-      <p:sp>
-        <p:nvSpPr>
-          <p:cNvPr id="10" name="Text 8"/>
-          <p:cNvSpPr txBox="1"/>
-          <p:nvPr/>
-        </p:nvSpPr>
-        <p:spPr>
-          <a:xfrm>
-            <a:off x="457200" y="3749040"/>
-            <a:ext cx="3291840" cy="365760"/>
-          </a:xfrm>
-          <a:prstGeom prst="rect">
-            <a:avLst/>
-          </a:prstGeom>
-          <a:noFill/>
-          <a:ln/>
-        </p:spPr>
-        <p:txBody>
-          <a:bodyPr wrap="square" lIns="0" tIns="0" rIns="0" bIns="0" rtlCol="0" anchor="t"/>
-          <a:lstStyle/>
-          <a:p>
-            <a:pPr indent="0" marL="0">
-              <a:buNone/>
-            </a:pPr>
-            <a:r>
               <a:rPr lang="en-US" sz="2200" b="1" dirty="0">
                 <a:solidFill>
                   <a:srgbClr val="FFFFFF"/>
@@ -15073,14 +15197,14 @@
       </p:sp>
       <p:sp>
         <p:nvSpPr>
-          <p:cNvPr id="11" name="Shape 9"/>
+          <p:cNvPr id="13" name="Shape 10"/>
           <p:cNvSpPr/>
           <p:nvPr/>
         </p:nvSpPr>
         <p:spPr>
           <a:xfrm>
-            <a:off x="457200" y="4434840"/>
-            <a:ext cx="3108960" cy="1828800"/>
+            <a:off x="457200" y="4754880"/>
+            <a:ext cx="3108960" cy="1600200"/>
           </a:xfrm>
           <a:prstGeom prst="rect">
             <a:avLst/>
@@ -15098,14 +15222,14 @@
       </p:sp>
       <p:sp>
         <p:nvSpPr>
-          <p:cNvPr id="12" name="Text 10"/>
-          <p:cNvSpPr txBox="1"/>
-          <p:nvPr/>
-        </p:nvSpPr>
-        <p:spPr>
-          <a:xfrm>
-            <a:off x="640080" y="4526280"/>
-            <a:ext cx="2743200" cy="1645920"/>
+          <p:cNvPr id="14" name="Text 11"/>
+          <p:cNvSpPr txBox="1"/>
+          <p:nvPr/>
+        </p:nvSpPr>
+        <p:spPr>
+          <a:xfrm>
+            <a:off x="640080" y="4754880"/>
+            <a:ext cx="2743200" cy="1600200"/>
           </a:xfrm>
           <a:prstGeom prst="rect">
             <a:avLst/>
@@ -15137,7 +15261,7 @@
       </p:sp>
       <p:sp>
         <p:nvSpPr>
-          <p:cNvPr id="13" name="Text 11"/>
+          <p:cNvPr id="15" name="Text 12"/>
           <p:cNvSpPr txBox="1"/>
           <p:nvPr/>
         </p:nvSpPr>
@@ -15176,7 +15300,7 @@
       </p:sp>
       <p:sp>
         <p:nvSpPr>
-          <p:cNvPr id="14" name="Text 12"/>
+          <p:cNvPr id="16" name="Text 13"/>
           <p:cNvSpPr txBox="1"/>
           <p:nvPr/>
         </p:nvSpPr>
@@ -15215,7 +15339,7 @@
       </p:sp>
       <p:sp>
         <p:nvSpPr>
-          <p:cNvPr id="15" name="Marca dorada"/>
+          <p:cNvPr id="17" name="Marca dorada"/>
           <p:cNvSpPr/>
           <p:nvPr/>
         </p:nvSpPr>
@@ -15240,7 +15364,7 @@
       </p:sp>
       <p:sp>
         <p:nvSpPr>
-          <p:cNvPr id="16" name="Text 14"/>
+          <p:cNvPr id="18" name="Text 15"/>
           <p:cNvSpPr txBox="1"/>
           <p:nvPr/>
         </p:nvSpPr>
@@ -15279,7 +15403,7 @@
       </p:sp>
       <p:sp>
         <p:nvSpPr>
-          <p:cNvPr id="17" name="Text 15"/>
+          <p:cNvPr id="19" name="Text 16"/>
           <p:cNvSpPr txBox="1"/>
           <p:nvPr/>
         </p:nvSpPr>
@@ -15318,7 +15442,7 @@
       </p:sp>
       <p:sp>
         <p:nvSpPr>
-          <p:cNvPr id="18" name="Shape 16"/>
+          <p:cNvPr id="20" name="Shape 17"/>
           <p:cNvSpPr/>
           <p:nvPr/>
         </p:nvSpPr>
@@ -15343,7 +15467,7 @@
       </p:sp>
       <p:sp>
         <p:nvSpPr>
-          <p:cNvPr id="19" name="Text 17"/>
+          <p:cNvPr id="21" name="Text 18"/>
           <p:cNvSpPr txBox="1"/>
           <p:nvPr/>
         </p:nvSpPr>
@@ -15382,7 +15506,7 @@
       </p:sp>
       <p:sp>
         <p:nvSpPr>
-          <p:cNvPr id="20" name="Shape 18"/>
+          <p:cNvPr id="22" name="Shape 19"/>
           <p:cNvSpPr/>
           <p:nvPr/>
         </p:nvSpPr>
@@ -15407,7 +15531,7 @@
       </p:sp>
       <p:sp>
         <p:nvSpPr>
-          <p:cNvPr id="21" name="Shape 19"/>
+          <p:cNvPr id="23" name="Shape 20"/>
           <p:cNvSpPr/>
           <p:nvPr/>
         </p:nvSpPr>
@@ -15432,7 +15556,7 @@
       </p:sp>
       <p:sp>
         <p:nvSpPr>
-          <p:cNvPr id="22" name="Text 20"/>
+          <p:cNvPr id="24" name="Text 21"/>
           <p:cNvSpPr txBox="1"/>
           <p:nvPr/>
         </p:nvSpPr>
@@ -15471,7 +15595,7 @@
       </p:sp>
       <p:sp>
         <p:nvSpPr>
-          <p:cNvPr id="23" name="Shape 21"/>
+          <p:cNvPr id="25" name="Shape 22"/>
           <p:cNvSpPr/>
           <p:nvPr/>
         </p:nvSpPr>
@@ -15496,7 +15620,7 @@
       </p:sp>
       <p:sp>
         <p:nvSpPr>
-          <p:cNvPr id="24" name="Text 22"/>
+          <p:cNvPr id="26" name="Text 23"/>
           <p:cNvSpPr txBox="1"/>
           <p:nvPr/>
         </p:nvSpPr>
@@ -15535,7 +15659,7 @@
       </p:sp>
       <p:sp>
         <p:nvSpPr>
-          <p:cNvPr id="25" name="Shape 23"/>
+          <p:cNvPr id="27" name="Shape 24"/>
           <p:cNvSpPr/>
           <p:nvPr/>
         </p:nvSpPr>
@@ -15560,7 +15684,7 @@
       </p:sp>
       <p:sp>
         <p:nvSpPr>
-          <p:cNvPr id="26" name="Shape 24"/>
+          <p:cNvPr id="28" name="Shape 25"/>
           <p:cNvSpPr/>
           <p:nvPr/>
         </p:nvSpPr>
@@ -15585,7 +15709,7 @@
       </p:sp>
       <p:sp>
         <p:nvSpPr>
-          <p:cNvPr id="27" name="Text 25"/>
+          <p:cNvPr id="29" name="Text 26"/>
           <p:cNvSpPr txBox="1"/>
           <p:nvPr/>
         </p:nvSpPr>
@@ -15624,7 +15748,7 @@
       </p:sp>
       <p:sp>
         <p:nvSpPr>
-          <p:cNvPr id="28" name="Shape 26"/>
+          <p:cNvPr id="30" name="Shape 27"/>
           <p:cNvSpPr/>
           <p:nvPr/>
         </p:nvSpPr>
@@ -15649,7 +15773,7 @@
       </p:sp>
       <p:sp>
         <p:nvSpPr>
-          <p:cNvPr id="29" name="Text 27"/>
+          <p:cNvPr id="31" name="Text 28"/>
           <p:cNvSpPr txBox="1"/>
           <p:nvPr/>
         </p:nvSpPr>
@@ -15688,7 +15812,7 @@
       </p:sp>
       <p:sp>
         <p:nvSpPr>
-          <p:cNvPr id="30" name="Shape 28"/>
+          <p:cNvPr id="32" name="Shape 29"/>
           <p:cNvSpPr/>
           <p:nvPr/>
         </p:nvSpPr>
@@ -15713,7 +15837,7 @@
       </p:sp>
       <p:sp>
         <p:nvSpPr>
-          <p:cNvPr id="31" name="Shape 29"/>
+          <p:cNvPr id="33" name="Shape 30"/>
           <p:cNvSpPr/>
           <p:nvPr/>
         </p:nvSpPr>
@@ -15738,7 +15862,7 @@
       </p:sp>
       <p:sp>
         <p:nvSpPr>
-          <p:cNvPr id="32" name="Text 30"/>
+          <p:cNvPr id="34" name="Text 31"/>
           <p:cNvSpPr txBox="1"/>
           <p:nvPr/>
         </p:nvSpPr>
@@ -15777,7 +15901,7 @@
       </p:sp>
       <p:sp>
         <p:nvSpPr>
-          <p:cNvPr id="33" name="Shape 31"/>
+          <p:cNvPr id="35" name="Shape 32"/>
           <p:cNvSpPr/>
           <p:nvPr/>
         </p:nvSpPr>
@@ -15802,7 +15926,7 @@
       </p:sp>
       <p:sp>
         <p:nvSpPr>
-          <p:cNvPr id="34" name="Text 32"/>
+          <p:cNvPr id="36" name="Text 33"/>
           <p:cNvSpPr txBox="1"/>
           <p:nvPr/>
         </p:nvSpPr>
@@ -15841,7 +15965,7 @@
       </p:sp>
       <p:sp>
         <p:nvSpPr>
-          <p:cNvPr id="35" name="Shape 33"/>
+          <p:cNvPr id="37" name="Shape 34"/>
           <p:cNvSpPr/>
           <p:nvPr/>
         </p:nvSpPr>
@@ -15866,7 +15990,7 @@
       </p:sp>
       <p:sp>
         <p:nvSpPr>
-          <p:cNvPr id="36" name="Shape 34"/>
+          <p:cNvPr id="38" name="Shape 35"/>
           <p:cNvSpPr/>
           <p:nvPr/>
         </p:nvSpPr>
@@ -15891,7 +16015,7 @@
       </p:sp>
       <p:sp>
         <p:nvSpPr>
-          <p:cNvPr id="37" name="Text 35"/>
+          <p:cNvPr id="39" name="Text 36"/>
           <p:cNvSpPr txBox="1"/>
           <p:nvPr/>
         </p:nvSpPr>
@@ -15930,7 +16054,7 @@
       </p:sp>
       <p:sp>
         <p:nvSpPr>
-          <p:cNvPr id="38" name="Tarjeta * CÁLCULO ARITMÉTICO"/>
+          <p:cNvPr id="40" name="Tarjeta * CÁLCULO ARITMÉTICO"/>
           <p:cNvSpPr/>
           <p:nvPr/>
         </p:nvSpPr>
@@ -15962,7 +16086,7 @@
       </p:sp>
       <p:sp>
         <p:nvSpPr>
-          <p:cNvPr id="39" name="Shape 37"/>
+          <p:cNvPr id="41" name="Shape 38"/>
           <p:cNvSpPr/>
           <p:nvPr/>
         </p:nvSpPr>
@@ -15987,7 +16111,7 @@
       </p:sp>
       <p:sp>
         <p:nvSpPr>
-          <p:cNvPr id="40" name="Text 38"/>
+          <p:cNvPr id="42" name="Text 39"/>
           <p:cNvSpPr txBox="1"/>
           <p:nvPr/>
         </p:nvSpPr>
@@ -16026,7 +16150,7 @@
       </p:sp>
       <p:sp>
         <p:nvSpPr>
-          <p:cNvPr id="41" name="Text 39"/>
+          <p:cNvPr id="43" name="Text 40"/>
           <p:cNvSpPr txBox="1"/>
           <p:nvPr/>
         </p:nvSpPr>
@@ -16065,7 +16189,7 @@
       </p:sp>
       <p:sp>
         <p:nvSpPr>
-          <p:cNvPr id="42" name="Text 40"/>
+          <p:cNvPr id="44" name="Text 41"/>
           <p:cNvSpPr txBox="1"/>
           <p:nvPr/>
         </p:nvSpPr>
@@ -16200,16 +16324,39 @@
           </a:ln>
         </p:spPr>
       </p:sp>
-      <p:sp>
-        <p:nvSpPr>
-          <p:cNvPr id="3" name="Etiqueta"/>
+      <p:pic>
+        <p:nvPicPr>
+          <p:cNvPr id="3" name="Image 0" descr="Mapa referencial de la zona Mamani y la ciudad de Viacha">    </p:cNvPr>
+          <p:cNvPicPr>
+            <a:picLocks noChangeAspect="1"/>
+          </p:cNvPicPr>
+          <p:nvPr/>
+        </p:nvPicPr>
+        <p:blipFill>
+          <a:blip r:embed="rId1"/>
+          <a:srcRect l="0" r="0" t="0" b="0"/>
+          <a:stretch/>
+        </p:blipFill>
+        <p:spPr>
+          <a:xfrm>
+            <a:off x="0" y="0"/>
+            <a:ext cx="4023360" cy="2651760"/>
+          </a:xfrm>
+          <a:prstGeom prst="rect">
+            <a:avLst/>
+          </a:prstGeom>
+        </p:spPr>
+      </p:pic>
+      <p:sp>
+        <p:nvSpPr>
+          <p:cNvPr id="4" name="Etiqueta"/>
           <p:cNvSpPr/>
           <p:nvPr/>
         </p:nvSpPr>
         <p:spPr>
           <a:xfrm>
-            <a:off x="457200" y="457200"/>
-            <a:ext cx="3108960" cy="822960"/>
+            <a:off x="274320" y="274320"/>
+            <a:ext cx="2286000" cy="731520"/>
           </a:xfrm>
           <a:prstGeom prst="rect">
             <a:avLst/>
@@ -16227,14 +16374,14 @@
       </p:sp>
       <p:sp>
         <p:nvSpPr>
-          <p:cNvPr id="4" name="Etiqueta barra"/>
+          <p:cNvPr id="5" name="Etiqueta barra"/>
           <p:cNvSpPr/>
           <p:nvPr/>
         </p:nvSpPr>
         <p:spPr>
           <a:xfrm>
-            <a:off x="457200" y="457200"/>
-            <a:ext cx="64008" cy="822960"/>
+            <a:off x="274320" y="274320"/>
+            <a:ext cx="64008" cy="731520"/>
           </a:xfrm>
           <a:prstGeom prst="rect">
             <a:avLst/>
@@ -16252,14 +16399,14 @@
       </p:sp>
       <p:sp>
         <p:nvSpPr>
-          <p:cNvPr id="5" name="Text 3"/>
-          <p:cNvSpPr txBox="1"/>
-          <p:nvPr/>
-        </p:nvSpPr>
-        <p:spPr>
-          <a:xfrm>
-            <a:off x="731520" y="457200"/>
-            <a:ext cx="2743200" cy="822960"/>
+          <p:cNvPr id="6" name="Text 3"/>
+          <p:cNvSpPr txBox="1"/>
+          <p:nvPr/>
+        </p:nvSpPr>
+        <p:spPr>
+          <a:xfrm>
+            <a:off x="548640" y="274320"/>
+            <a:ext cx="1920240" cy="731520"/>
           </a:xfrm>
           <a:prstGeom prst="rect">
             <a:avLst/>
@@ -16275,7 +16422,7 @@
               <a:buNone/>
             </a:pPr>
             <a:r>
-              <a:rPr lang="en-US" sz="1300" dirty="0">
+              <a:rPr lang="en-US" sz="1200" dirty="0">
                 <a:solidFill>
                   <a:srgbClr val="FFFFFF"/>
                 </a:solidFill>
@@ -16292,7 +16439,7 @@
               <a:buNone/>
             </a:pPr>
             <a:r>
-              <a:rPr lang="en-US" sz="1800" b="1" dirty="0">
+              <a:rPr lang="en-US" sz="1600" b="1" dirty="0">
                 <a:solidFill>
                   <a:srgbClr val="FFFFFF"/>
                 </a:solidFill>
@@ -16308,13 +16455,77 @@
       </p:sp>
       <p:sp>
         <p:nvSpPr>
-          <p:cNvPr id="6" name="Text 4"/>
-          <p:cNvSpPr txBox="1"/>
-          <p:nvPr/>
-        </p:nvSpPr>
-        <p:spPr>
-          <a:xfrm>
-            <a:off x="457200" y="1737360"/>
+          <p:cNvPr id="7" name="Shape 4"/>
+          <p:cNvSpPr/>
+          <p:nvPr/>
+        </p:nvSpPr>
+        <p:spPr>
+          <a:xfrm>
+            <a:off x="0" y="2286000"/>
+            <a:ext cx="4023360" cy="365760"/>
+          </a:xfrm>
+          <a:prstGeom prst="rect">
+            <a:avLst/>
+          </a:prstGeom>
+          <a:solidFill>
+            <a:srgbClr val="1B2126"/>
+          </a:solidFill>
+          <a:ln w="12700">
+            <a:solidFill>
+              <a:srgbClr val="1B2126"/>
+            </a:solidFill>
+            <a:prstDash val="solid"/>
+          </a:ln>
+        </p:spPr>
+      </p:sp>
+      <p:sp>
+        <p:nvSpPr>
+          <p:cNvPr id="8" name="Text 5"/>
+          <p:cNvSpPr txBox="1"/>
+          <p:nvPr/>
+        </p:nvSpPr>
+        <p:spPr>
+          <a:xfrm>
+            <a:off x="274320" y="2286000"/>
+            <a:ext cx="3657600" cy="365760"/>
+          </a:xfrm>
+          <a:prstGeom prst="rect">
+            <a:avLst/>
+          </a:prstGeom>
+          <a:noFill/>
+          <a:ln/>
+        </p:spPr>
+        <p:txBody>
+          <a:bodyPr wrap="square" lIns="0" tIns="0" rIns="0" bIns="0" rtlCol="0" anchor="ctr"/>
+          <a:lstStyle/>
+          <a:p>
+            <a:pPr indent="0" marL="0">
+              <a:buNone/>
+            </a:pPr>
+            <a:r>
+              <a:rPr lang="en-US" sz="900" b="1" spc="50" kern="0" dirty="0">
+                <a:solidFill>
+                  <a:srgbClr val="FFFFFF"/>
+                </a:solidFill>
+                <a:latin typeface="Arial" pitchFamily="34" charset="0"/>
+                <a:ea typeface="Arial" pitchFamily="34" charset="-122"/>
+                <a:cs typeface="Arial" pitchFamily="34" charset="-120"/>
+              </a:rPr>
+              <a:t>UBICACIÓN REFERENCIAL · NO DELIMITA EL PREDIO</a:t>
+            </a:r>
+            <a:endParaRPr lang="en-US" sz="900" dirty="0"/>
+          </a:p>
+        </p:txBody>
+      </p:sp>
+      <p:sp>
+        <p:nvSpPr>
+          <p:cNvPr id="9" name="Text 6"/>
+          <p:cNvSpPr txBox="1"/>
+          <p:nvPr/>
+        </p:nvSpPr>
+        <p:spPr>
+          <a:xfrm>
+            <a:off x="457200" y="2834640"/>
             <a:ext cx="3200400" cy="274320"/>
           </a:xfrm>
           <a:prstGeom prst="rect">
@@ -16347,14 +16558,14 @@
       </p:sp>
       <p:sp>
         <p:nvSpPr>
-          <p:cNvPr id="7" name="Text 5"/>
-          <p:cNvSpPr txBox="1"/>
-          <p:nvPr/>
-        </p:nvSpPr>
-        <p:spPr>
-          <a:xfrm>
-            <a:off x="457200" y="2011680"/>
-            <a:ext cx="3291840" cy="868680"/>
+          <p:cNvPr id="10" name="Text 7"/>
+          <p:cNvSpPr txBox="1"/>
+          <p:nvPr/>
+        </p:nvSpPr>
+        <p:spPr>
+          <a:xfrm>
+            <a:off x="457200" y="3108960"/>
+            <a:ext cx="3383280" cy="685800"/>
           </a:xfrm>
           <a:prstGeom prst="rect">
             <a:avLst/>
@@ -16370,7 +16581,7 @@
               <a:buNone/>
             </a:pPr>
             <a:r>
-              <a:rPr lang="en-US" sz="5400" b="1" dirty="0">
+              <a:rPr lang="en-US" sz="4400" b="1" dirty="0">
                 <a:solidFill>
                   <a:srgbClr val="FFFFFF"/>
                 </a:solidFill>
@@ -16380,20 +16591,34 @@
               </a:rPr>
               <a:t>18,5512</a:t>
             </a:r>
-            <a:endParaRPr lang="en-US" sz="5400" dirty="0"/>
-          </a:p>
-        </p:txBody>
-      </p:sp>
-      <p:sp>
-        <p:nvSpPr>
-          <p:cNvPr id="8" name="Text 6"/>
-          <p:cNvSpPr txBox="1"/>
-          <p:nvPr/>
-        </p:nvSpPr>
-        <p:spPr>
-          <a:xfrm>
-            <a:off x="457200" y="2880360"/>
-            <a:ext cx="3200400" cy="274320"/>
+            <a:pPr indent="0" marL="0">
+              <a:buNone/>
+            </a:pPr>
+            <a:r>
+              <a:rPr lang="en-US" sz="1600" dirty="0">
+                <a:solidFill>
+                  <a:srgbClr val="C9CED3"/>
+                </a:solidFill>
+                <a:latin typeface="Arial" pitchFamily="34" charset="0"/>
+                <a:ea typeface="Arial" pitchFamily="34" charset="-122"/>
+                <a:cs typeface="Arial" pitchFamily="34" charset="-120"/>
+              </a:rPr>
+              <a:t>  ha</a:t>
+            </a:r>
+            <a:endParaRPr lang="en-US" sz="1400" dirty="0"/>
+          </a:p>
+        </p:txBody>
+      </p:sp>
+      <p:sp>
+        <p:nvSpPr>
+          <p:cNvPr id="11" name="Text 8"/>
+          <p:cNvSpPr txBox="1"/>
+          <p:nvPr/>
+        </p:nvSpPr>
+        <p:spPr>
+          <a:xfrm>
+            <a:off x="457200" y="3931920"/>
+            <a:ext cx="3200400" cy="228600"/>
           </a:xfrm>
           <a:prstGeom prst="rect">
             <a:avLst/>
@@ -16409,7 +16634,7 @@
               <a:buNone/>
             </a:pPr>
             <a:r>
-              <a:rPr lang="en-US" sz="1400" dirty="0">
+              <a:rPr lang="en-US" sz="1200" dirty="0">
                 <a:solidFill>
                   <a:srgbClr val="C9CED3"/>
                 </a:solidFill>
@@ -16417,22 +16642,22 @@
                 <a:ea typeface="Arial" pitchFamily="34" charset="-122"/>
                 <a:cs typeface="Arial" pitchFamily="34" charset="-120"/>
               </a:rPr>
-              <a:t>hectáreas</a:t>
-            </a:r>
-            <a:endParaRPr lang="en-US" sz="1400" dirty="0"/>
-          </a:p>
-        </p:txBody>
-      </p:sp>
-      <p:sp>
-        <p:nvSpPr>
-          <p:cNvPr id="9" name="Text 7"/>
-          <p:cNvSpPr txBox="1"/>
-          <p:nvPr/>
-        </p:nvSpPr>
-        <p:spPr>
-          <a:xfrm>
-            <a:off x="457200" y="3520440"/>
-            <a:ext cx="3200400" cy="228600"/>
+              <a:t>Testimonio citado</a:t>
+            </a:r>
+            <a:endParaRPr lang="en-US" sz="1200" dirty="0"/>
+          </a:p>
+        </p:txBody>
+      </p:sp>
+      <p:sp>
+        <p:nvSpPr>
+          <p:cNvPr id="12" name="Text 9"/>
+          <p:cNvSpPr txBox="1"/>
+          <p:nvPr/>
+        </p:nvSpPr>
+        <p:spPr>
+          <a:xfrm>
+            <a:off x="457200" y="4160520"/>
+            <a:ext cx="3291840" cy="365760"/>
           </a:xfrm>
           <a:prstGeom prst="rect">
             <a:avLst/>
@@ -16448,45 +16673,6 @@
               <a:buNone/>
             </a:pPr>
             <a:r>
-              <a:rPr lang="en-US" sz="1200" dirty="0">
-                <a:solidFill>
-                  <a:srgbClr val="C9CED3"/>
-                </a:solidFill>
-                <a:latin typeface="Arial" pitchFamily="34" charset="0"/>
-                <a:ea typeface="Arial" pitchFamily="34" charset="-122"/>
-                <a:cs typeface="Arial" pitchFamily="34" charset="-120"/>
-              </a:rPr>
-              <a:t>Testimonio citado</a:t>
-            </a:r>
-            <a:endParaRPr lang="en-US" sz="1200" dirty="0"/>
-          </a:p>
-        </p:txBody>
-      </p:sp>
-      <p:sp>
-        <p:nvSpPr>
-          <p:cNvPr id="10" name="Text 8"/>
-          <p:cNvSpPr txBox="1"/>
-          <p:nvPr/>
-        </p:nvSpPr>
-        <p:spPr>
-          <a:xfrm>
-            <a:off x="457200" y="3749040"/>
-            <a:ext cx="3291840" cy="365760"/>
-          </a:xfrm>
-          <a:prstGeom prst="rect">
-            <a:avLst/>
-          </a:prstGeom>
-          <a:noFill/>
-          <a:ln/>
-        </p:spPr>
-        <p:txBody>
-          <a:bodyPr wrap="square" lIns="0" tIns="0" rIns="0" bIns="0" rtlCol="0" anchor="t"/>
-          <a:lstStyle/>
-          <a:p>
-            <a:pPr indent="0" marL="0">
-              <a:buNone/>
-            </a:pPr>
-            <a:r>
               <a:rPr lang="en-US" sz="2200" b="1" dirty="0">
                 <a:solidFill>
                   <a:srgbClr val="FFFFFF"/>
@@ -16503,14 +16689,14 @@
       </p:sp>
       <p:sp>
         <p:nvSpPr>
-          <p:cNvPr id="11" name="Shape 9"/>
+          <p:cNvPr id="13" name="Shape 10"/>
           <p:cNvSpPr/>
           <p:nvPr/>
         </p:nvSpPr>
         <p:spPr>
           <a:xfrm>
-            <a:off x="457200" y="4434840"/>
-            <a:ext cx="3108960" cy="1828800"/>
+            <a:off x="457200" y="4754880"/>
+            <a:ext cx="3108960" cy="1600200"/>
           </a:xfrm>
           <a:prstGeom prst="rect">
             <a:avLst/>
@@ -16528,14 +16714,14 @@
       </p:sp>
       <p:sp>
         <p:nvSpPr>
-          <p:cNvPr id="12" name="Text 10"/>
-          <p:cNvSpPr txBox="1"/>
-          <p:nvPr/>
-        </p:nvSpPr>
-        <p:spPr>
-          <a:xfrm>
-            <a:off x="640080" y="4526280"/>
-            <a:ext cx="2743200" cy="1645920"/>
+          <p:cNvPr id="14" name="Text 11"/>
+          <p:cNvSpPr txBox="1"/>
+          <p:nvPr/>
+        </p:nvSpPr>
+        <p:spPr>
+          <a:xfrm>
+            <a:off x="640080" y="4754880"/>
+            <a:ext cx="2743200" cy="1600200"/>
           </a:xfrm>
           <a:prstGeom prst="rect">
             <a:avLst/>
@@ -16567,7 +16753,7 @@
       </p:sp>
       <p:sp>
         <p:nvSpPr>
-          <p:cNvPr id="13" name="Text 11"/>
+          <p:cNvPr id="15" name="Text 12"/>
           <p:cNvSpPr txBox="1"/>
           <p:nvPr/>
         </p:nvSpPr>
@@ -16606,7 +16792,7 @@
       </p:sp>
       <p:sp>
         <p:nvSpPr>
-          <p:cNvPr id="14" name="Text 12"/>
+          <p:cNvPr id="16" name="Text 13"/>
           <p:cNvSpPr txBox="1"/>
           <p:nvPr/>
         </p:nvSpPr>
@@ -16645,7 +16831,7 @@
       </p:sp>
       <p:sp>
         <p:nvSpPr>
-          <p:cNvPr id="15" name="Marca dorada"/>
+          <p:cNvPr id="17" name="Marca dorada"/>
           <p:cNvSpPr/>
           <p:nvPr/>
         </p:nvSpPr>
@@ -16670,7 +16856,7 @@
       </p:sp>
       <p:sp>
         <p:nvSpPr>
-          <p:cNvPr id="16" name="Text 14"/>
+          <p:cNvPr id="18" name="Text 15"/>
           <p:cNvSpPr txBox="1"/>
           <p:nvPr/>
         </p:nvSpPr>
@@ -16709,7 +16895,7 @@
       </p:sp>
       <p:sp>
         <p:nvSpPr>
-          <p:cNvPr id="17" name="Text 15"/>
+          <p:cNvPr id="19" name="Text 16"/>
           <p:cNvSpPr txBox="1"/>
           <p:nvPr/>
         </p:nvSpPr>
@@ -16748,7 +16934,7 @@
       </p:sp>
       <p:sp>
         <p:nvSpPr>
-          <p:cNvPr id="18" name="Shape 16"/>
+          <p:cNvPr id="20" name="Shape 17"/>
           <p:cNvSpPr/>
           <p:nvPr/>
         </p:nvSpPr>
@@ -16773,7 +16959,7 @@
       </p:sp>
       <p:sp>
         <p:nvSpPr>
-          <p:cNvPr id="19" name="Text 17"/>
+          <p:cNvPr id="21" name="Text 18"/>
           <p:cNvSpPr txBox="1"/>
           <p:nvPr/>
         </p:nvSpPr>
@@ -16812,7 +16998,7 @@
       </p:sp>
       <p:sp>
         <p:nvSpPr>
-          <p:cNvPr id="20" name="Shape 18"/>
+          <p:cNvPr id="22" name="Shape 19"/>
           <p:cNvSpPr/>
           <p:nvPr/>
         </p:nvSpPr>
@@ -16837,7 +17023,7 @@
       </p:sp>
       <p:sp>
         <p:nvSpPr>
-          <p:cNvPr id="21" name="Shape 19"/>
+          <p:cNvPr id="23" name="Shape 20"/>
           <p:cNvSpPr/>
           <p:nvPr/>
         </p:nvSpPr>
@@ -16862,7 +17048,7 @@
       </p:sp>
       <p:sp>
         <p:nvSpPr>
-          <p:cNvPr id="22" name="Text 20"/>
+          <p:cNvPr id="24" name="Text 21"/>
           <p:cNvSpPr txBox="1"/>
           <p:nvPr/>
         </p:nvSpPr>
@@ -16901,7 +17087,7 @@
       </p:sp>
       <p:sp>
         <p:nvSpPr>
-          <p:cNvPr id="23" name="Shape 21"/>
+          <p:cNvPr id="25" name="Shape 22"/>
           <p:cNvSpPr/>
           <p:nvPr/>
         </p:nvSpPr>
@@ -16926,7 +17112,7 @@
       </p:sp>
       <p:sp>
         <p:nvSpPr>
-          <p:cNvPr id="24" name="Text 22"/>
+          <p:cNvPr id="26" name="Text 23"/>
           <p:cNvSpPr txBox="1"/>
           <p:nvPr/>
         </p:nvSpPr>
@@ -16965,7 +17151,7 @@
       </p:sp>
       <p:sp>
         <p:nvSpPr>
-          <p:cNvPr id="25" name="Shape 23"/>
+          <p:cNvPr id="27" name="Shape 24"/>
           <p:cNvSpPr/>
           <p:nvPr/>
         </p:nvSpPr>
@@ -16990,7 +17176,7 @@
       </p:sp>
       <p:sp>
         <p:nvSpPr>
-          <p:cNvPr id="26" name="Shape 24"/>
+          <p:cNvPr id="28" name="Shape 25"/>
           <p:cNvSpPr/>
           <p:nvPr/>
         </p:nvSpPr>
@@ -17015,7 +17201,7 @@
       </p:sp>
       <p:sp>
         <p:nvSpPr>
-          <p:cNvPr id="27" name="Text 25"/>
+          <p:cNvPr id="29" name="Text 26"/>
           <p:cNvSpPr txBox="1"/>
           <p:nvPr/>
         </p:nvSpPr>
@@ -17054,7 +17240,7 @@
       </p:sp>
       <p:sp>
         <p:nvSpPr>
-          <p:cNvPr id="28" name="Shape 26"/>
+          <p:cNvPr id="30" name="Shape 27"/>
           <p:cNvSpPr/>
           <p:nvPr/>
         </p:nvSpPr>
@@ -17079,7 +17265,7 @@
       </p:sp>
       <p:sp>
         <p:nvSpPr>
-          <p:cNvPr id="29" name="Text 27"/>
+          <p:cNvPr id="31" name="Text 28"/>
           <p:cNvSpPr txBox="1"/>
           <p:nvPr/>
         </p:nvSpPr>
@@ -17118,7 +17304,7 @@
       </p:sp>
       <p:sp>
         <p:nvSpPr>
-          <p:cNvPr id="30" name="Shape 28"/>
+          <p:cNvPr id="32" name="Shape 29"/>
           <p:cNvSpPr/>
           <p:nvPr/>
         </p:nvSpPr>
@@ -17143,7 +17329,7 @@
       </p:sp>
       <p:sp>
         <p:nvSpPr>
-          <p:cNvPr id="31" name="Shape 29"/>
+          <p:cNvPr id="33" name="Shape 30"/>
           <p:cNvSpPr/>
           <p:nvPr/>
         </p:nvSpPr>
@@ -17168,7 +17354,7 @@
       </p:sp>
       <p:sp>
         <p:nvSpPr>
-          <p:cNvPr id="32" name="Text 30"/>
+          <p:cNvPr id="34" name="Text 31"/>
           <p:cNvSpPr txBox="1"/>
           <p:nvPr/>
         </p:nvSpPr>
@@ -17207,7 +17393,7 @@
       </p:sp>
       <p:sp>
         <p:nvSpPr>
-          <p:cNvPr id="33" name="Shape 31"/>
+          <p:cNvPr id="35" name="Shape 32"/>
           <p:cNvSpPr/>
           <p:nvPr/>
         </p:nvSpPr>
@@ -17232,7 +17418,7 @@
       </p:sp>
       <p:sp>
         <p:nvSpPr>
-          <p:cNvPr id="34" name="Text 32"/>
+          <p:cNvPr id="36" name="Text 33"/>
           <p:cNvSpPr txBox="1"/>
           <p:nvPr/>
         </p:nvSpPr>
@@ -17271,7 +17457,7 @@
       </p:sp>
       <p:sp>
         <p:nvSpPr>
-          <p:cNvPr id="35" name="Shape 33"/>
+          <p:cNvPr id="37" name="Shape 34"/>
           <p:cNvSpPr/>
           <p:nvPr/>
         </p:nvSpPr>
@@ -17296,7 +17482,7 @@
       </p:sp>
       <p:sp>
         <p:nvSpPr>
-          <p:cNvPr id="36" name="Shape 34"/>
+          <p:cNvPr id="38" name="Shape 35"/>
           <p:cNvSpPr/>
           <p:nvPr/>
         </p:nvSpPr>
@@ -17321,7 +17507,7 @@
       </p:sp>
       <p:sp>
         <p:nvSpPr>
-          <p:cNvPr id="37" name="Text 35"/>
+          <p:cNvPr id="39" name="Text 36"/>
           <p:cNvSpPr txBox="1"/>
           <p:nvPr/>
         </p:nvSpPr>
@@ -17360,7 +17546,7 @@
       </p:sp>
       <p:sp>
         <p:nvSpPr>
-          <p:cNvPr id="38" name="Tarjeta PUNTO DE CONTROL"/>
+          <p:cNvPr id="40" name="Tarjeta PUNTO DE CONTROL"/>
           <p:cNvSpPr/>
           <p:nvPr/>
         </p:nvSpPr>
@@ -17392,7 +17578,7 @@
       </p:sp>
       <p:sp>
         <p:nvSpPr>
-          <p:cNvPr id="39" name="Shape 37"/>
+          <p:cNvPr id="41" name="Shape 38"/>
           <p:cNvSpPr/>
           <p:nvPr/>
         </p:nvSpPr>
@@ -17417,7 +17603,7 @@
       </p:sp>
       <p:sp>
         <p:nvSpPr>
-          <p:cNvPr id="40" name="Text 38"/>
+          <p:cNvPr id="42" name="Text 39"/>
           <p:cNvSpPr txBox="1"/>
           <p:nvPr/>
         </p:nvSpPr>
@@ -17456,7 +17642,7 @@
       </p:sp>
       <p:sp>
         <p:nvSpPr>
-          <p:cNvPr id="41" name="Text 39"/>
+          <p:cNvPr id="43" name="Text 40"/>
           <p:cNvSpPr txBox="1"/>
           <p:nvPr/>
         </p:nvSpPr>
@@ -17495,7 +17681,7 @@
       </p:sp>
       <p:sp>
         <p:nvSpPr>
-          <p:cNvPr id="42" name="Text 40"/>
+          <p:cNvPr id="44" name="Text 41"/>
           <p:cNvSpPr txBox="1"/>
           <p:nvPr/>
         </p:nvSpPr>
